--- a/docs/apresentacao/LAVBOX_apresentacao.pptx
+++ b/docs/apresentacao/LAVBOX_apresentacao.pptx
@@ -483,6 +483,916 @@
     </a:lvl9pPr>
   </p:notesStyle>
 </p:notesMaster>
+</file>
+
+<file path=ppt/notesSlides/notesSlide1.xml><?xml version="1.0" encoding="utf-8"?>
+<p:notes xmlns:a="http://schemas.openxmlformats.org/drawingml/2006/main" xmlns:p="http://schemas.openxmlformats.org/presentationml/2006/main" xmlns:r="http://schemas.openxmlformats.org/officeDocument/2006/relationships">
+  <p:cSld>
+    <p:spTree>
+      <p:nvGrpSpPr>
+        <p:cNvPr id="1" name=""/>
+        <p:cNvGrpSpPr/>
+        <p:nvPr/>
+      </p:nvGrpSpPr>
+      <p:grpSpPr>
+        <a:xfrm>
+          <a:off x="0" y="0"/>
+          <a:ext cx="0" cy="0"/>
+          <a:chOff x="0" y="0"/>
+          <a:chExt cx="0" cy="0"/>
+        </a:xfrm>
+      </p:grpSpPr>
+      <p:sp>
+        <p:nvSpPr>
+          <p:cNvPr id="2" name="Slide Image Placeholder 1"/>
+          <p:cNvSpPr>
+            <a:spLocks noGrp="1"/>
+          </p:cNvSpPr>
+          <p:nvPr>
+            <p:ph type="sldImg" idx="2"/>
+          </p:nvPr>
+        </p:nvSpPr>
+        <p:spPr/>
+      </p:sp>
+      <p:sp>
+        <p:nvSpPr>
+          <p:cNvPr id="3" name="Notes Placeholder 2"/>
+          <p:cNvSpPr>
+            <a:spLocks noGrp="1"/>
+          </p:cNvSpPr>
+          <p:nvPr>
+            <p:ph type="body" idx="3" sz="quarter"/>
+          </p:nvPr>
+        </p:nvSpPr>
+        <p:spPr/>
+        <p:txBody>
+          <a:bodyPr/>
+          <a:lstStyle/>
+          <a:p>
+            <a:r>
+              <a:t>MEMBRO 1 · Abertura (30 s). Pergunta para a banca: quanto tempo vocês gastam levando o carro ao lava-jato e esperando? Apresentar o título, o evento e a data.</a:t>
+            </a:r>
+          </a:p>
+        </p:txBody>
+      </p:sp>
+      <p:sp>
+        <p:nvSpPr>
+          <p:cNvPr id="4" name="Slide Number Placeholder 3"/>
+          <p:cNvSpPr>
+            <a:spLocks noGrp="1"/>
+          </p:cNvSpPr>
+          <p:nvPr>
+            <p:ph type="sldNum" idx="5" sz="quarter"/>
+          </p:nvPr>
+        </p:nvSpPr>
+        <p:spPr/>
+      </p:sp>
+    </p:spTree>
+  </p:cSld>
+  <p:clrMapOvr>
+    <a:masterClrMapping/>
+  </p:clrMapOvr>
+</p:notes>
+</file>
+
+<file path=ppt/notesSlides/notesSlide10.xml><?xml version="1.0" encoding="utf-8"?>
+<p:notes xmlns:a="http://schemas.openxmlformats.org/drawingml/2006/main" xmlns:p="http://schemas.openxmlformats.org/presentationml/2006/main" xmlns:r="http://schemas.openxmlformats.org/officeDocument/2006/relationships">
+  <p:cSld>
+    <p:spTree>
+      <p:nvGrpSpPr>
+        <p:cNvPr id="1" name=""/>
+        <p:cNvGrpSpPr/>
+        <p:nvPr/>
+      </p:nvGrpSpPr>
+      <p:grpSpPr>
+        <a:xfrm>
+          <a:off x="0" y="0"/>
+          <a:ext cx="0" cy="0"/>
+          <a:chOff x="0" y="0"/>
+          <a:chExt cx="0" cy="0"/>
+        </a:xfrm>
+      </p:grpSpPr>
+      <p:sp>
+        <p:nvSpPr>
+          <p:cNvPr id="2" name="Slide Image Placeholder 1"/>
+          <p:cNvSpPr>
+            <a:spLocks noGrp="1"/>
+          </p:cNvSpPr>
+          <p:nvPr>
+            <p:ph type="sldImg" idx="2"/>
+          </p:nvPr>
+        </p:nvSpPr>
+        <p:spPr/>
+      </p:sp>
+      <p:sp>
+        <p:nvSpPr>
+          <p:cNvPr id="3" name="Notes Placeholder 2"/>
+          <p:cNvSpPr>
+            <a:spLocks noGrp="1"/>
+          </p:cNvSpPr>
+          <p:nvPr>
+            <p:ph type="body" idx="3" sz="quarter"/>
+          </p:nvPr>
+        </p:nvSpPr>
+        <p:spPr/>
+        <p:txBody>
+          <a:bodyPr/>
+          <a:lstStyle/>
+          <a:p>
+            <a:r>
+              <a:t>MEMBRO 3 · Arquitetura (1 min): aplicativo web instalável (PWA) no GitHub Pages; Supabase com login, banco com controle por linha (RLS), funções no servidor e tempo real; mapas gratuitos (OpenStreetMap). Sem servidor próprio e custo zero na demonstração.</a:t>
+            </a:r>
+          </a:p>
+        </p:txBody>
+      </p:sp>
+      <p:sp>
+        <p:nvSpPr>
+          <p:cNvPr id="4" name="Slide Number Placeholder 3"/>
+          <p:cNvSpPr>
+            <a:spLocks noGrp="1"/>
+          </p:cNvSpPr>
+          <p:nvPr>
+            <p:ph type="sldNum" idx="5" sz="quarter"/>
+          </p:nvPr>
+        </p:nvSpPr>
+        <p:spPr/>
+      </p:sp>
+    </p:spTree>
+  </p:cSld>
+  <p:clrMapOvr>
+    <a:masterClrMapping/>
+  </p:clrMapOvr>
+</p:notes>
+</file>
+
+<file path=ppt/notesSlides/notesSlide11.xml><?xml version="1.0" encoding="utf-8"?>
+<p:notes xmlns:a="http://schemas.openxmlformats.org/drawingml/2006/main" xmlns:p="http://schemas.openxmlformats.org/presentationml/2006/main" xmlns:r="http://schemas.openxmlformats.org/officeDocument/2006/relationships">
+  <p:cSld>
+    <p:spTree>
+      <p:nvGrpSpPr>
+        <p:cNvPr id="1" name=""/>
+        <p:cNvGrpSpPr/>
+        <p:nvPr/>
+      </p:nvGrpSpPr>
+      <p:grpSpPr>
+        <a:xfrm>
+          <a:off x="0" y="0"/>
+          <a:ext cx="0" cy="0"/>
+          <a:chOff x="0" y="0"/>
+          <a:chExt cx="0" cy="0"/>
+        </a:xfrm>
+      </p:grpSpPr>
+      <p:sp>
+        <p:nvSpPr>
+          <p:cNvPr id="2" name="Slide Image Placeholder 1"/>
+          <p:cNvSpPr>
+            <a:spLocks noGrp="1"/>
+          </p:cNvSpPr>
+          <p:nvPr>
+            <p:ph type="sldImg" idx="2"/>
+          </p:nvPr>
+        </p:nvSpPr>
+        <p:spPr/>
+      </p:sp>
+      <p:sp>
+        <p:nvSpPr>
+          <p:cNvPr id="3" name="Notes Placeholder 2"/>
+          <p:cNvSpPr>
+            <a:spLocks noGrp="1"/>
+          </p:cNvSpPr>
+          <p:nvPr>
+            <p:ph type="body" idx="3" sz="quarter"/>
+          </p:nvPr>
+        </p:nvSpPr>
+        <p:spPr/>
+        <p:txBody>
+          <a:bodyPr/>
+          <a:lstStyle/>
+          <a:p>
+            <a:r>
+              <a:t>MEMBRO 3 · Segurança (1,5 min): o navegador nunca escreve direto nos pedidos; só funções do servidor que validam perfil, etapa, preço e código. Citar 3 ameaças: lavador pulando etapa, ver endereço sem aceitar, falso início (código + bloqueio após 5 erros). Opcional: entrar como admin e mostrar que o painel só tem números.</a:t>
+            </a:r>
+          </a:p>
+        </p:txBody>
+      </p:sp>
+      <p:sp>
+        <p:nvSpPr>
+          <p:cNvPr id="4" name="Slide Number Placeholder 3"/>
+          <p:cNvSpPr>
+            <a:spLocks noGrp="1"/>
+          </p:cNvSpPr>
+          <p:nvPr>
+            <p:ph type="sldNum" idx="5" sz="quarter"/>
+          </p:nvPr>
+        </p:nvSpPr>
+        <p:spPr/>
+      </p:sp>
+    </p:spTree>
+  </p:cSld>
+  <p:clrMapOvr>
+    <a:masterClrMapping/>
+  </p:clrMapOvr>
+</p:notes>
+</file>
+
+<file path=ppt/notesSlides/notesSlide12.xml><?xml version="1.0" encoding="utf-8"?>
+<p:notes xmlns:a="http://schemas.openxmlformats.org/drawingml/2006/main" xmlns:p="http://schemas.openxmlformats.org/presentationml/2006/main" xmlns:r="http://schemas.openxmlformats.org/officeDocument/2006/relationships">
+  <p:cSld>
+    <p:spTree>
+      <p:nvGrpSpPr>
+        <p:cNvPr id="1" name=""/>
+        <p:cNvGrpSpPr/>
+        <p:nvPr/>
+      </p:nvGrpSpPr>
+      <p:grpSpPr>
+        <a:xfrm>
+          <a:off x="0" y="0"/>
+          <a:ext cx="0" cy="0"/>
+          <a:chOff x="0" y="0"/>
+          <a:chExt cx="0" cy="0"/>
+        </a:xfrm>
+      </p:grpSpPr>
+      <p:sp>
+        <p:nvSpPr>
+          <p:cNvPr id="2" name="Slide Image Placeholder 1"/>
+          <p:cNvSpPr>
+            <a:spLocks noGrp="1"/>
+          </p:cNvSpPr>
+          <p:nvPr>
+            <p:ph type="sldImg" idx="2"/>
+          </p:nvPr>
+        </p:nvSpPr>
+        <p:spPr/>
+      </p:sp>
+      <p:sp>
+        <p:nvSpPr>
+          <p:cNvPr id="3" name="Notes Placeholder 2"/>
+          <p:cNvSpPr>
+            <a:spLocks noGrp="1"/>
+          </p:cNvSpPr>
+          <p:nvPr>
+            <p:ph type="body" idx="3" sz="quarter"/>
+          </p:nvPr>
+        </p:nvSpPr>
+        <p:spPr/>
+        <p:txBody>
+          <a:bodyPr/>
+          <a:lstStyle/>
+          <a:p>
+            <a:r>
+              <a:t>MEMBRO 3 · Limites (30 s): pagamento, posição do lavador e trânsito são simulados hoje; cada um já tem o ponto de troca definido. Os 120 pedidos do painel são fictícios e rotulados.</a:t>
+            </a:r>
+          </a:p>
+        </p:txBody>
+      </p:sp>
+      <p:sp>
+        <p:nvSpPr>
+          <p:cNvPr id="4" name="Slide Number Placeholder 3"/>
+          <p:cNvSpPr>
+            <a:spLocks noGrp="1"/>
+          </p:cNvSpPr>
+          <p:nvPr>
+            <p:ph type="sldNum" idx="5" sz="quarter"/>
+          </p:nvPr>
+        </p:nvSpPr>
+        <p:spPr/>
+      </p:sp>
+    </p:spTree>
+  </p:cSld>
+  <p:clrMapOvr>
+    <a:masterClrMapping/>
+  </p:clrMapOvr>
+</p:notes>
+</file>
+
+<file path=ppt/notesSlides/notesSlide13.xml><?xml version="1.0" encoding="utf-8"?>
+<p:notes xmlns:a="http://schemas.openxmlformats.org/drawingml/2006/main" xmlns:p="http://schemas.openxmlformats.org/presentationml/2006/main" xmlns:r="http://schemas.openxmlformats.org/officeDocument/2006/relationships">
+  <p:cSld>
+    <p:spTree>
+      <p:nvGrpSpPr>
+        <p:cNvPr id="1" name=""/>
+        <p:cNvGrpSpPr/>
+        <p:nvPr/>
+      </p:nvGrpSpPr>
+      <p:grpSpPr>
+        <a:xfrm>
+          <a:off x="0" y="0"/>
+          <a:ext cx="0" cy="0"/>
+          <a:chOff x="0" y="0"/>
+          <a:chExt cx="0" cy="0"/>
+        </a:xfrm>
+      </p:grpSpPr>
+      <p:sp>
+        <p:nvSpPr>
+          <p:cNvPr id="2" name="Slide Image Placeholder 1"/>
+          <p:cNvSpPr>
+            <a:spLocks noGrp="1"/>
+          </p:cNvSpPr>
+          <p:nvPr>
+            <p:ph type="sldImg" idx="2"/>
+          </p:nvPr>
+        </p:nvSpPr>
+        <p:spPr/>
+      </p:sp>
+      <p:sp>
+        <p:nvSpPr>
+          <p:cNvPr id="3" name="Notes Placeholder 2"/>
+          <p:cNvSpPr>
+            <a:spLocks noGrp="1"/>
+          </p:cNvSpPr>
+          <p:nvPr>
+            <p:ph type="body" idx="3" sz="quarter"/>
+          </p:nvPr>
+        </p:nvSpPr>
+        <p:spPr/>
+        <p:txBody>
+          <a:bodyPr/>
+          <a:lstStyle/>
+          <a:p>
+            <a:r>
+              <a:t>MEMBRO 3 · Fechamento (30 s): o que já foi feito e o roadmap (pagamento real, GPS e trânsito, fotos, estoque, fidelidade, assinatura, Empresas, IA de demanda). Agradecer e abrir para perguntas. MEMBRO 4 apoia nas respostas técnicas (ver docs/ROTEIRO_APRESENTACAO.md).</a:t>
+            </a:r>
+          </a:p>
+        </p:txBody>
+      </p:sp>
+      <p:sp>
+        <p:nvSpPr>
+          <p:cNvPr id="4" name="Slide Number Placeholder 3"/>
+          <p:cNvSpPr>
+            <a:spLocks noGrp="1"/>
+          </p:cNvSpPr>
+          <p:nvPr>
+            <p:ph type="sldNum" idx="5" sz="quarter"/>
+          </p:nvPr>
+        </p:nvSpPr>
+        <p:spPr/>
+      </p:sp>
+    </p:spTree>
+  </p:cSld>
+  <p:clrMapOvr>
+    <a:masterClrMapping/>
+  </p:clrMapOvr>
+</p:notes>
+</file>
+
+<file path=ppt/notesSlides/notesSlide2.xml><?xml version="1.0" encoding="utf-8"?>
+<p:notes xmlns:a="http://schemas.openxmlformats.org/drawingml/2006/main" xmlns:p="http://schemas.openxmlformats.org/presentationml/2006/main" xmlns:r="http://schemas.openxmlformats.org/officeDocument/2006/relationships">
+  <p:cSld>
+    <p:spTree>
+      <p:nvGrpSpPr>
+        <p:cNvPr id="1" name=""/>
+        <p:cNvGrpSpPr/>
+        <p:nvPr/>
+      </p:nvGrpSpPr>
+      <p:grpSpPr>
+        <a:xfrm>
+          <a:off x="0" y="0"/>
+          <a:ext cx="0" cy="0"/>
+          <a:chOff x="0" y="0"/>
+          <a:chExt cx="0" cy="0"/>
+        </a:xfrm>
+      </p:grpSpPr>
+      <p:sp>
+        <p:nvSpPr>
+          <p:cNvPr id="2" name="Slide Image Placeholder 1"/>
+          <p:cNvSpPr>
+            <a:spLocks noGrp="1"/>
+          </p:cNvSpPr>
+          <p:nvPr>
+            <p:ph type="sldImg" idx="2"/>
+          </p:nvPr>
+        </p:nvSpPr>
+        <p:spPr/>
+      </p:sp>
+      <p:sp>
+        <p:nvSpPr>
+          <p:cNvPr id="3" name="Notes Placeholder 2"/>
+          <p:cNvSpPr>
+            <a:spLocks noGrp="1"/>
+          </p:cNvSpPr>
+          <p:nvPr>
+            <p:ph type="body" idx="3" sz="quarter"/>
+          </p:nvPr>
+        </p:nvSpPr>
+        <p:spPr/>
+        <p:txBody>
+          <a:bodyPr/>
+          <a:lstStyle/>
+          <a:p>
+            <a:r>
+              <a:t>MEMBRO 1 · Apresentar os quatro membros do time e o orientador Jean Lima. Não demorar: 15 s.</a:t>
+            </a:r>
+          </a:p>
+        </p:txBody>
+      </p:sp>
+      <p:sp>
+        <p:nvSpPr>
+          <p:cNvPr id="4" name="Slide Number Placeholder 3"/>
+          <p:cNvSpPr>
+            <a:spLocks noGrp="1"/>
+          </p:cNvSpPr>
+          <p:nvPr>
+            <p:ph type="sldNum" idx="5" sz="quarter"/>
+          </p:nvPr>
+        </p:nvSpPr>
+        <p:spPr/>
+      </p:sp>
+    </p:spTree>
+  </p:cSld>
+  <p:clrMapOvr>
+    <a:masterClrMapping/>
+  </p:clrMapOvr>
+</p:notes>
+</file>
+
+<file path=ppt/notesSlides/notesSlide3.xml><?xml version="1.0" encoding="utf-8"?>
+<p:notes xmlns:a="http://schemas.openxmlformats.org/drawingml/2006/main" xmlns:p="http://schemas.openxmlformats.org/presentationml/2006/main" xmlns:r="http://schemas.openxmlformats.org/officeDocument/2006/relationships">
+  <p:cSld>
+    <p:spTree>
+      <p:nvGrpSpPr>
+        <p:cNvPr id="1" name=""/>
+        <p:cNvGrpSpPr/>
+        <p:nvPr/>
+      </p:nvGrpSpPr>
+      <p:grpSpPr>
+        <a:xfrm>
+          <a:off x="0" y="0"/>
+          <a:ext cx="0" cy="0"/>
+          <a:chOff x="0" y="0"/>
+          <a:chExt cx="0" cy="0"/>
+        </a:xfrm>
+      </p:grpSpPr>
+      <p:sp>
+        <p:nvSpPr>
+          <p:cNvPr id="2" name="Slide Image Placeholder 1"/>
+          <p:cNvSpPr>
+            <a:spLocks noGrp="1"/>
+          </p:cNvSpPr>
+          <p:nvPr>
+            <p:ph type="sldImg" idx="2"/>
+          </p:nvPr>
+        </p:nvSpPr>
+        <p:spPr/>
+      </p:sp>
+      <p:sp>
+        <p:nvSpPr>
+          <p:cNvPr id="3" name="Notes Placeholder 2"/>
+          <p:cNvSpPr>
+            <a:spLocks noGrp="1"/>
+          </p:cNvSpPr>
+          <p:nvPr>
+            <p:ph type="body" idx="3" sz="quarter"/>
+          </p:nvPr>
+        </p:nvSpPr>
+        <p:spPr/>
+        <p:txBody>
+          <a:bodyPr/>
+          <a:lstStyle/>
+          <a:p>
+            <a:r>
+              <a:t>MEMBRO 1 · Proposta (1 min): plataforma de lavagem no local que o cliente escolhe. Ele define pacote, produtos, horário e o ponto exato no mapa. Transformar a manutenção do veículo em um processo prático, seguro e sob medida.</a:t>
+            </a:r>
+          </a:p>
+        </p:txBody>
+      </p:sp>
+      <p:sp>
+        <p:nvSpPr>
+          <p:cNvPr id="4" name="Slide Number Placeholder 3"/>
+          <p:cNvSpPr>
+            <a:spLocks noGrp="1"/>
+          </p:cNvSpPr>
+          <p:nvPr>
+            <p:ph type="sldNum" idx="5" sz="quarter"/>
+          </p:nvPr>
+        </p:nvSpPr>
+        <p:spPr/>
+      </p:sp>
+    </p:spTree>
+  </p:cSld>
+  <p:clrMapOvr>
+    <a:masterClrMapping/>
+  </p:clrMapOvr>
+</p:notes>
+</file>
+
+<file path=ppt/notesSlides/notesSlide4.xml><?xml version="1.0" encoding="utf-8"?>
+<p:notes xmlns:a="http://schemas.openxmlformats.org/drawingml/2006/main" xmlns:p="http://schemas.openxmlformats.org/presentationml/2006/main" xmlns:r="http://schemas.openxmlformats.org/officeDocument/2006/relationships">
+  <p:cSld>
+    <p:spTree>
+      <p:nvGrpSpPr>
+        <p:cNvPr id="1" name=""/>
+        <p:cNvGrpSpPr/>
+        <p:nvPr/>
+      </p:nvGrpSpPr>
+      <p:grpSpPr>
+        <a:xfrm>
+          <a:off x="0" y="0"/>
+          <a:ext cx="0" cy="0"/>
+          <a:chOff x="0" y="0"/>
+          <a:chExt cx="0" cy="0"/>
+        </a:xfrm>
+      </p:grpSpPr>
+      <p:sp>
+        <p:nvSpPr>
+          <p:cNvPr id="2" name="Slide Image Placeholder 1"/>
+          <p:cNvSpPr>
+            <a:spLocks noGrp="1"/>
+          </p:cNvSpPr>
+          <p:nvPr>
+            <p:ph type="sldImg" idx="2"/>
+          </p:nvPr>
+        </p:nvSpPr>
+        <p:spPr/>
+      </p:sp>
+      <p:sp>
+        <p:nvSpPr>
+          <p:cNvPr id="3" name="Notes Placeholder 2"/>
+          <p:cNvSpPr>
+            <a:spLocks noGrp="1"/>
+          </p:cNvSpPr>
+          <p:nvPr>
+            <p:ph type="body" idx="3" sz="quarter"/>
+          </p:nvPr>
+        </p:nvSpPr>
+        <p:spPr/>
+        <p:txBody>
+          <a:bodyPr/>
+          <a:lstStyle/>
+          <a:p>
+            <a:r>
+              <a:t>MEMBRO 1 · Problema (1 min): deslocamento e fila, horário rígido, ausência de padrão e falta de transparência sobre os produtos usados no veículo.</a:t>
+            </a:r>
+          </a:p>
+        </p:txBody>
+      </p:sp>
+      <p:sp>
+        <p:nvSpPr>
+          <p:cNvPr id="4" name="Slide Number Placeholder 3"/>
+          <p:cNvSpPr>
+            <a:spLocks noGrp="1"/>
+          </p:cNvSpPr>
+          <p:nvPr>
+            <p:ph type="sldNum" idx="5" sz="quarter"/>
+          </p:nvPr>
+        </p:nvSpPr>
+        <p:spPr/>
+      </p:sp>
+    </p:spTree>
+  </p:cSld>
+  <p:clrMapOvr>
+    <a:masterClrMapping/>
+  </p:clrMapOvr>
+</p:notes>
+</file>
+
+<file path=ppt/notesSlides/notesSlide5.xml><?xml version="1.0" encoding="utf-8"?>
+<p:notes xmlns:a="http://schemas.openxmlformats.org/drawingml/2006/main" xmlns:p="http://schemas.openxmlformats.org/presentationml/2006/main" xmlns:r="http://schemas.openxmlformats.org/officeDocument/2006/relationships">
+  <p:cSld>
+    <p:spTree>
+      <p:nvGrpSpPr>
+        <p:cNvPr id="1" name=""/>
+        <p:cNvGrpSpPr/>
+        <p:nvPr/>
+      </p:nvGrpSpPr>
+      <p:grpSpPr>
+        <a:xfrm>
+          <a:off x="0" y="0"/>
+          <a:ext cx="0" cy="0"/>
+          <a:chOff x="0" y="0"/>
+          <a:chExt cx="0" cy="0"/>
+        </a:xfrm>
+      </p:grpSpPr>
+      <p:sp>
+        <p:nvSpPr>
+          <p:cNvPr id="2" name="Slide Image Placeholder 1"/>
+          <p:cNvSpPr>
+            <a:spLocks noGrp="1"/>
+          </p:cNvSpPr>
+          <p:nvPr>
+            <p:ph type="sldImg" idx="2"/>
+          </p:nvPr>
+        </p:nvSpPr>
+        <p:spPr/>
+      </p:sp>
+      <p:sp>
+        <p:nvSpPr>
+          <p:cNvPr id="3" name="Notes Placeholder 2"/>
+          <p:cNvSpPr>
+            <a:spLocks noGrp="1"/>
+          </p:cNvSpPr>
+          <p:nvPr>
+            <p:ph type="body" idx="3" sz="quarter"/>
+          </p:nvPr>
+        </p:nvSpPr>
+        <p:spPr/>
+        <p:txBody>
+          <a:bodyPr/>
+          <a:lstStyle/>
+          <a:p>
+            <a:r>
+              <a:t>MEMBRO 1 · Jornada do protótipo (30 s): este é o protótipo de alta fidelidade de 12 telas que já havia sido validado. Próximo slide: como ele virou aplicativo.</a:t>
+            </a:r>
+          </a:p>
+        </p:txBody>
+      </p:sp>
+      <p:sp>
+        <p:nvSpPr>
+          <p:cNvPr id="4" name="Slide Number Placeholder 3"/>
+          <p:cNvSpPr>
+            <a:spLocks noGrp="1"/>
+          </p:cNvSpPr>
+          <p:nvPr>
+            <p:ph type="sldNum" idx="5" sz="quarter"/>
+          </p:nvPr>
+        </p:nvSpPr>
+        <p:spPr/>
+      </p:sp>
+    </p:spTree>
+  </p:cSld>
+  <p:clrMapOvr>
+    <a:masterClrMapping/>
+  </p:clrMapOvr>
+</p:notes>
+</file>
+
+<file path=ppt/notesSlides/notesSlide6.xml><?xml version="1.0" encoding="utf-8"?>
+<p:notes xmlns:a="http://schemas.openxmlformats.org/drawingml/2006/main" xmlns:p="http://schemas.openxmlformats.org/presentationml/2006/main" xmlns:r="http://schemas.openxmlformats.org/officeDocument/2006/relationships">
+  <p:cSld>
+    <p:spTree>
+      <p:nvGrpSpPr>
+        <p:cNvPr id="1" name=""/>
+        <p:cNvGrpSpPr/>
+        <p:nvPr/>
+      </p:nvGrpSpPr>
+      <p:grpSpPr>
+        <a:xfrm>
+          <a:off x="0" y="0"/>
+          <a:ext cx="0" cy="0"/>
+          <a:chOff x="0" y="0"/>
+          <a:chExt cx="0" cy="0"/>
+        </a:xfrm>
+      </p:grpSpPr>
+      <p:sp>
+        <p:nvSpPr>
+          <p:cNvPr id="2" name="Slide Image Placeholder 1"/>
+          <p:cNvSpPr>
+            <a:spLocks noGrp="1"/>
+          </p:cNvSpPr>
+          <p:nvPr>
+            <p:ph type="sldImg" idx="2"/>
+          </p:nvPr>
+        </p:nvSpPr>
+        <p:spPr/>
+      </p:sp>
+      <p:sp>
+        <p:nvSpPr>
+          <p:cNvPr id="3" name="Notes Placeholder 2"/>
+          <p:cNvSpPr>
+            <a:spLocks noGrp="1"/>
+          </p:cNvSpPr>
+          <p:nvPr>
+            <p:ph type="body" idx="3" sz="quarter"/>
+          </p:nvPr>
+        </p:nvSpPr>
+        <p:spPr/>
+        <p:txBody>
+          <a:bodyPr/>
+          <a:lstStyle/>
+          <a:p>
+            <a:r>
+              <a:t>MEMBRO 1 · Do protótipo ao aplicativo (45 s): os 12 passos viraram 5 telas de pedido mais acompanhamento ao vivo e avaliação. GANCHO: 'Agora o Membro 2 mostra isso funcionando, com cliente e lavador ao mesmo tempo.'</a:t>
+            </a:r>
+          </a:p>
+        </p:txBody>
+      </p:sp>
+      <p:sp>
+        <p:nvSpPr>
+          <p:cNvPr id="4" name="Slide Number Placeholder 3"/>
+          <p:cNvSpPr>
+            <a:spLocks noGrp="1"/>
+          </p:cNvSpPr>
+          <p:nvPr>
+            <p:ph type="sldNum" idx="5" sz="quarter"/>
+          </p:nvPr>
+        </p:nvSpPr>
+        <p:spPr/>
+      </p:sp>
+    </p:spTree>
+  </p:cSld>
+  <p:clrMapOvr>
+    <a:masterClrMapping/>
+  </p:clrMapOvr>
+</p:notes>
+</file>
+
+<file path=ppt/notesSlides/notesSlide7.xml><?xml version="1.0" encoding="utf-8"?>
+<p:notes xmlns:a="http://schemas.openxmlformats.org/drawingml/2006/main" xmlns:p="http://schemas.openxmlformats.org/presentationml/2006/main" xmlns:r="http://schemas.openxmlformats.org/officeDocument/2006/relationships">
+  <p:cSld>
+    <p:spTree>
+      <p:nvGrpSpPr>
+        <p:cNvPr id="1" name=""/>
+        <p:cNvGrpSpPr/>
+        <p:nvPr/>
+      </p:nvGrpSpPr>
+      <p:grpSpPr>
+        <a:xfrm>
+          <a:off x="0" y="0"/>
+          <a:ext cx="0" cy="0"/>
+          <a:chOff x="0" y="0"/>
+          <a:chExt cx="0" cy="0"/>
+        </a:xfrm>
+      </p:grpSpPr>
+      <p:sp>
+        <p:nvSpPr>
+          <p:cNvPr id="2" name="Slide Image Placeholder 1"/>
+          <p:cNvSpPr>
+            <a:spLocks noGrp="1"/>
+          </p:cNvSpPr>
+          <p:nvPr>
+            <p:ph type="sldImg" idx="2"/>
+          </p:nvPr>
+        </p:nvSpPr>
+        <p:spPr/>
+      </p:sp>
+      <p:sp>
+        <p:nvSpPr>
+          <p:cNvPr id="3" name="Notes Placeholder 2"/>
+          <p:cNvSpPr>
+            <a:spLocks noGrp="1"/>
+          </p:cNvSpPr>
+          <p:nvPr>
+            <p:ph type="body" idx="3" sz="quarter"/>
+          </p:nvPr>
+        </p:nvSpPr>
+        <p:spPr/>
+        <p:txBody>
+          <a:bodyPr/>
+          <a:lstStyle/>
+          <a:p>
+            <a:r>
+              <a:t>MEMBRO 2 · Dados do projeto (1 min): inovação de processo (digitaliza e mede todo o ciclo), três perfis no mesmo aplicativo (cliente, prestador, administrador), objetivos e diferenciais (EcoWash, rota otimizada, segurança desde a concepção).</a:t>
+            </a:r>
+          </a:p>
+        </p:txBody>
+      </p:sp>
+      <p:sp>
+        <p:nvSpPr>
+          <p:cNvPr id="4" name="Slide Number Placeholder 3"/>
+          <p:cNvSpPr>
+            <a:spLocks noGrp="1"/>
+          </p:cNvSpPr>
+          <p:nvPr>
+            <p:ph type="sldNum" idx="5" sz="quarter"/>
+          </p:nvPr>
+        </p:nvSpPr>
+        <p:spPr/>
+      </p:sp>
+    </p:spTree>
+  </p:cSld>
+  <p:clrMapOvr>
+    <a:masterClrMapping/>
+  </p:clrMapOvr>
+</p:notes>
+</file>
+
+<file path=ppt/notesSlides/notesSlide8.xml><?xml version="1.0" encoding="utf-8"?>
+<p:notes xmlns:a="http://schemas.openxmlformats.org/drawingml/2006/main" xmlns:p="http://schemas.openxmlformats.org/presentationml/2006/main" xmlns:r="http://schemas.openxmlformats.org/officeDocument/2006/relationships">
+  <p:cSld>
+    <p:spTree>
+      <p:nvGrpSpPr>
+        <p:cNvPr id="1" name=""/>
+        <p:cNvGrpSpPr/>
+        <p:nvPr/>
+      </p:nvGrpSpPr>
+      <p:grpSpPr>
+        <a:xfrm>
+          <a:off x="0" y="0"/>
+          <a:ext cx="0" cy="0"/>
+          <a:chOff x="0" y="0"/>
+          <a:chExt cx="0" cy="0"/>
+        </a:xfrm>
+      </p:grpSpPr>
+      <p:sp>
+        <p:nvSpPr>
+          <p:cNvPr id="2" name="Slide Image Placeholder 1"/>
+          <p:cNvSpPr>
+            <a:spLocks noGrp="1"/>
+          </p:cNvSpPr>
+          <p:nvPr>
+            <p:ph type="sldImg" idx="2"/>
+          </p:nvPr>
+        </p:nvSpPr>
+        <p:spPr/>
+      </p:sp>
+      <p:sp>
+        <p:nvSpPr>
+          <p:cNvPr id="3" name="Notes Placeholder 2"/>
+          <p:cNvSpPr>
+            <a:spLocks noGrp="1"/>
+          </p:cNvSpPr>
+          <p:nvPr>
+            <p:ph type="body" idx="3" sz="quarter"/>
+          </p:nvPr>
+        </p:nvSpPr>
+        <p:spPr/>
+        <p:txBody>
+          <a:bodyPr/>
+          <a:lstStyle/>
+          <a:p>
+            <a:r>
+              <a:t>MEMBRO 2 · Tempo real + DEMONSTRAÇÃO AO VIVO (3 min) no Palco (#/palco): 1) entrar como Cliente e como Lavador; 2) cliente pede a lavagem e marca o pino no mapa; 3) o pedido aparece sozinho para o lavador, que aceita; 4) a caminho: o carrinho anda no mapa (posição SIMULADA, dizer em voz alta); 5) cheguei: código de 6 dígitos ou QR; 6) finalizar, pagamento simulado e 5 estrelas. Plano B: ?mode=local#/palco ou o vídeo. Membro 4 opera o notebook.</a:t>
+            </a:r>
+          </a:p>
+        </p:txBody>
+      </p:sp>
+      <p:sp>
+        <p:nvSpPr>
+          <p:cNvPr id="4" name="Slide Number Placeholder 3"/>
+          <p:cNvSpPr>
+            <a:spLocks noGrp="1"/>
+          </p:cNvSpPr>
+          <p:nvPr>
+            <p:ph type="sldNum" idx="5" sz="quarter"/>
+          </p:nvPr>
+        </p:nvSpPr>
+        <p:spPr/>
+      </p:sp>
+    </p:spTree>
+  </p:cSld>
+  <p:clrMapOvr>
+    <a:masterClrMapping/>
+  </p:clrMapOvr>
+</p:notes>
+</file>
+
+<file path=ppt/notesSlides/notesSlide9.xml><?xml version="1.0" encoding="utf-8"?>
+<p:notes xmlns:a="http://schemas.openxmlformats.org/drawingml/2006/main" xmlns:p="http://schemas.openxmlformats.org/presentationml/2006/main" xmlns:r="http://schemas.openxmlformats.org/officeDocument/2006/relationships">
+  <p:cSld>
+    <p:spTree>
+      <p:nvGrpSpPr>
+        <p:cNvPr id="1" name=""/>
+        <p:cNvGrpSpPr/>
+        <p:nvPr/>
+      </p:nvGrpSpPr>
+      <p:grpSpPr>
+        <a:xfrm>
+          <a:off x="0" y="0"/>
+          <a:ext cx="0" cy="0"/>
+          <a:chOff x="0" y="0"/>
+          <a:chExt cx="0" cy="0"/>
+        </a:xfrm>
+      </p:grpSpPr>
+      <p:sp>
+        <p:nvSpPr>
+          <p:cNvPr id="2" name="Slide Image Placeholder 1"/>
+          <p:cNvSpPr>
+            <a:spLocks noGrp="1"/>
+          </p:cNvSpPr>
+          <p:nvPr>
+            <p:ph type="sldImg" idx="2"/>
+          </p:nvPr>
+        </p:nvSpPr>
+        <p:spPr/>
+      </p:sp>
+      <p:sp>
+        <p:nvSpPr>
+          <p:cNvPr id="3" name="Notes Placeholder 2"/>
+          <p:cNvSpPr>
+            <a:spLocks noGrp="1"/>
+          </p:cNvSpPr>
+          <p:nvPr>
+            <p:ph type="body" idx="3" sz="quarter"/>
+          </p:nvPr>
+        </p:nvSpPr>
+        <p:spPr/>
+        <p:txBody>
+          <a:bodyPr/>
+          <a:lstStyle/>
+          <a:p>
+            <a:r>
+              <a:t>MEMBRO 2 · Aplicativo em funcionamento (30 s): telas reais do lavador, do código/QR do cliente e do painel do administrador. GANCHO: 'Tudo isso só vale se for seguro: o Membro 3 mostra como.'</a:t>
+            </a:r>
+          </a:p>
+        </p:txBody>
+      </p:sp>
+      <p:sp>
+        <p:nvSpPr>
+          <p:cNvPr id="4" name="Slide Number Placeholder 3"/>
+          <p:cNvSpPr>
+            <a:spLocks noGrp="1"/>
+          </p:cNvSpPr>
+          <p:nvPr>
+            <p:ph type="sldNum" idx="5" sz="quarter"/>
+          </p:nvPr>
+        </p:nvSpPr>
+        <p:spPr/>
+      </p:sp>
+    </p:spTree>
+  </p:cSld>
+  <p:clrMapOvr>
+    <a:masterClrMapping/>
+  </p:clrMapOvr>
+</p:notes>
 </file>
 
 <file path=ppt/slideLayouts/slideLayout1.xml><?xml version="1.0" encoding="utf-8"?>
@@ -4633,115 +5543,170 @@
           <a:p>
             <a:pPr algn="l"/>
             <a:r>
-              <a:rPr lang="pt-BR" sz="3800" b="1"/>
-              <a:t>O aplicativo em funcionamento</a:t>
-            </a:r>
-          </a:p>
-        </p:txBody>
-      </p:sp>
-      <p:pic>
-        <p:nvPicPr>
-          <p:cNvPr id="121" name="Imagem 121" descr="Lista de pedidos disponíveis do lavador"/>
-          <p:cNvPicPr>
-            <a:picLocks noChangeAspect="1"/>
-          </p:cNvPicPr>
+              <a:rPr lang="pt-BR" sz="4000" b="1"/>
+              <a:t>Arquitetura</a:t>
+            </a:r>
+          </a:p>
+        </p:txBody>
+      </p:sp>
+      <p:sp>
+        <p:nvSpPr>
+          <p:cNvPr id="128" name="Forma 128"/>
+          <p:cNvSpPr/>
           <p:nvPr/>
-        </p:nvPicPr>
-        <p:blipFill>
-          <a:blip r:embed="rIdImg1"/>
-          <a:stretch>
-            <a:fillRect/>
-          </a:stretch>
-        </p:blipFill>
-        <p:spPr>
-          <a:xfrm>
-            <a:off x="760000" y="1150000"/>
-            <a:ext cx="1825777" cy="3950000"/>
+        </p:nvSpPr>
+        <p:spPr>
+          <a:xfrm>
+            <a:off x="760000" y="1250000"/>
+            <a:ext cx="3300000" cy="1500000"/>
           </a:xfrm>
           <a:prstGeom prst="roundRect">
             <a:avLst>
-              <a:gd name="adj" fmla="val 3000"/>
+              <a:gd name="adj" fmla="val 8000"/>
             </a:avLst>
           </a:prstGeom>
-          <a:ln w="19050">
+          <a:solidFill>
+            <a:srgbClr val="E8F1FB"/>
+          </a:solidFill>
+          <a:ln w="12700">
             <a:solidFill>
-              <a:srgbClr val="C9D6E8"/>
+              <a:srgbClr val="004A91"/>
             </a:solidFill>
           </a:ln>
         </p:spPr>
-      </p:pic>
-      <p:pic>
-        <p:nvPicPr>
-          <p:cNvPr id="122" name="Imagem 122" descr="Código de 6 dígitos e QR do cliente"/>
-          <p:cNvPicPr>
-            <a:picLocks noChangeAspect="1"/>
-          </p:cNvPicPr>
+        <p:txBody>
+          <a:bodyPr wrap="square" lIns="137160" tIns="137160" rIns="137160" bIns="137160" anchor="t">
+            <a:noAutofit/>
+          </a:bodyPr>
+          <a:lstStyle/>
+          <a:p>
+            <a:pPr algn="l" marL="0" indent="0">
+              <a:spcAft>
+                <a:spcPts val="400"/>
+              </a:spcAft>
+              <a:buNone/>
+            </a:pPr>
+            <a:r>
+              <a:rPr lang="pt-BR" sz="1700" b="1" dirty="0">
+                <a:solidFill>
+                  <a:srgbClr val="004A91"/>
+                </a:solidFill>
+                <a:latin typeface="+mn-lt"/>
+              </a:rPr>
+              <a:t>Celular ou notebook</a:t>
+            </a:r>
+          </a:p>
+          <a:p>
+            <a:pPr algn="l" marL="0" indent="0">
+              <a:buNone/>
+            </a:pPr>
+            <a:r>
+              <a:rPr lang="pt-BR" sz="1300" dirty="0">
+                <a:solidFill>
+                  <a:srgbClr val="1F2937"/>
+                </a:solidFill>
+                <a:latin typeface="+mn-lt"/>
+              </a:rPr>
+              <a:t>Aplicativo web instalável (PWA) com 3 perfis: cliente, lavador e administrador</a:t>
+            </a:r>
+          </a:p>
+        </p:txBody>
+      </p:sp>
+      <p:sp>
+        <p:nvSpPr>
+          <p:cNvPr id="129" name="Forma 129"/>
+          <p:cNvSpPr/>
           <p:nvPr/>
-        </p:nvPicPr>
-        <p:blipFill>
-          <a:blip r:embed="rIdImg2"/>
-          <a:stretch>
-            <a:fillRect/>
-          </a:stretch>
-        </p:blipFill>
-        <p:spPr>
-          <a:xfrm>
-            <a:off x="2835777" y="1150000"/>
-            <a:ext cx="1825777" cy="3950000"/>
+        </p:nvSpPr>
+        <p:spPr>
+          <a:xfrm>
+            <a:off x="760000" y="3700000"/>
+            <a:ext cx="3300000" cy="1300000"/>
           </a:xfrm>
           <a:prstGeom prst="roundRect">
             <a:avLst>
-              <a:gd name="adj" fmla="val 3000"/>
+              <a:gd name="adj" fmla="val 8000"/>
             </a:avLst>
           </a:prstGeom>
-          <a:ln w="19050">
+          <a:solidFill>
+            <a:srgbClr val="FFF1DC"/>
+          </a:solidFill>
+          <a:ln w="12700">
             <a:solidFill>
-              <a:srgbClr val="C9D6E8"/>
+              <a:srgbClr val="F7941D"/>
             </a:solidFill>
           </a:ln>
         </p:spPr>
-      </p:pic>
-      <p:pic>
-        <p:nvPicPr>
-          <p:cNvPr id="123" name="Imagem 123" descr="Painel do administrador com indicadores"/>
-          <p:cNvPicPr>
-            <a:picLocks noChangeAspect="1"/>
-          </p:cNvPicPr>
+        <p:txBody>
+          <a:bodyPr wrap="square" lIns="137160" tIns="137160" rIns="137160" bIns="137160" anchor="t">
+            <a:noAutofit/>
+          </a:bodyPr>
+          <a:lstStyle/>
+          <a:p>
+            <a:pPr algn="l" marL="0" indent="0">
+              <a:spcAft>
+                <a:spcPts val="400"/>
+              </a:spcAft>
+              <a:buNone/>
+            </a:pPr>
+            <a:r>
+              <a:rPr lang="pt-BR" sz="1700" b="1" dirty="0">
+                <a:solidFill>
+                  <a:srgbClr val="B45F06"/>
+                </a:solidFill>
+                <a:latin typeface="+mn-lt"/>
+              </a:rPr>
+              <a:t>GitHub Pages</a:t>
+            </a:r>
+          </a:p>
+          <a:p>
+            <a:pPr algn="l" marL="0" indent="0">
+              <a:buNone/>
+            </a:pPr>
+            <a:r>
+              <a:rPr lang="pt-BR" sz="1300" dirty="0">
+                <a:solidFill>
+                  <a:srgbClr val="1F2937"/>
+                </a:solidFill>
+                <a:latin typeface="+mn-lt"/>
+              </a:rPr>
+              <a:t>Hospedagem estática com HTTPS. O código é público no GitHub.</a:t>
+            </a:r>
+          </a:p>
+        </p:txBody>
+      </p:sp>
+      <p:cxnSp>
+        <p:nvCxnSpPr>
+          <p:cNvPr id="130" name="Seta 130"/>
+          <p:cNvCxnSpPr/>
           <p:nvPr/>
-        </p:nvPicPr>
-        <p:blipFill>
-          <a:blip r:embed="rIdImg3"/>
-          <a:stretch>
-            <a:fillRect/>
-          </a:stretch>
-        </p:blipFill>
-        <p:spPr>
-          <a:xfrm>
-            <a:off x="5061554" y="1150000"/>
-            <a:ext cx="5250000" cy="3750000"/>
-          </a:xfrm>
-          <a:prstGeom prst="roundRect">
-            <a:avLst>
-              <a:gd name="adj" fmla="val 3000"/>
-            </a:avLst>
+        </p:nvCxnSpPr>
+        <p:spPr>
+          <a:xfrm flipV="1">
+            <a:off x="2410000" y="2780000"/>
+            <a:ext cx="0" cy="900000"/>
+          </a:xfrm>
+          <a:prstGeom prst="straightConnector1">
+            <a:avLst/>
           </a:prstGeom>
-          <a:ln w="19050">
+          <a:ln w="28575">
             <a:solidFill>
-              <a:srgbClr val="C9D6E8"/>
+              <a:srgbClr val="F7941D"/>
             </a:solidFill>
+            <a:tailEnd type="triangle"/>
           </a:ln>
         </p:spPr>
-      </p:pic>
-      <p:sp>
-        <p:nvSpPr>
-          <p:cNvPr id="124" name="Forma 124"/>
+      </p:cxnSp>
+      <p:sp>
+        <p:nvSpPr>
+          <p:cNvPr id="131" name="Forma 131"/>
           <p:cNvSpPr/>
           <p:nvPr/>
         </p:nvSpPr>
         <p:spPr>
           <a:xfrm>
-            <a:off x="760000" y="5160000"/>
-            <a:ext cx="1925777" cy="800000"/>
+            <a:off x="2500000" y="3000000"/>
+            <a:ext cx="1600000" cy="500000"/>
           </a:xfrm>
           <a:prstGeom prst="rect">
             <a:avLst/>
@@ -4761,27 +5726,50 @@
               <a:buNone/>
             </a:pPr>
             <a:r>
-              <a:rPr lang="pt-BR" sz="1200" b="1" dirty="0">
-                <a:solidFill>
-                  <a:srgbClr val="004A91"/>
+              <a:rPr lang="pt-BR" sz="1100" dirty="0">
+                <a:solidFill>
+                  <a:srgbClr val="5B6B7F"/>
                 </a:solidFill>
                 <a:latin typeface="+mn-lt"/>
               </a:rPr>
-              <a:t>Lavador: pedidos disponíveis, ao vivo</a:t>
-            </a:r>
-          </a:p>
-        </p:txBody>
-      </p:sp>
-      <p:sp>
-        <p:nvSpPr>
-          <p:cNvPr id="125" name="Forma 125"/>
+              <a:t>entrega o app</a:t>
+            </a:r>
+          </a:p>
+        </p:txBody>
+      </p:sp>
+      <p:cxnSp>
+        <p:nvCxnSpPr>
+          <p:cNvPr id="132" name="Seta 132"/>
+          <p:cNvCxnSpPr/>
+          <p:nvPr/>
+        </p:nvCxnSpPr>
+        <p:spPr>
+          <a:xfrm>
+            <a:off x="4100000" y="2000000"/>
+            <a:ext cx="1050000" cy="0"/>
+          </a:xfrm>
+          <a:prstGeom prst="straightConnector1">
+            <a:avLst/>
+          </a:prstGeom>
+          <a:ln w="28575">
+            <a:solidFill>
+              <a:srgbClr val="004A91"/>
+            </a:solidFill>
+            <a:headEnd type="triangle"/>
+            <a:tailEnd type="triangle"/>
+          </a:ln>
+        </p:spPr>
+      </p:cxnSp>
+      <p:sp>
+        <p:nvSpPr>
+          <p:cNvPr id="133" name="Forma 133"/>
           <p:cNvSpPr/>
           <p:nvPr/>
         </p:nvSpPr>
         <p:spPr>
           <a:xfrm>
-            <a:off x="2835777" y="5160000"/>
-            <a:ext cx="1925777" cy="800000"/>
+            <a:off x="4050000" y="2080000"/>
+            <a:ext cx="1150000" cy="600000"/>
           </a:xfrm>
           <a:prstGeom prst="rect">
             <a:avLst/>
@@ -4797,97 +5785,370 @@
           </a:bodyPr>
           <a:lstStyle/>
           <a:p>
+            <a:pPr algn="ctr" marL="0" indent="0">
+              <a:buNone/>
+            </a:pPr>
+            <a:r>
+              <a:rPr lang="pt-BR" sz="1100" dirty="0">
+                <a:solidFill>
+                  <a:srgbClr val="5B6B7F"/>
+                </a:solidFill>
+                <a:latin typeface="+mn-lt"/>
+              </a:rPr>
+              <a:t>HTTPS + WebSocket</a:t>
+            </a:r>
+          </a:p>
+        </p:txBody>
+      </p:sp>
+      <p:sp>
+        <p:nvSpPr>
+          <p:cNvPr id="134" name="Forma 134"/>
+          <p:cNvSpPr/>
+          <p:nvPr/>
+        </p:nvSpPr>
+        <p:spPr>
+          <a:xfrm>
+            <a:off x="5200000" y="1150000"/>
+            <a:ext cx="6250000" cy="4000000"/>
+          </a:xfrm>
+          <a:prstGeom prst="roundRect">
+            <a:avLst>
+              <a:gd name="adj" fmla="val 4000"/>
+            </a:avLst>
+          </a:prstGeom>
+          <a:solidFill>
+            <a:srgbClr val="FFFFFF"/>
+          </a:solidFill>
+          <a:ln w="25400">
+            <a:solidFill>
+              <a:srgbClr val="004A91"/>
+            </a:solidFill>
+          </a:ln>
+        </p:spPr>
+        <p:txBody>
+          <a:bodyPr wrap="square" lIns="137160" tIns="137160" rIns="137160" bIns="137160" anchor="t">
+            <a:noAutofit/>
+          </a:bodyPr>
+          <a:lstStyle/>
+          <a:p>
             <a:pPr algn="l" marL="0" indent="0">
               <a:buNone/>
             </a:pPr>
             <a:r>
-              <a:rPr lang="pt-BR" sz="1200" b="1" dirty="0">
+              <a:rPr lang="pt-BR" sz="1800" b="1" dirty="0">
                 <a:solidFill>
                   <a:srgbClr val="004A91"/>
                 </a:solidFill>
                 <a:latin typeface="+mn-lt"/>
               </a:rPr>
-              <a:t>Cliente: código e QR de início</a:t>
-            </a:r>
-          </a:p>
-        </p:txBody>
-      </p:sp>
-      <p:sp>
-        <p:nvSpPr>
-          <p:cNvPr id="126" name="Forma 126"/>
+              <a:t>Supabase (banco e serviços)</a:t>
+            </a:r>
+          </a:p>
+        </p:txBody>
+      </p:sp>
+      <p:sp>
+        <p:nvSpPr>
+          <p:cNvPr id="135" name="Forma 135"/>
           <p:cNvSpPr/>
           <p:nvPr/>
         </p:nvSpPr>
         <p:spPr>
           <a:xfrm>
-            <a:off x="5061554" y="4960000"/>
-            <a:ext cx="5250000" cy="500000"/>
-          </a:xfrm>
-          <a:prstGeom prst="rect">
-            <a:avLst/>
+            <a:off x="5400000" y="1800000"/>
+            <a:ext cx="2800000" cy="1500000"/>
+          </a:xfrm>
+          <a:prstGeom prst="roundRect">
+            <a:avLst>
+              <a:gd name="adj" fmla="val 8000"/>
+            </a:avLst>
           </a:prstGeom>
-          <a:noFill/>
-          <a:ln>
-            <a:noFill/>
+          <a:solidFill>
+            <a:srgbClr val="E8F1FB"/>
+          </a:solidFill>
+          <a:ln w="12700">
+            <a:solidFill>
+              <a:srgbClr val="C9D6E8"/>
+            </a:solidFill>
           </a:ln>
         </p:spPr>
         <p:txBody>
-          <a:bodyPr wrap="square" lIns="0" tIns="0" rIns="0" bIns="0" anchor="t">
+          <a:bodyPr wrap="square" lIns="109728" tIns="109728" rIns="109728" bIns="109728" anchor="t">
             <a:noAutofit/>
           </a:bodyPr>
           <a:lstStyle/>
           <a:p>
             <a:pPr algn="l" marL="0" indent="0">
+              <a:spcAft>
+                <a:spcPts val="300"/>
+              </a:spcAft>
               <a:buNone/>
             </a:pPr>
             <a:r>
-              <a:rPr lang="pt-BR" sz="1200" b="1" dirty="0">
+              <a:rPr lang="pt-BR" sz="1500" b="1" dirty="0">
                 <a:solidFill>
                   <a:srgbClr val="004A91"/>
                 </a:solidFill>
                 <a:latin typeface="+mn-lt"/>
               </a:rPr>
-              <a:t>Administrador: indicadores da operação (dados de demonstração rotulados como fictícios)</a:t>
-            </a:r>
-          </a:p>
-        </p:txBody>
-      </p:sp>
-      <p:sp>
-        <p:nvSpPr>
-          <p:cNvPr id="127" name="Forma 127"/>
+              <a:t>Autenticação</a:t>
+            </a:r>
+          </a:p>
+          <a:p>
+            <a:pPr algn="l" marL="0" indent="0">
+              <a:buNone/>
+            </a:pPr>
+            <a:r>
+              <a:rPr lang="pt-BR" sz="1200" dirty="0">
+                <a:solidFill>
+                  <a:srgbClr val="1F2937"/>
+                </a:solidFill>
+                <a:latin typeface="+mn-lt"/>
+              </a:rPr>
+              <a:t>e-mail e senha; perfil de cliente, lavador ou admin</a:t>
+            </a:r>
+          </a:p>
+        </p:txBody>
+      </p:sp>
+      <p:sp>
+        <p:nvSpPr>
+          <p:cNvPr id="136" name="Forma 136"/>
           <p:cNvSpPr/>
           <p:nvPr/>
         </p:nvSpPr>
         <p:spPr>
           <a:xfrm>
-            <a:off x="5061554" y="5500000"/>
-            <a:ext cx="5250000" cy="450000"/>
-          </a:xfrm>
-          <a:prstGeom prst="rect">
-            <a:avLst/>
+            <a:off x="8350000" y="1800000"/>
+            <a:ext cx="2800000" cy="1500000"/>
+          </a:xfrm>
+          <a:prstGeom prst="roundRect">
+            <a:avLst>
+              <a:gd name="adj" fmla="val 8000"/>
+            </a:avLst>
           </a:prstGeom>
-          <a:noFill/>
-          <a:ln>
-            <a:noFill/>
+          <a:solidFill>
+            <a:srgbClr val="E8F1FB"/>
+          </a:solidFill>
+          <a:ln w="12700">
+            <a:solidFill>
+              <a:srgbClr val="C9D6E8"/>
+            </a:solidFill>
           </a:ln>
         </p:spPr>
         <p:txBody>
-          <a:bodyPr wrap="square" lIns="0" tIns="0" rIns="0" bIns="0" anchor="t">
+          <a:bodyPr wrap="square" lIns="109728" tIns="109728" rIns="109728" bIns="109728" anchor="t">
             <a:noAutofit/>
           </a:bodyPr>
           <a:lstStyle/>
           <a:p>
             <a:pPr algn="l" marL="0" indent="0">
+              <a:spcAft>
+                <a:spcPts val="300"/>
+              </a:spcAft>
               <a:buNone/>
             </a:pPr>
             <a:r>
-              <a:rPr lang="pt-BR" sz="1100" dirty="0">
-                <a:solidFill>
-                  <a:srgbClr val="5B6B7F"/>
+              <a:rPr lang="pt-BR" sz="1500" b="1" dirty="0">
+                <a:solidFill>
+                  <a:srgbClr val="004A91"/>
                 </a:solidFill>
                 <a:latin typeface="+mn-lt"/>
               </a:rPr>
-              <a:t>Capturas do ambiente de testes automatizados. Os mapas carregam do OpenStreetMap quando há internet.</a:t>
+              <a:t>Banco de dados + RLS</a:t>
+            </a:r>
+          </a:p>
+          <a:p>
+            <a:pPr algn="l" marL="0" indent="0">
+              <a:buNone/>
+            </a:pPr>
+            <a:r>
+              <a:rPr lang="pt-BR" sz="1200" dirty="0">
+                <a:solidFill>
+                  <a:srgbClr val="1F2937"/>
+                </a:solidFill>
+                <a:latin typeface="+mn-lt"/>
+              </a:rPr>
+              <a:t>cada perfil só lê o que é seu (controle por linha)</a:t>
+            </a:r>
+          </a:p>
+        </p:txBody>
+      </p:sp>
+      <p:sp>
+        <p:nvSpPr>
+          <p:cNvPr id="137" name="Forma 137"/>
+          <p:cNvSpPr/>
+          <p:nvPr/>
+        </p:nvSpPr>
+        <p:spPr>
+          <a:xfrm>
+            <a:off x="5400000" y="3450000"/>
+            <a:ext cx="2800000" cy="1500000"/>
+          </a:xfrm>
+          <a:prstGeom prst="roundRect">
+            <a:avLst>
+              <a:gd name="adj" fmla="val 8000"/>
+            </a:avLst>
+          </a:prstGeom>
+          <a:solidFill>
+            <a:srgbClr val="E8F1FB"/>
+          </a:solidFill>
+          <a:ln w="12700">
+            <a:solidFill>
+              <a:srgbClr val="C9D6E8"/>
+            </a:solidFill>
+          </a:ln>
+        </p:spPr>
+        <p:txBody>
+          <a:bodyPr wrap="square" lIns="109728" tIns="109728" rIns="109728" bIns="109728" anchor="t">
+            <a:noAutofit/>
+          </a:bodyPr>
+          <a:lstStyle/>
+          <a:p>
+            <a:pPr algn="l" marL="0" indent="0">
+              <a:spcAft>
+                <a:spcPts val="300"/>
+              </a:spcAft>
+              <a:buNone/>
+            </a:pPr>
+            <a:r>
+              <a:rPr lang="pt-BR" sz="1500" b="1" dirty="0">
+                <a:solidFill>
+                  <a:srgbClr val="004A91"/>
+                </a:solidFill>
+                <a:latin typeface="+mn-lt"/>
+              </a:rPr>
+              <a:t>Funções no servidor</a:t>
+            </a:r>
+          </a:p>
+          <a:p>
+            <a:pPr algn="l" marL="0" indent="0">
+              <a:buNone/>
+            </a:pPr>
+            <a:r>
+              <a:rPr lang="pt-BR" sz="1200" dirty="0">
+                <a:solidFill>
+                  <a:srgbClr val="1F2937"/>
+                </a:solidFill>
+                <a:latin typeface="+mn-lt"/>
+              </a:rPr>
+              <a:t>única porta de escrita: validam perfil, etapa, preço e código</a:t>
+            </a:r>
+          </a:p>
+        </p:txBody>
+      </p:sp>
+      <p:sp>
+        <p:nvSpPr>
+          <p:cNvPr id="138" name="Forma 138"/>
+          <p:cNvSpPr/>
+          <p:nvPr/>
+        </p:nvSpPr>
+        <p:spPr>
+          <a:xfrm>
+            <a:off x="8350000" y="3450000"/>
+            <a:ext cx="2800000" cy="1500000"/>
+          </a:xfrm>
+          <a:prstGeom prst="roundRect">
+            <a:avLst>
+              <a:gd name="adj" fmla="val 8000"/>
+            </a:avLst>
+          </a:prstGeom>
+          <a:solidFill>
+            <a:srgbClr val="E8F1FB"/>
+          </a:solidFill>
+          <a:ln w="12700">
+            <a:solidFill>
+              <a:srgbClr val="C9D6E8"/>
+            </a:solidFill>
+          </a:ln>
+        </p:spPr>
+        <p:txBody>
+          <a:bodyPr wrap="square" lIns="109728" tIns="109728" rIns="109728" bIns="109728" anchor="t">
+            <a:noAutofit/>
+          </a:bodyPr>
+          <a:lstStyle/>
+          <a:p>
+            <a:pPr algn="l" marL="0" indent="0">
+              <a:spcAft>
+                <a:spcPts val="300"/>
+              </a:spcAft>
+              <a:buNone/>
+            </a:pPr>
+            <a:r>
+              <a:rPr lang="pt-BR" sz="1500" b="1" dirty="0">
+                <a:solidFill>
+                  <a:srgbClr val="004A91"/>
+                </a:solidFill>
+                <a:latin typeface="+mn-lt"/>
+              </a:rPr>
+              <a:t>Tempo real</a:t>
+            </a:r>
+          </a:p>
+          <a:p>
+            <a:pPr algn="l" marL="0" indent="0">
+              <a:buNone/>
+            </a:pPr>
+            <a:r>
+              <a:rPr lang="pt-BR" sz="1200" dirty="0">
+                <a:solidFill>
+                  <a:srgbClr val="1F2937"/>
+                </a:solidFill>
+                <a:latin typeface="+mn-lt"/>
+              </a:rPr>
+              <a:t>WebSocket: o cliente vê o lavador agir sem recarregar</a:t>
+            </a:r>
+          </a:p>
+        </p:txBody>
+      </p:sp>
+      <p:sp>
+        <p:nvSpPr>
+          <p:cNvPr id="139" name="Forma 139"/>
+          <p:cNvSpPr/>
+          <p:nvPr/>
+        </p:nvSpPr>
+        <p:spPr>
+          <a:xfrm>
+            <a:off x="760000" y="5350000"/>
+            <a:ext cx="10690000" cy="700000"/>
+          </a:xfrm>
+          <a:prstGeom prst="roundRect">
+            <a:avLst>
+              <a:gd name="adj" fmla="val 12000"/>
+            </a:avLst>
+          </a:prstGeom>
+          <a:solidFill>
+            <a:srgbClr val="F3F4F6"/>
+          </a:solidFill>
+          <a:ln w="12700">
+            <a:solidFill>
+              <a:srgbClr val="C9D6E8"/>
+            </a:solidFill>
+          </a:ln>
+        </p:spPr>
+        <p:txBody>
+          <a:bodyPr wrap="square" lIns="137160" tIns="137160" rIns="137160" bIns="137160" anchor="ctr">
+            <a:noAutofit/>
+          </a:bodyPr>
+          <a:lstStyle/>
+          <a:p>
+            <a:pPr algn="l" marL="0" indent="0">
+              <a:buNone/>
+            </a:pPr>
+            <a:r>
+              <a:rPr lang="pt-BR" sz="1400" b="1" dirty="0">
+                <a:solidFill>
+                  <a:srgbClr val="004A91"/>
+                </a:solidFill>
+                <a:latin typeface="+mn-lt"/>
+              </a:rPr>
+              <a:t>Mapas e busca de endereço: </a:t>
+            </a:r>
+            <a:r>
+              <a:rPr lang="pt-BR" sz="1400" dirty="0">
+                <a:solidFill>
+                  <a:srgbClr val="1F2937"/>
+                </a:solidFill>
+                <a:latin typeface="+mn-lt"/>
+              </a:rPr>
+              <a:t>OpenStreetMap e Nominatim (gratuitos, sem chave de API). Sem servidor próprio: custo zero na demonstração.</a:t>
             </a:r>
           </a:p>
         </p:txBody>
@@ -4906,676 +6167,6 @@
 </file>
 
 <file path=ppt/slides/slide11.xml><?xml version="1.0" encoding="utf-8"?>
-<p:sld xmlns:a="http://schemas.openxmlformats.org/drawingml/2006/main" xmlns:r="http://schemas.openxmlformats.org/officeDocument/2006/relationships" xmlns:p="http://schemas.openxmlformats.org/presentationml/2006/main">
-  <p:cSld>
-    <p:spTree>
-      <p:nvGrpSpPr>
-        <p:cNvPr id="1" name="">
-          <a:extLst>
-            <a:ext uri="{FF2B5EF4-FFF2-40B4-BE49-F238E27FC236}">
-              <a16:creationId xmlns:a16="http://schemas.microsoft.com/office/drawing/2014/main" id="{54D76DEB-2668-D4FD-D994-671DBA3E069C}"/>
-            </a:ext>
-          </a:extLst>
-        </p:cNvPr>
-        <p:cNvGrpSpPr/>
-        <p:nvPr/>
-      </p:nvGrpSpPr>
-      <p:grpSpPr>
-        <a:xfrm>
-          <a:off x="0" y="0"/>
-          <a:ext cx="0" cy="0"/>
-          <a:chOff x="0" y="0"/>
-          <a:chExt cx="0" cy="0"/>
-        </a:xfrm>
-      </p:grpSpPr>
-      <p:sp>
-        <p:nvSpPr>
-          <p:cNvPr id="2" name="Title 1"/>
-          <p:cNvSpPr>
-            <a:spLocks noGrp="1"/>
-          </p:cNvSpPr>
-          <p:nvPr>
-            <p:ph type="title"/>
-          </p:nvPr>
-        </p:nvSpPr>
-        <p:spPr>
-          <a:xfrm>
-            <a:off x="760000" y="300000"/>
-            <a:ext cx="10670000" cy="700000"/>
-          </a:xfrm>
-        </p:spPr>
-        <p:txBody>
-          <a:bodyPr wrap="square" lIns="0" tIns="0" rIns="0" bIns="0" anchor="t">
-            <a:noAutofit/>
-          </a:bodyPr>
-          <a:lstStyle/>
-          <a:p>
-            <a:pPr algn="l"/>
-            <a:r>
-              <a:rPr lang="pt-BR" sz="4000" b="1"/>
-              <a:t>Arquitetura</a:t>
-            </a:r>
-          </a:p>
-        </p:txBody>
-      </p:sp>
-      <p:sp>
-        <p:nvSpPr>
-          <p:cNvPr id="128" name="Forma 128"/>
-          <p:cNvSpPr/>
-          <p:nvPr/>
-        </p:nvSpPr>
-        <p:spPr>
-          <a:xfrm>
-            <a:off x="760000" y="1250000"/>
-            <a:ext cx="3300000" cy="1500000"/>
-          </a:xfrm>
-          <a:prstGeom prst="roundRect">
-            <a:avLst>
-              <a:gd name="adj" fmla="val 8000"/>
-            </a:avLst>
-          </a:prstGeom>
-          <a:solidFill>
-            <a:srgbClr val="E8F1FB"/>
-          </a:solidFill>
-          <a:ln w="12700">
-            <a:solidFill>
-              <a:srgbClr val="004A91"/>
-            </a:solidFill>
-          </a:ln>
-        </p:spPr>
-        <p:txBody>
-          <a:bodyPr wrap="square" lIns="137160" tIns="137160" rIns="137160" bIns="137160" anchor="t">
-            <a:noAutofit/>
-          </a:bodyPr>
-          <a:lstStyle/>
-          <a:p>
-            <a:pPr algn="l" marL="0" indent="0">
-              <a:spcAft>
-                <a:spcPts val="400"/>
-              </a:spcAft>
-              <a:buNone/>
-            </a:pPr>
-            <a:r>
-              <a:rPr lang="pt-BR" sz="1700" b="1" dirty="0">
-                <a:solidFill>
-                  <a:srgbClr val="004A91"/>
-                </a:solidFill>
-                <a:latin typeface="+mn-lt"/>
-              </a:rPr>
-              <a:t>Celular ou notebook</a:t>
-            </a:r>
-          </a:p>
-          <a:p>
-            <a:pPr algn="l" marL="0" indent="0">
-              <a:buNone/>
-            </a:pPr>
-            <a:r>
-              <a:rPr lang="pt-BR" sz="1300" dirty="0">
-                <a:solidFill>
-                  <a:srgbClr val="1F2937"/>
-                </a:solidFill>
-                <a:latin typeface="+mn-lt"/>
-              </a:rPr>
-              <a:t>Aplicativo web instalável (PWA) com 3 perfis: cliente, lavador e administrador</a:t>
-            </a:r>
-          </a:p>
-        </p:txBody>
-      </p:sp>
-      <p:sp>
-        <p:nvSpPr>
-          <p:cNvPr id="129" name="Forma 129"/>
-          <p:cNvSpPr/>
-          <p:nvPr/>
-        </p:nvSpPr>
-        <p:spPr>
-          <a:xfrm>
-            <a:off x="760000" y="3700000"/>
-            <a:ext cx="3300000" cy="1300000"/>
-          </a:xfrm>
-          <a:prstGeom prst="roundRect">
-            <a:avLst>
-              <a:gd name="adj" fmla="val 8000"/>
-            </a:avLst>
-          </a:prstGeom>
-          <a:solidFill>
-            <a:srgbClr val="FFF1DC"/>
-          </a:solidFill>
-          <a:ln w="12700">
-            <a:solidFill>
-              <a:srgbClr val="F7941D"/>
-            </a:solidFill>
-          </a:ln>
-        </p:spPr>
-        <p:txBody>
-          <a:bodyPr wrap="square" lIns="137160" tIns="137160" rIns="137160" bIns="137160" anchor="t">
-            <a:noAutofit/>
-          </a:bodyPr>
-          <a:lstStyle/>
-          <a:p>
-            <a:pPr algn="l" marL="0" indent="0">
-              <a:spcAft>
-                <a:spcPts val="400"/>
-              </a:spcAft>
-              <a:buNone/>
-            </a:pPr>
-            <a:r>
-              <a:rPr lang="pt-BR" sz="1700" b="1" dirty="0">
-                <a:solidFill>
-                  <a:srgbClr val="B45F06"/>
-                </a:solidFill>
-                <a:latin typeface="+mn-lt"/>
-              </a:rPr>
-              <a:t>GitHub Pages</a:t>
-            </a:r>
-          </a:p>
-          <a:p>
-            <a:pPr algn="l" marL="0" indent="0">
-              <a:buNone/>
-            </a:pPr>
-            <a:r>
-              <a:rPr lang="pt-BR" sz="1300" dirty="0">
-                <a:solidFill>
-                  <a:srgbClr val="1F2937"/>
-                </a:solidFill>
-                <a:latin typeface="+mn-lt"/>
-              </a:rPr>
-              <a:t>Hospedagem estática com HTTPS. O código é público no GitHub.</a:t>
-            </a:r>
-          </a:p>
-        </p:txBody>
-      </p:sp>
-      <p:cxnSp>
-        <p:nvCxnSpPr>
-          <p:cNvPr id="130" name="Seta 130"/>
-          <p:cNvCxnSpPr/>
-          <p:nvPr/>
-        </p:nvCxnSpPr>
-        <p:spPr>
-          <a:xfrm flipV="1">
-            <a:off x="2410000" y="2780000"/>
-            <a:ext cx="0" cy="900000"/>
-          </a:xfrm>
-          <a:prstGeom prst="straightConnector1">
-            <a:avLst/>
-          </a:prstGeom>
-          <a:ln w="28575">
-            <a:solidFill>
-              <a:srgbClr val="F7941D"/>
-            </a:solidFill>
-            <a:tailEnd type="triangle"/>
-          </a:ln>
-        </p:spPr>
-      </p:cxnSp>
-      <p:sp>
-        <p:nvSpPr>
-          <p:cNvPr id="131" name="Forma 131"/>
-          <p:cNvSpPr/>
-          <p:nvPr/>
-        </p:nvSpPr>
-        <p:spPr>
-          <a:xfrm>
-            <a:off x="2500000" y="3000000"/>
-            <a:ext cx="1600000" cy="500000"/>
-          </a:xfrm>
-          <a:prstGeom prst="rect">
-            <a:avLst/>
-          </a:prstGeom>
-          <a:noFill/>
-          <a:ln>
-            <a:noFill/>
-          </a:ln>
-        </p:spPr>
-        <p:txBody>
-          <a:bodyPr wrap="square" lIns="0" tIns="0" rIns="0" bIns="0" anchor="t">
-            <a:noAutofit/>
-          </a:bodyPr>
-          <a:lstStyle/>
-          <a:p>
-            <a:pPr algn="l" marL="0" indent="0">
-              <a:buNone/>
-            </a:pPr>
-            <a:r>
-              <a:rPr lang="pt-BR" sz="1100" dirty="0">
-                <a:solidFill>
-                  <a:srgbClr val="5B6B7F"/>
-                </a:solidFill>
-                <a:latin typeface="+mn-lt"/>
-              </a:rPr>
-              <a:t>entrega o app</a:t>
-            </a:r>
-          </a:p>
-        </p:txBody>
-      </p:sp>
-      <p:cxnSp>
-        <p:nvCxnSpPr>
-          <p:cNvPr id="132" name="Seta 132"/>
-          <p:cNvCxnSpPr/>
-          <p:nvPr/>
-        </p:nvCxnSpPr>
-        <p:spPr>
-          <a:xfrm>
-            <a:off x="4100000" y="2000000"/>
-            <a:ext cx="1050000" cy="0"/>
-          </a:xfrm>
-          <a:prstGeom prst="straightConnector1">
-            <a:avLst/>
-          </a:prstGeom>
-          <a:ln w="28575">
-            <a:solidFill>
-              <a:srgbClr val="004A91"/>
-            </a:solidFill>
-            <a:headEnd type="triangle"/>
-            <a:tailEnd type="triangle"/>
-          </a:ln>
-        </p:spPr>
-      </p:cxnSp>
-      <p:sp>
-        <p:nvSpPr>
-          <p:cNvPr id="133" name="Forma 133"/>
-          <p:cNvSpPr/>
-          <p:nvPr/>
-        </p:nvSpPr>
-        <p:spPr>
-          <a:xfrm>
-            <a:off x="4050000" y="2080000"/>
-            <a:ext cx="1150000" cy="600000"/>
-          </a:xfrm>
-          <a:prstGeom prst="rect">
-            <a:avLst/>
-          </a:prstGeom>
-          <a:noFill/>
-          <a:ln>
-            <a:noFill/>
-          </a:ln>
-        </p:spPr>
-        <p:txBody>
-          <a:bodyPr wrap="square" lIns="0" tIns="0" rIns="0" bIns="0" anchor="t">
-            <a:noAutofit/>
-          </a:bodyPr>
-          <a:lstStyle/>
-          <a:p>
-            <a:pPr algn="ctr" marL="0" indent="0">
-              <a:buNone/>
-            </a:pPr>
-            <a:r>
-              <a:rPr lang="pt-BR" sz="1100" dirty="0">
-                <a:solidFill>
-                  <a:srgbClr val="5B6B7F"/>
-                </a:solidFill>
-                <a:latin typeface="+mn-lt"/>
-              </a:rPr>
-              <a:t>HTTPS + WebSocket</a:t>
-            </a:r>
-          </a:p>
-        </p:txBody>
-      </p:sp>
-      <p:sp>
-        <p:nvSpPr>
-          <p:cNvPr id="134" name="Forma 134"/>
-          <p:cNvSpPr/>
-          <p:nvPr/>
-        </p:nvSpPr>
-        <p:spPr>
-          <a:xfrm>
-            <a:off x="5200000" y="1150000"/>
-            <a:ext cx="6250000" cy="4000000"/>
-          </a:xfrm>
-          <a:prstGeom prst="roundRect">
-            <a:avLst>
-              <a:gd name="adj" fmla="val 4000"/>
-            </a:avLst>
-          </a:prstGeom>
-          <a:solidFill>
-            <a:srgbClr val="FFFFFF"/>
-          </a:solidFill>
-          <a:ln w="25400">
-            <a:solidFill>
-              <a:srgbClr val="004A91"/>
-            </a:solidFill>
-          </a:ln>
-        </p:spPr>
-        <p:txBody>
-          <a:bodyPr wrap="square" lIns="137160" tIns="137160" rIns="137160" bIns="137160" anchor="t">
-            <a:noAutofit/>
-          </a:bodyPr>
-          <a:lstStyle/>
-          <a:p>
-            <a:pPr algn="l" marL="0" indent="0">
-              <a:buNone/>
-            </a:pPr>
-            <a:r>
-              <a:rPr lang="pt-BR" sz="1800" b="1" dirty="0">
-                <a:solidFill>
-                  <a:srgbClr val="004A91"/>
-                </a:solidFill>
-                <a:latin typeface="+mn-lt"/>
-              </a:rPr>
-              <a:t>Supabase (banco e serviços)</a:t>
-            </a:r>
-          </a:p>
-        </p:txBody>
-      </p:sp>
-      <p:sp>
-        <p:nvSpPr>
-          <p:cNvPr id="135" name="Forma 135"/>
-          <p:cNvSpPr/>
-          <p:nvPr/>
-        </p:nvSpPr>
-        <p:spPr>
-          <a:xfrm>
-            <a:off x="5400000" y="1800000"/>
-            <a:ext cx="2800000" cy="1500000"/>
-          </a:xfrm>
-          <a:prstGeom prst="roundRect">
-            <a:avLst>
-              <a:gd name="adj" fmla="val 8000"/>
-            </a:avLst>
-          </a:prstGeom>
-          <a:solidFill>
-            <a:srgbClr val="E8F1FB"/>
-          </a:solidFill>
-          <a:ln w="12700">
-            <a:solidFill>
-              <a:srgbClr val="C9D6E8"/>
-            </a:solidFill>
-          </a:ln>
-        </p:spPr>
-        <p:txBody>
-          <a:bodyPr wrap="square" lIns="109728" tIns="109728" rIns="109728" bIns="109728" anchor="t">
-            <a:noAutofit/>
-          </a:bodyPr>
-          <a:lstStyle/>
-          <a:p>
-            <a:pPr algn="l" marL="0" indent="0">
-              <a:spcAft>
-                <a:spcPts val="300"/>
-              </a:spcAft>
-              <a:buNone/>
-            </a:pPr>
-            <a:r>
-              <a:rPr lang="pt-BR" sz="1500" b="1" dirty="0">
-                <a:solidFill>
-                  <a:srgbClr val="004A91"/>
-                </a:solidFill>
-                <a:latin typeface="+mn-lt"/>
-              </a:rPr>
-              <a:t>Autenticação</a:t>
-            </a:r>
-          </a:p>
-          <a:p>
-            <a:pPr algn="l" marL="0" indent="0">
-              <a:buNone/>
-            </a:pPr>
-            <a:r>
-              <a:rPr lang="pt-BR" sz="1200" dirty="0">
-                <a:solidFill>
-                  <a:srgbClr val="1F2937"/>
-                </a:solidFill>
-                <a:latin typeface="+mn-lt"/>
-              </a:rPr>
-              <a:t>e-mail e senha; perfil de cliente, lavador ou admin</a:t>
-            </a:r>
-          </a:p>
-        </p:txBody>
-      </p:sp>
-      <p:sp>
-        <p:nvSpPr>
-          <p:cNvPr id="136" name="Forma 136"/>
-          <p:cNvSpPr/>
-          <p:nvPr/>
-        </p:nvSpPr>
-        <p:spPr>
-          <a:xfrm>
-            <a:off x="8350000" y="1800000"/>
-            <a:ext cx="2800000" cy="1500000"/>
-          </a:xfrm>
-          <a:prstGeom prst="roundRect">
-            <a:avLst>
-              <a:gd name="adj" fmla="val 8000"/>
-            </a:avLst>
-          </a:prstGeom>
-          <a:solidFill>
-            <a:srgbClr val="E8F1FB"/>
-          </a:solidFill>
-          <a:ln w="12700">
-            <a:solidFill>
-              <a:srgbClr val="C9D6E8"/>
-            </a:solidFill>
-          </a:ln>
-        </p:spPr>
-        <p:txBody>
-          <a:bodyPr wrap="square" lIns="109728" tIns="109728" rIns="109728" bIns="109728" anchor="t">
-            <a:noAutofit/>
-          </a:bodyPr>
-          <a:lstStyle/>
-          <a:p>
-            <a:pPr algn="l" marL="0" indent="0">
-              <a:spcAft>
-                <a:spcPts val="300"/>
-              </a:spcAft>
-              <a:buNone/>
-            </a:pPr>
-            <a:r>
-              <a:rPr lang="pt-BR" sz="1500" b="1" dirty="0">
-                <a:solidFill>
-                  <a:srgbClr val="004A91"/>
-                </a:solidFill>
-                <a:latin typeface="+mn-lt"/>
-              </a:rPr>
-              <a:t>Banco de dados + RLS</a:t>
-            </a:r>
-          </a:p>
-          <a:p>
-            <a:pPr algn="l" marL="0" indent="0">
-              <a:buNone/>
-            </a:pPr>
-            <a:r>
-              <a:rPr lang="pt-BR" sz="1200" dirty="0">
-                <a:solidFill>
-                  <a:srgbClr val="1F2937"/>
-                </a:solidFill>
-                <a:latin typeface="+mn-lt"/>
-              </a:rPr>
-              <a:t>cada perfil só lê o que é seu (controle por linha)</a:t>
-            </a:r>
-          </a:p>
-        </p:txBody>
-      </p:sp>
-      <p:sp>
-        <p:nvSpPr>
-          <p:cNvPr id="137" name="Forma 137"/>
-          <p:cNvSpPr/>
-          <p:nvPr/>
-        </p:nvSpPr>
-        <p:spPr>
-          <a:xfrm>
-            <a:off x="5400000" y="3450000"/>
-            <a:ext cx="2800000" cy="1500000"/>
-          </a:xfrm>
-          <a:prstGeom prst="roundRect">
-            <a:avLst>
-              <a:gd name="adj" fmla="val 8000"/>
-            </a:avLst>
-          </a:prstGeom>
-          <a:solidFill>
-            <a:srgbClr val="E8F1FB"/>
-          </a:solidFill>
-          <a:ln w="12700">
-            <a:solidFill>
-              <a:srgbClr val="C9D6E8"/>
-            </a:solidFill>
-          </a:ln>
-        </p:spPr>
-        <p:txBody>
-          <a:bodyPr wrap="square" lIns="109728" tIns="109728" rIns="109728" bIns="109728" anchor="t">
-            <a:noAutofit/>
-          </a:bodyPr>
-          <a:lstStyle/>
-          <a:p>
-            <a:pPr algn="l" marL="0" indent="0">
-              <a:spcAft>
-                <a:spcPts val="300"/>
-              </a:spcAft>
-              <a:buNone/>
-            </a:pPr>
-            <a:r>
-              <a:rPr lang="pt-BR" sz="1500" b="1" dirty="0">
-                <a:solidFill>
-                  <a:srgbClr val="004A91"/>
-                </a:solidFill>
-                <a:latin typeface="+mn-lt"/>
-              </a:rPr>
-              <a:t>Funções no servidor</a:t>
-            </a:r>
-          </a:p>
-          <a:p>
-            <a:pPr algn="l" marL="0" indent="0">
-              <a:buNone/>
-            </a:pPr>
-            <a:r>
-              <a:rPr lang="pt-BR" sz="1200" dirty="0">
-                <a:solidFill>
-                  <a:srgbClr val="1F2937"/>
-                </a:solidFill>
-                <a:latin typeface="+mn-lt"/>
-              </a:rPr>
-              <a:t>única porta de escrita: validam perfil, etapa, preço e código</a:t>
-            </a:r>
-          </a:p>
-        </p:txBody>
-      </p:sp>
-      <p:sp>
-        <p:nvSpPr>
-          <p:cNvPr id="138" name="Forma 138"/>
-          <p:cNvSpPr/>
-          <p:nvPr/>
-        </p:nvSpPr>
-        <p:spPr>
-          <a:xfrm>
-            <a:off x="8350000" y="3450000"/>
-            <a:ext cx="2800000" cy="1500000"/>
-          </a:xfrm>
-          <a:prstGeom prst="roundRect">
-            <a:avLst>
-              <a:gd name="adj" fmla="val 8000"/>
-            </a:avLst>
-          </a:prstGeom>
-          <a:solidFill>
-            <a:srgbClr val="E8F1FB"/>
-          </a:solidFill>
-          <a:ln w="12700">
-            <a:solidFill>
-              <a:srgbClr val="C9D6E8"/>
-            </a:solidFill>
-          </a:ln>
-        </p:spPr>
-        <p:txBody>
-          <a:bodyPr wrap="square" lIns="109728" tIns="109728" rIns="109728" bIns="109728" anchor="t">
-            <a:noAutofit/>
-          </a:bodyPr>
-          <a:lstStyle/>
-          <a:p>
-            <a:pPr algn="l" marL="0" indent="0">
-              <a:spcAft>
-                <a:spcPts val="300"/>
-              </a:spcAft>
-              <a:buNone/>
-            </a:pPr>
-            <a:r>
-              <a:rPr lang="pt-BR" sz="1500" b="1" dirty="0">
-                <a:solidFill>
-                  <a:srgbClr val="004A91"/>
-                </a:solidFill>
-                <a:latin typeface="+mn-lt"/>
-              </a:rPr>
-              <a:t>Tempo real</a:t>
-            </a:r>
-          </a:p>
-          <a:p>
-            <a:pPr algn="l" marL="0" indent="0">
-              <a:buNone/>
-            </a:pPr>
-            <a:r>
-              <a:rPr lang="pt-BR" sz="1200" dirty="0">
-                <a:solidFill>
-                  <a:srgbClr val="1F2937"/>
-                </a:solidFill>
-                <a:latin typeface="+mn-lt"/>
-              </a:rPr>
-              <a:t>WebSocket: o cliente vê o lavador agir sem recarregar</a:t>
-            </a:r>
-          </a:p>
-        </p:txBody>
-      </p:sp>
-      <p:sp>
-        <p:nvSpPr>
-          <p:cNvPr id="139" name="Forma 139"/>
-          <p:cNvSpPr/>
-          <p:nvPr/>
-        </p:nvSpPr>
-        <p:spPr>
-          <a:xfrm>
-            <a:off x="760000" y="5350000"/>
-            <a:ext cx="10690000" cy="700000"/>
-          </a:xfrm>
-          <a:prstGeom prst="roundRect">
-            <a:avLst>
-              <a:gd name="adj" fmla="val 12000"/>
-            </a:avLst>
-          </a:prstGeom>
-          <a:solidFill>
-            <a:srgbClr val="F3F4F6"/>
-          </a:solidFill>
-          <a:ln w="12700">
-            <a:solidFill>
-              <a:srgbClr val="C9D6E8"/>
-            </a:solidFill>
-          </a:ln>
-        </p:spPr>
-        <p:txBody>
-          <a:bodyPr wrap="square" lIns="137160" tIns="137160" rIns="137160" bIns="137160" anchor="ctr">
-            <a:noAutofit/>
-          </a:bodyPr>
-          <a:lstStyle/>
-          <a:p>
-            <a:pPr algn="l" marL="0" indent="0">
-              <a:buNone/>
-            </a:pPr>
-            <a:r>
-              <a:rPr lang="pt-BR" sz="1400" b="1" dirty="0">
-                <a:solidFill>
-                  <a:srgbClr val="004A91"/>
-                </a:solidFill>
-                <a:latin typeface="+mn-lt"/>
-              </a:rPr>
-              <a:t>Mapas e busca de endereço: </a:t>
-            </a:r>
-            <a:r>
-              <a:rPr lang="pt-BR" sz="1400" dirty="0">
-                <a:solidFill>
-                  <a:srgbClr val="1F2937"/>
-                </a:solidFill>
-                <a:latin typeface="+mn-lt"/>
-              </a:rPr>
-              <a:t>OpenStreetMap e Nominatim (gratuitos, sem chave de API). Sem servidor próprio: custo zero na demonstração.</a:t>
-            </a:r>
-          </a:p>
-        </p:txBody>
-      </p:sp>
-    </p:spTree>
-    <p:extLst>
-      <p:ext uri="{BB962C8B-B14F-4D97-AF65-F5344CB8AC3E}">
-        <p14:creationId xmlns:p14="http://schemas.microsoft.com/office/powerpoint/2010/main" val="1853730795"/>
-      </p:ext>
-    </p:extLst>
-  </p:cSld>
-  <p:clrMapOvr>
-    <a:masterClrMapping/>
-  </p:clrMapOvr>
-</p:sld>
-</file>
-
-<file path=ppt/slides/slide12.xml><?xml version="1.0" encoding="utf-8"?>
 <p:sld xmlns:a="http://schemas.openxmlformats.org/drawingml/2006/main" xmlns:r="http://schemas.openxmlformats.org/officeDocument/2006/relationships" xmlns:p="http://schemas.openxmlformats.org/presentationml/2006/main">
   <p:cSld>
     <p:spTree>
@@ -6187,7 +6778,7 @@
 </p:sld>
 </file>
 
-<file path=ppt/slides/slide13.xml><?xml version="1.0" encoding="utf-8"?>
+<file path=ppt/slides/slide12.xml><?xml version="1.0" encoding="utf-8"?>
 <p:sld xmlns:a="http://schemas.openxmlformats.org/drawingml/2006/main" xmlns:r="http://schemas.openxmlformats.org/officeDocument/2006/relationships" xmlns:p="http://schemas.openxmlformats.org/presentationml/2006/main">
   <p:cSld>
     <p:spTree>
@@ -6834,6 +7425,397 @@
 </p:sld>
 </file>
 
+<file path=ppt/slides/slide13.xml><?xml version="1.0" encoding="utf-8"?>
+<p:sld xmlns:a="http://schemas.openxmlformats.org/drawingml/2006/main" xmlns:r="http://schemas.openxmlformats.org/officeDocument/2006/relationships" xmlns:p="http://schemas.openxmlformats.org/presentationml/2006/main">
+  <p:cSld>
+    <p:spTree>
+      <p:nvGrpSpPr>
+        <p:cNvPr id="1" name=""/>
+        <p:cNvGrpSpPr/>
+        <p:nvPr/>
+      </p:nvGrpSpPr>
+      <p:grpSpPr>
+        <a:xfrm>
+          <a:off x="0" y="0"/>
+          <a:ext cx="0" cy="0"/>
+          <a:chOff x="0" y="0"/>
+          <a:chExt cx="0" cy="0"/>
+        </a:xfrm>
+      </p:grpSpPr>
+      <p:sp>
+        <p:nvSpPr>
+          <p:cNvPr id="2" name="Title 1"/>
+          <p:cNvSpPr>
+            <a:spLocks noGrp="1"/>
+          </p:cNvSpPr>
+          <p:nvPr>
+            <p:ph type="title"/>
+          </p:nvPr>
+        </p:nvSpPr>
+        <p:spPr>
+          <a:xfrm>
+            <a:off x="760000" y="300000"/>
+            <a:ext cx="10670000" cy="700000"/>
+          </a:xfrm>
+        </p:spPr>
+        <p:txBody>
+          <a:bodyPr wrap="square" lIns="0" tIns="0" rIns="0" bIns="0" anchor="t">
+            <a:noAutofit/>
+          </a:bodyPr>
+          <a:lstStyle/>
+          <a:p>
+            <a:pPr algn="l"/>
+            <a:r>
+              <a:rPr lang="pt-BR" sz="4000" b="1"/>
+              <a:t>Nossa Solução</a:t>
+            </a:r>
+          </a:p>
+        </p:txBody>
+      </p:sp>
+      <p:sp>
+        <p:nvSpPr>
+          <p:cNvPr id="147" name="Forma 147"/>
+          <p:cNvSpPr/>
+          <p:nvPr/>
+        </p:nvSpPr>
+        <p:spPr>
+          <a:xfrm>
+            <a:off x="760000" y="1100000"/>
+            <a:ext cx="10670000" cy="900000"/>
+          </a:xfrm>
+          <a:prstGeom prst="rect">
+            <a:avLst/>
+          </a:prstGeom>
+          <a:noFill/>
+          <a:ln>
+            <a:noFill/>
+          </a:ln>
+        </p:spPr>
+        <p:txBody>
+          <a:bodyPr wrap="square" lIns="0" tIns="0" rIns="0" bIns="0" anchor="t">
+            <a:noAutofit/>
+          </a:bodyPr>
+          <a:lstStyle/>
+          <a:p>
+            <a:pPr algn="l" marL="0" indent="0">
+              <a:buNone/>
+            </a:pPr>
+            <a:r>
+              <a:rPr lang="pt-BR" sz="1700" dirty="0">
+                <a:solidFill>
+                  <a:srgbClr val="1F2937"/>
+                </a:solidFill>
+                <a:latin typeface="+mn-lt"/>
+              </a:rPr>
+              <a:t>Um sistema que transforma a manutenção do veículo em um fluxo otimizado, do primeiro acesso à avaliação do atendimento.</a:t>
+            </a:r>
+          </a:p>
+        </p:txBody>
+      </p:sp>
+      <p:sp>
+        <p:nvSpPr>
+          <p:cNvPr id="148" name="Forma 148"/>
+          <p:cNvSpPr/>
+          <p:nvPr/>
+        </p:nvSpPr>
+        <p:spPr>
+          <a:xfrm>
+            <a:off x="760000" y="2000000"/>
+            <a:ext cx="5200000" cy="4050000"/>
+          </a:xfrm>
+          <a:prstGeom prst="roundRect">
+            <a:avLst>
+              <a:gd name="adj" fmla="val 6000"/>
+            </a:avLst>
+          </a:prstGeom>
+          <a:solidFill>
+            <a:srgbClr val="E8F1FB"/>
+          </a:solidFill>
+          <a:ln w="12700">
+            <a:solidFill>
+              <a:srgbClr val="004A91"/>
+            </a:solidFill>
+          </a:ln>
+        </p:spPr>
+        <p:txBody>
+          <a:bodyPr wrap="square" lIns="137160" tIns="137160" rIns="137160" bIns="137160" anchor="t">
+            <a:noAutofit/>
+          </a:bodyPr>
+          <a:lstStyle/>
+          <a:p>
+            <a:pPr algn="l" marL="0" indent="0">
+              <a:spcAft>
+                <a:spcPts val="600"/>
+              </a:spcAft>
+              <a:buNone/>
+            </a:pPr>
+            <a:r>
+              <a:rPr lang="pt-BR" sz="1800" b="1" dirty="0">
+                <a:solidFill>
+                  <a:srgbClr val="004A91"/>
+                </a:solidFill>
+                <a:latin typeface="+mn-lt"/>
+              </a:rPr>
+              <a:t>O que já foi feito</a:t>
+            </a:r>
+          </a:p>
+          <a:p>
+            <a:pPr algn="l" marL="285750" indent="-285750">
+              <a:spcAft>
+                <a:spcPts val="400"/>
+              </a:spcAft>
+              <a:buFont typeface="Arial"/>
+              <a:buChar char="•"/>
+            </a:pPr>
+            <a:r>
+              <a:rPr lang="pt-BR" sz="1500" dirty="0">
+                <a:solidFill>
+                  <a:srgbClr val="1F2937"/>
+                </a:solidFill>
+                <a:latin typeface="+mn-lt"/>
+              </a:rPr>
+              <a:t>Mapeamento do Product Backlog e protótipo navegável de alta fidelidade (12 passos)</a:t>
+            </a:r>
+          </a:p>
+          <a:p>
+            <a:pPr algn="l" marL="285750" indent="-285750">
+              <a:spcAft>
+                <a:spcPts val="400"/>
+              </a:spcAft>
+              <a:buFont typeface="Arial"/>
+              <a:buChar char="•"/>
+            </a:pPr>
+            <a:r>
+              <a:rPr lang="pt-BR" sz="1500" dirty="0">
+                <a:solidFill>
+                  <a:srgbClr val="1F2937"/>
+                </a:solidFill>
+                <a:latin typeface="+mn-lt"/>
+              </a:rPr>
+              <a:t>Aplicativo web instalável funcionando, com banco de dados real</a:t>
+            </a:r>
+          </a:p>
+          <a:p>
+            <a:pPr algn="l" marL="285750" indent="-285750">
+              <a:spcAft>
+                <a:spcPts val="400"/>
+              </a:spcAft>
+              <a:buFont typeface="Arial"/>
+              <a:buChar char="•"/>
+            </a:pPr>
+            <a:r>
+              <a:rPr lang="pt-BR" sz="1500" dirty="0">
+                <a:solidFill>
+                  <a:srgbClr val="1F2937"/>
+                </a:solidFill>
+                <a:latin typeface="+mn-lt"/>
+              </a:rPr>
+              <a:t>Cadastro de clientes e lavadores, pedido, acompanhamento em tempo real e mapa</a:t>
+            </a:r>
+          </a:p>
+          <a:p>
+            <a:pPr algn="l" marL="285750" indent="-285750">
+              <a:spcAft>
+                <a:spcPts val="400"/>
+              </a:spcAft>
+              <a:buFont typeface="Arial"/>
+              <a:buChar char="•"/>
+            </a:pPr>
+            <a:r>
+              <a:rPr lang="pt-BR" sz="1500" dirty="0">
+                <a:solidFill>
+                  <a:srgbClr val="1F2937"/>
+                </a:solidFill>
+                <a:latin typeface="+mn-lt"/>
+              </a:rPr>
+              <a:t>Código de 6 dígitos ou QR para comprovar o início; rota otimizada do prestador</a:t>
+            </a:r>
+          </a:p>
+          <a:p>
+            <a:pPr algn="l" marL="285750" indent="-285750">
+              <a:spcAft>
+                <a:spcPts val="400"/>
+              </a:spcAft>
+              <a:buFont typeface="Arial"/>
+              <a:buChar char="•"/>
+            </a:pPr>
+            <a:r>
+              <a:rPr lang="pt-BR" sz="1500" dirty="0">
+                <a:solidFill>
+                  <a:srgbClr val="1F2937"/>
+                </a:solidFill>
+                <a:latin typeface="+mn-lt"/>
+              </a:rPr>
+              <a:t>Avaliação e painel do administrador com indicadores</a:t>
+            </a:r>
+          </a:p>
+        </p:txBody>
+      </p:sp>
+      <p:sp>
+        <p:nvSpPr>
+          <p:cNvPr id="149" name="Forma 149"/>
+          <p:cNvSpPr/>
+          <p:nvPr/>
+        </p:nvSpPr>
+        <p:spPr>
+          <a:xfrm>
+            <a:off x="6230000" y="2000000"/>
+            <a:ext cx="5200000" cy="4050000"/>
+          </a:xfrm>
+          <a:prstGeom prst="roundRect">
+            <a:avLst>
+              <a:gd name="adj" fmla="val 6000"/>
+            </a:avLst>
+          </a:prstGeom>
+          <a:solidFill>
+            <a:srgbClr val="FFF1DC"/>
+          </a:solidFill>
+          <a:ln w="12700">
+            <a:solidFill>
+              <a:srgbClr val="F7941D"/>
+            </a:solidFill>
+          </a:ln>
+        </p:spPr>
+        <p:txBody>
+          <a:bodyPr wrap="square" lIns="137160" tIns="137160" rIns="137160" bIns="137160" anchor="t">
+            <a:noAutofit/>
+          </a:bodyPr>
+          <a:lstStyle/>
+          <a:p>
+            <a:pPr algn="l" marL="0" indent="0">
+              <a:spcAft>
+                <a:spcPts val="600"/>
+              </a:spcAft>
+              <a:buNone/>
+            </a:pPr>
+            <a:r>
+              <a:rPr lang="pt-BR" sz="1800" b="1" dirty="0">
+                <a:solidFill>
+                  <a:srgbClr val="004A91"/>
+                </a:solidFill>
+                <a:latin typeface="+mn-lt"/>
+              </a:rPr>
+              <a:t>O que pretendemos desenvolver</a:t>
+            </a:r>
+          </a:p>
+          <a:p>
+            <a:pPr algn="l" marL="285750" indent="-285750">
+              <a:spcAft>
+                <a:spcPts val="400"/>
+              </a:spcAft>
+              <a:buFont typeface="Arial"/>
+              <a:buChar char="•"/>
+            </a:pPr>
+            <a:r>
+              <a:rPr lang="pt-BR" sz="1500" dirty="0">
+                <a:solidFill>
+                  <a:srgbClr val="1F2937"/>
+                </a:solidFill>
+                <a:latin typeface="+mn-lt"/>
+              </a:rPr>
+              <a:t>Pagamento real com gateway (PIX e cartão)</a:t>
+            </a:r>
+          </a:p>
+          <a:p>
+            <a:pPr algn="l" marL="285750" indent="-285750">
+              <a:spcAft>
+                <a:spcPts val="400"/>
+              </a:spcAft>
+              <a:buFont typeface="Arial"/>
+              <a:buChar char="•"/>
+            </a:pPr>
+            <a:r>
+              <a:rPr lang="pt-BR" sz="1500" dirty="0">
+                <a:solidFill>
+                  <a:srgbClr val="1F2937"/>
+                </a:solidFill>
+                <a:latin typeface="+mn-lt"/>
+              </a:rPr>
+              <a:t>GPS real e trânsito em tempo real</a:t>
+            </a:r>
+          </a:p>
+          <a:p>
+            <a:pPr algn="l" marL="285750" indent="-285750">
+              <a:spcAft>
+                <a:spcPts val="400"/>
+              </a:spcAft>
+              <a:buFont typeface="Arial"/>
+              <a:buChar char="•"/>
+            </a:pPr>
+            <a:r>
+              <a:rPr lang="pt-BR" sz="1500" dirty="0">
+                <a:solidFill>
+                  <a:srgbClr val="1F2937"/>
+                </a:solidFill>
+                <a:latin typeface="+mn-lt"/>
+              </a:rPr>
+              <a:t>Fotos antes e depois do serviço</a:t>
+            </a:r>
+          </a:p>
+          <a:p>
+            <a:pPr algn="l" marL="285750" indent="-285750">
+              <a:spcAft>
+                <a:spcPts val="400"/>
+              </a:spcAft>
+              <a:buFont typeface="Arial"/>
+              <a:buChar char="•"/>
+            </a:pPr>
+            <a:r>
+              <a:rPr lang="pt-BR" sz="1500" dirty="0">
+                <a:solidFill>
+                  <a:srgbClr val="1F2937"/>
+                </a:solidFill>
+                <a:latin typeface="+mn-lt"/>
+              </a:rPr>
+              <a:t>Controle de estoque com alerta de nível mínimo</a:t>
+            </a:r>
+          </a:p>
+          <a:p>
+            <a:pPr algn="l" marL="285750" indent="-285750">
+              <a:spcAft>
+                <a:spcPts val="400"/>
+              </a:spcAft>
+              <a:buFont typeface="Arial"/>
+              <a:buChar char="•"/>
+            </a:pPr>
+            <a:r>
+              <a:rPr lang="pt-BR" sz="1500" dirty="0">
+                <a:solidFill>
+                  <a:srgbClr val="1F2937"/>
+                </a:solidFill>
+                <a:latin typeface="+mn-lt"/>
+              </a:rPr>
+              <a:t>Fidelidade, assinaturas e área de Empresas (frotas)</a:t>
+            </a:r>
+          </a:p>
+          <a:p>
+            <a:pPr algn="l" marL="285750" indent="-285750">
+              <a:spcAft>
+                <a:spcPts val="400"/>
+              </a:spcAft>
+              <a:buFont typeface="Arial"/>
+              <a:buChar char="•"/>
+            </a:pPr>
+            <a:r>
+              <a:rPr lang="pt-BR" sz="1500" dirty="0">
+                <a:solidFill>
+                  <a:srgbClr val="1F2937"/>
+                </a:solidFill>
+                <a:latin typeface="+mn-lt"/>
+              </a:rPr>
+              <a:t>Previsão de demanda com inteligência artificial</a:t>
+            </a:r>
+          </a:p>
+        </p:txBody>
+      </p:sp>
+    </p:spTree>
+  </p:cSld>
+  <p:clrMapOvr>
+    <a:masterClrMapping/>
+  </p:clrMapOvr>
+</p:sld>
+</file>
+
 <file path=ppt/slides/slide2.xml><?xml version="1.0" encoding="utf-8"?>
 <p:sld xmlns:a="http://schemas.openxmlformats.org/drawingml/2006/main" xmlns:r="http://schemas.openxmlformats.org/officeDocument/2006/relationships" xmlns:p="http://schemas.openxmlformats.org/presentationml/2006/main">
   <p:cSld>
@@ -6901,37 +7883,37 @@
           <a:lstStyle/>
           <a:p>
             <a:r>
-              <a:rPr lang="pt-BR" sz="3600" dirty="0"/>
-              <a:t>Rodrigo Andrade da Ponte </a:t>
-            </a:r>
-          </a:p>
-          <a:p>
-            <a:r>
-              <a:rPr lang="pt-BR" sz="3600" dirty="0"/>
-              <a:t>Izabel Cristina Alves de Oliveira </a:t>
-            </a:r>
-          </a:p>
-          <a:p>
-            <a:r>
-              <a:rPr lang="pt-BR" sz="3600" dirty="0"/>
-              <a:t>Magno Guimaraes da Silva  </a:t>
-            </a:r>
-          </a:p>
-          <a:p>
-            <a:r>
-              <a:rPr lang="pt-BR" sz="3600" dirty="0"/>
-              <a:t>Diego Rodrigo dos Santos Machado</a:t>
-            </a:r>
-          </a:p>
-          <a:p>
-            <a:endParaRPr lang="pt-BR" sz="3600" dirty="0"/>
-          </a:p>
-          <a:p>
-            <a:r>
-              <a:rPr lang="pt-BR" sz="3600" dirty="0"/>
+              <a:rPr lang="pt-BR" sz="3000" dirty="0"/>
+              <a:t>Membro 1 · Rodrigo Andrade da Ponte</a:t>
+            </a:r>
+          </a:p>
+          <a:p>
+            <a:r>
+              <a:rPr lang="pt-BR" sz="3000" dirty="0"/>
+              <a:t>Membro 2 · Izabel Cristina Alves de Oliveira</a:t>
+            </a:r>
+          </a:p>
+          <a:p>
+            <a:r>
+              <a:rPr lang="pt-BR" sz="3000" dirty="0"/>
+              <a:t>Membro 3 · Magno Guimaraes da Silva</a:t>
+            </a:r>
+          </a:p>
+          <a:p>
+            <a:r>
+              <a:rPr lang="pt-BR" sz="3000" dirty="0"/>
+              <a:t>Membro 4 · Diego Rodrigo dos Santos Machado</a:t>
+            </a:r>
+          </a:p>
+          <a:p>
+            <a:endParaRPr lang="pt-BR" sz="3000" dirty="0"/>
+          </a:p>
+          <a:p>
+            <a:r>
+              <a:rPr lang="pt-BR" sz="3000" dirty="0"/>
               <a:t>Orientador: Jean Lima</a:t>
             </a:r>
-            <a:endParaRPr lang="pt-BR" sz="3600" dirty="0">
+            <a:endParaRPr lang="pt-BR" sz="3000" dirty="0">
               <a:ea typeface="Calibri"/>
             </a:endParaRPr>
           </a:p>
@@ -7271,735 +8253,6 @@
 </file>
 
 <file path=ppt/slides/slide6.xml><?xml version="1.0" encoding="utf-8"?>
-<p:sld xmlns:a="http://schemas.openxmlformats.org/drawingml/2006/main" xmlns:r="http://schemas.openxmlformats.org/officeDocument/2006/relationships" xmlns:p="http://schemas.openxmlformats.org/presentationml/2006/main">
-  <p:cSld>
-    <p:bg>
-      <p:bgPr>
-        <a:solidFill>
-          <a:schemeClr val="bg1"/>
-        </a:solidFill>
-        <a:effectLst/>
-      </p:bgPr>
-    </p:bg>
-    <p:spTree>
-      <p:nvGrpSpPr>
-        <p:cNvPr id="1" name="">
-          <a:extLst>
-            <a:ext uri="{FF2B5EF4-FFF2-40B4-BE49-F238E27FC236}">
-              <a16:creationId xmlns:a16="http://schemas.microsoft.com/office/drawing/2014/main" id="{9D430FFB-926D-DC9F-A1AE-84BD1394C2DB}"/>
-            </a:ext>
-          </a:extLst>
-        </p:cNvPr>
-        <p:cNvGrpSpPr/>
-        <p:nvPr/>
-      </p:nvGrpSpPr>
-      <p:grpSpPr>
-        <a:xfrm>
-          <a:off x="0" y="0"/>
-          <a:ext cx="0" cy="0"/>
-          <a:chOff x="0" y="0"/>
-          <a:chExt cx="0" cy="0"/>
-        </a:xfrm>
-      </p:grpSpPr>
-      <p:sp>
-        <p:nvSpPr>
-          <p:cNvPr id="2" name="Title 1"/>
-          <p:cNvSpPr>
-            <a:spLocks noGrp="1"/>
-          </p:cNvSpPr>
-          <p:nvPr>
-            <p:ph type="title"/>
-          </p:nvPr>
-        </p:nvSpPr>
-        <p:spPr>
-          <a:xfrm>
-            <a:off x="760000" y="300000"/>
-            <a:ext cx="10670000" cy="700000"/>
-          </a:xfrm>
-        </p:spPr>
-        <p:txBody>
-          <a:bodyPr wrap="square" lIns="0" tIns="0" rIns="0" bIns="0" anchor="t">
-            <a:noAutofit/>
-          </a:bodyPr>
-          <a:lstStyle/>
-          <a:p>
-            <a:pPr algn="l"/>
-            <a:r>
-              <a:rPr lang="pt-BR" sz="4000" b="1"/>
-              <a:t>Dados do Projeto</a:t>
-            </a:r>
-          </a:p>
-        </p:txBody>
-      </p:sp>
-      <p:sp>
-        <p:nvSpPr>
-          <p:cNvPr id="143" name="Forma 143"/>
-          <p:cNvSpPr/>
-          <p:nvPr/>
-        </p:nvSpPr>
-        <p:spPr>
-          <a:xfrm>
-            <a:off x="760000" y="1150000"/>
-            <a:ext cx="5200000" cy="2350000"/>
-          </a:xfrm>
-          <a:prstGeom prst="roundRect">
-            <a:avLst>
-              <a:gd name="adj" fmla="val 6000"/>
-            </a:avLst>
-          </a:prstGeom>
-          <a:solidFill>
-            <a:srgbClr val="E8F1FB"/>
-          </a:solidFill>
-          <a:ln w="12700">
-            <a:solidFill>
-              <a:srgbClr val="004A91"/>
-            </a:solidFill>
-          </a:ln>
-        </p:spPr>
-        <p:txBody>
-          <a:bodyPr wrap="square" lIns="137160" tIns="137160" rIns="137160" bIns="137160" anchor="t">
-            <a:noAutofit/>
-          </a:bodyPr>
-          <a:lstStyle/>
-          <a:p>
-            <a:pPr algn="l" marL="0" indent="0">
-              <a:spcAft>
-                <a:spcPts val="600"/>
-              </a:spcAft>
-              <a:buNone/>
-            </a:pPr>
-            <a:r>
-              <a:rPr lang="pt-BR" sz="2000" b="1" dirty="0">
-                <a:solidFill>
-                  <a:srgbClr val="004A91"/>
-                </a:solidFill>
-                <a:latin typeface="+mn-lt"/>
-              </a:rPr>
-              <a:t>Inovação de processo</a:t>
-            </a:r>
-          </a:p>
-          <a:p>
-            <a:pPr algn="l" marL="0" indent="0">
-              <a:spcAft>
-                <a:spcPts val="400"/>
-              </a:spcAft>
-              <a:buNone/>
-            </a:pPr>
-            <a:r>
-              <a:rPr lang="pt-BR" sz="1800" dirty="0">
-                <a:solidFill>
-                  <a:srgbClr val="1F2937"/>
-                </a:solidFill>
-                <a:latin typeface="+mn-lt"/>
-              </a:rPr>
-              <a:t>Digitaliza e mede todo o ciclo: pedido, despacho, execução comprovada, pagamento e avaliação.</a:t>
-            </a:r>
-          </a:p>
-        </p:txBody>
-      </p:sp>
-      <p:sp>
-        <p:nvSpPr>
-          <p:cNvPr id="144" name="Forma 144"/>
-          <p:cNvSpPr/>
-          <p:nvPr/>
-        </p:nvSpPr>
-        <p:spPr>
-          <a:xfrm>
-            <a:off x="6230000" y="1150000"/>
-            <a:ext cx="5200000" cy="2350000"/>
-          </a:xfrm>
-          <a:prstGeom prst="roundRect">
-            <a:avLst>
-              <a:gd name="adj" fmla="val 6000"/>
-            </a:avLst>
-          </a:prstGeom>
-          <a:solidFill>
-            <a:srgbClr val="E8F1FB"/>
-          </a:solidFill>
-          <a:ln w="12700">
-            <a:solidFill>
-              <a:srgbClr val="004A91"/>
-            </a:solidFill>
-          </a:ln>
-        </p:spPr>
-        <p:txBody>
-          <a:bodyPr wrap="square" lIns="137160" tIns="137160" rIns="137160" bIns="137160" anchor="t">
-            <a:noAutofit/>
-          </a:bodyPr>
-          <a:lstStyle/>
-          <a:p>
-            <a:pPr algn="l" marL="0" indent="0">
-              <a:spcAft>
-                <a:spcPts val="600"/>
-              </a:spcAft>
-              <a:buNone/>
-            </a:pPr>
-            <a:r>
-              <a:rPr lang="pt-BR" sz="2000" b="1" dirty="0">
-                <a:solidFill>
-                  <a:srgbClr val="004A91"/>
-                </a:solidFill>
-                <a:latin typeface="+mn-lt"/>
-              </a:rPr>
-              <a:t>Três perfis, um aplicativo</a:t>
-            </a:r>
-          </a:p>
-          <a:p>
-            <a:pPr algn="l" marL="0" indent="0">
-              <a:spcAft>
-                <a:spcPts val="400"/>
-              </a:spcAft>
-              <a:buNone/>
-            </a:pPr>
-            <a:r>
-              <a:rPr lang="pt-BR" sz="1800" dirty="0">
-                <a:solidFill>
-                  <a:srgbClr val="1F2937"/>
-                </a:solidFill>
-                <a:latin typeface="+mn-lt"/>
-              </a:rPr>
-              <a:t>Cliente pede e acompanha. Prestador aceita, executa e segue o roteiro do dia. Administrador acompanha os indicadores.</a:t>
-            </a:r>
-          </a:p>
-        </p:txBody>
-      </p:sp>
-      <p:sp>
-        <p:nvSpPr>
-          <p:cNvPr id="145" name="Forma 145"/>
-          <p:cNvSpPr/>
-          <p:nvPr/>
-        </p:nvSpPr>
-        <p:spPr>
-          <a:xfrm>
-            <a:off x="760000" y="3750000"/>
-            <a:ext cx="5200000" cy="2350000"/>
-          </a:xfrm>
-          <a:prstGeom prst="roundRect">
-            <a:avLst>
-              <a:gd name="adj" fmla="val 6000"/>
-            </a:avLst>
-          </a:prstGeom>
-          <a:solidFill>
-            <a:srgbClr val="E8F1FB"/>
-          </a:solidFill>
-          <a:ln w="12700">
-            <a:solidFill>
-              <a:srgbClr val="004A91"/>
-            </a:solidFill>
-          </a:ln>
-        </p:spPr>
-        <p:txBody>
-          <a:bodyPr wrap="square" lIns="137160" tIns="137160" rIns="137160" bIns="137160" anchor="t">
-            <a:noAutofit/>
-          </a:bodyPr>
-          <a:lstStyle/>
-          <a:p>
-            <a:pPr algn="l" marL="0" indent="0">
-              <a:spcAft>
-                <a:spcPts val="600"/>
-              </a:spcAft>
-              <a:buNone/>
-            </a:pPr>
-            <a:r>
-              <a:rPr lang="pt-BR" sz="2000" b="1" dirty="0">
-                <a:solidFill>
-                  <a:srgbClr val="004A91"/>
-                </a:solidFill>
-                <a:latin typeface="+mn-lt"/>
-              </a:rPr>
-              <a:t>Objetivos</a:t>
-            </a:r>
-          </a:p>
-          <a:p>
-            <a:pPr algn="l" marL="0" indent="0">
-              <a:spcAft>
-                <a:spcPts val="400"/>
-              </a:spcAft>
-              <a:buNone/>
-            </a:pPr>
-            <a:r>
-              <a:rPr lang="pt-BR" sz="1800" dirty="0">
-                <a:solidFill>
-                  <a:srgbClr val="1F2937"/>
-                </a:solidFill>
-                <a:latin typeface="+mn-lt"/>
-              </a:rPr>
-              <a:t>Serviço no local escolhido, com preço e duração informados antes; acompanhamento ao vivo; início comprovado por código ou QR; avaliação do serviço.</a:t>
-            </a:r>
-          </a:p>
-        </p:txBody>
-      </p:sp>
-      <p:sp>
-        <p:nvSpPr>
-          <p:cNvPr id="146" name="Forma 146"/>
-          <p:cNvSpPr/>
-          <p:nvPr/>
-        </p:nvSpPr>
-        <p:spPr>
-          <a:xfrm>
-            <a:off x="6230000" y="3750000"/>
-            <a:ext cx="5200000" cy="2350000"/>
-          </a:xfrm>
-          <a:prstGeom prst="roundRect">
-            <a:avLst>
-              <a:gd name="adj" fmla="val 6000"/>
-            </a:avLst>
-          </a:prstGeom>
-          <a:solidFill>
-            <a:srgbClr val="E8F1FB"/>
-          </a:solidFill>
-          <a:ln w="12700">
-            <a:solidFill>
-              <a:srgbClr val="004A91"/>
-            </a:solidFill>
-          </a:ln>
-        </p:spPr>
-        <p:txBody>
-          <a:bodyPr wrap="square" lIns="137160" tIns="137160" rIns="137160" bIns="137160" anchor="t">
-            <a:noAutofit/>
-          </a:bodyPr>
-          <a:lstStyle/>
-          <a:p>
-            <a:pPr algn="l" marL="0" indent="0">
-              <a:spcAft>
-                <a:spcPts val="600"/>
-              </a:spcAft>
-              <a:buNone/>
-            </a:pPr>
-            <a:r>
-              <a:rPr lang="pt-BR" sz="2000" b="1" dirty="0">
-                <a:solidFill>
-                  <a:srgbClr val="004A91"/>
-                </a:solidFill>
-                <a:latin typeface="+mn-lt"/>
-              </a:rPr>
-              <a:t>Diferenciais</a:t>
-            </a:r>
-          </a:p>
-          <a:p>
-            <a:pPr algn="l" marL="0" indent="0">
-              <a:spcAft>
-                <a:spcPts val="400"/>
-              </a:spcAft>
-              <a:buNone/>
-            </a:pPr>
-            <a:r>
-              <a:rPr lang="pt-BR" sz="1800" dirty="0">
-                <a:solidFill>
-                  <a:srgbClr val="1F2937"/>
-                </a:solidFill>
-                <a:latin typeface="+mn-lt"/>
-              </a:rPr>
-              <a:t>Serviço personalizável; EcoWash com economia de água medida; rota otimizada do prestador; segurança e LGPD desde a concepção.</a:t>
-            </a:r>
-          </a:p>
-        </p:txBody>
-      </p:sp>
-    </p:spTree>
-    <p:extLst>
-      <p:ext uri="{BB962C8B-B14F-4D97-AF65-F5344CB8AC3E}">
-        <p14:creationId xmlns:p14="http://schemas.microsoft.com/office/powerpoint/2010/main" val="1442575905"/>
-      </p:ext>
-    </p:extLst>
-  </p:cSld>
-  <p:clrMapOvr>
-    <a:overrideClrMapping bg1="lt1" tx1="dk1" bg2="lt2" tx2="dk2" accent1="accent1" accent2="accent2" accent3="accent3" accent4="accent4" accent5="accent5" accent6="accent6" hlink="hlink" folHlink="folHlink"/>
-  </p:clrMapOvr>
-</p:sld>
-</file>
-
-<file path=ppt/slides/slide7.xml><?xml version="1.0" encoding="utf-8"?>
-<p:sld xmlns:a="http://schemas.openxmlformats.org/drawingml/2006/main" xmlns:r="http://schemas.openxmlformats.org/officeDocument/2006/relationships" xmlns:p="http://schemas.openxmlformats.org/presentationml/2006/main">
-  <p:cSld>
-    <p:spTree>
-      <p:nvGrpSpPr>
-        <p:cNvPr id="1" name=""/>
-        <p:cNvGrpSpPr/>
-        <p:nvPr/>
-      </p:nvGrpSpPr>
-      <p:grpSpPr>
-        <a:xfrm>
-          <a:off x="0" y="0"/>
-          <a:ext cx="0" cy="0"/>
-          <a:chOff x="0" y="0"/>
-          <a:chExt cx="0" cy="0"/>
-        </a:xfrm>
-      </p:grpSpPr>
-      <p:sp>
-        <p:nvSpPr>
-          <p:cNvPr id="2" name="Title 1"/>
-          <p:cNvSpPr>
-            <a:spLocks noGrp="1"/>
-          </p:cNvSpPr>
-          <p:nvPr>
-            <p:ph type="title"/>
-          </p:nvPr>
-        </p:nvSpPr>
-        <p:spPr>
-          <a:xfrm>
-            <a:off x="760000" y="300000"/>
-            <a:ext cx="10670000" cy="700000"/>
-          </a:xfrm>
-        </p:spPr>
-        <p:txBody>
-          <a:bodyPr wrap="square" lIns="0" tIns="0" rIns="0" bIns="0" anchor="t">
-            <a:noAutofit/>
-          </a:bodyPr>
-          <a:lstStyle/>
-          <a:p>
-            <a:pPr algn="l"/>
-            <a:r>
-              <a:rPr lang="pt-BR" sz="4000" b="1"/>
-              <a:t>Nossa Solução</a:t>
-            </a:r>
-          </a:p>
-        </p:txBody>
-      </p:sp>
-      <p:sp>
-        <p:nvSpPr>
-          <p:cNvPr id="147" name="Forma 147"/>
-          <p:cNvSpPr/>
-          <p:nvPr/>
-        </p:nvSpPr>
-        <p:spPr>
-          <a:xfrm>
-            <a:off x="760000" y="1100000"/>
-            <a:ext cx="10670000" cy="900000"/>
-          </a:xfrm>
-          <a:prstGeom prst="rect">
-            <a:avLst/>
-          </a:prstGeom>
-          <a:noFill/>
-          <a:ln>
-            <a:noFill/>
-          </a:ln>
-        </p:spPr>
-        <p:txBody>
-          <a:bodyPr wrap="square" lIns="0" tIns="0" rIns="0" bIns="0" anchor="t">
-            <a:noAutofit/>
-          </a:bodyPr>
-          <a:lstStyle/>
-          <a:p>
-            <a:pPr algn="l" marL="0" indent="0">
-              <a:buNone/>
-            </a:pPr>
-            <a:r>
-              <a:rPr lang="pt-BR" sz="1700" dirty="0">
-                <a:solidFill>
-                  <a:srgbClr val="1F2937"/>
-                </a:solidFill>
-                <a:latin typeface="+mn-lt"/>
-              </a:rPr>
-              <a:t>Um sistema que transforma a manutenção do veículo em um fluxo otimizado, do primeiro acesso à avaliação do atendimento.</a:t>
-            </a:r>
-          </a:p>
-        </p:txBody>
-      </p:sp>
-      <p:sp>
-        <p:nvSpPr>
-          <p:cNvPr id="148" name="Forma 148"/>
-          <p:cNvSpPr/>
-          <p:nvPr/>
-        </p:nvSpPr>
-        <p:spPr>
-          <a:xfrm>
-            <a:off x="760000" y="2000000"/>
-            <a:ext cx="5200000" cy="4050000"/>
-          </a:xfrm>
-          <a:prstGeom prst="roundRect">
-            <a:avLst>
-              <a:gd name="adj" fmla="val 6000"/>
-            </a:avLst>
-          </a:prstGeom>
-          <a:solidFill>
-            <a:srgbClr val="E8F1FB"/>
-          </a:solidFill>
-          <a:ln w="12700">
-            <a:solidFill>
-              <a:srgbClr val="004A91"/>
-            </a:solidFill>
-          </a:ln>
-        </p:spPr>
-        <p:txBody>
-          <a:bodyPr wrap="square" lIns="137160" tIns="137160" rIns="137160" bIns="137160" anchor="t">
-            <a:noAutofit/>
-          </a:bodyPr>
-          <a:lstStyle/>
-          <a:p>
-            <a:pPr algn="l" marL="0" indent="0">
-              <a:spcAft>
-                <a:spcPts val="600"/>
-              </a:spcAft>
-              <a:buNone/>
-            </a:pPr>
-            <a:r>
-              <a:rPr lang="pt-BR" sz="1800" b="1" dirty="0">
-                <a:solidFill>
-                  <a:srgbClr val="004A91"/>
-                </a:solidFill>
-                <a:latin typeface="+mn-lt"/>
-              </a:rPr>
-              <a:t>O que já foi feito</a:t>
-            </a:r>
-          </a:p>
-          <a:p>
-            <a:pPr algn="l" marL="285750" indent="-285750">
-              <a:spcAft>
-                <a:spcPts val="400"/>
-              </a:spcAft>
-              <a:buFont typeface="Arial"/>
-              <a:buChar char="•"/>
-            </a:pPr>
-            <a:r>
-              <a:rPr lang="pt-BR" sz="1500" dirty="0">
-                <a:solidFill>
-                  <a:srgbClr val="1F2937"/>
-                </a:solidFill>
-                <a:latin typeface="+mn-lt"/>
-              </a:rPr>
-              <a:t>Mapeamento do Product Backlog e protótipo navegável de alta fidelidade (12 passos)</a:t>
-            </a:r>
-          </a:p>
-          <a:p>
-            <a:pPr algn="l" marL="285750" indent="-285750">
-              <a:spcAft>
-                <a:spcPts val="400"/>
-              </a:spcAft>
-              <a:buFont typeface="Arial"/>
-              <a:buChar char="•"/>
-            </a:pPr>
-            <a:r>
-              <a:rPr lang="pt-BR" sz="1500" dirty="0">
-                <a:solidFill>
-                  <a:srgbClr val="1F2937"/>
-                </a:solidFill>
-                <a:latin typeface="+mn-lt"/>
-              </a:rPr>
-              <a:t>Aplicativo web instalável funcionando, com banco de dados real</a:t>
-            </a:r>
-          </a:p>
-          <a:p>
-            <a:pPr algn="l" marL="285750" indent="-285750">
-              <a:spcAft>
-                <a:spcPts val="400"/>
-              </a:spcAft>
-              <a:buFont typeface="Arial"/>
-              <a:buChar char="•"/>
-            </a:pPr>
-            <a:r>
-              <a:rPr lang="pt-BR" sz="1500" dirty="0">
-                <a:solidFill>
-                  <a:srgbClr val="1F2937"/>
-                </a:solidFill>
-                <a:latin typeface="+mn-lt"/>
-              </a:rPr>
-              <a:t>Cadastro de clientes e lavadores, pedido, acompanhamento em tempo real e mapa</a:t>
-            </a:r>
-          </a:p>
-          <a:p>
-            <a:pPr algn="l" marL="285750" indent="-285750">
-              <a:spcAft>
-                <a:spcPts val="400"/>
-              </a:spcAft>
-              <a:buFont typeface="Arial"/>
-              <a:buChar char="•"/>
-            </a:pPr>
-            <a:r>
-              <a:rPr lang="pt-BR" sz="1500" dirty="0">
-                <a:solidFill>
-                  <a:srgbClr val="1F2937"/>
-                </a:solidFill>
-                <a:latin typeface="+mn-lt"/>
-              </a:rPr>
-              <a:t>Código de 6 dígitos ou QR para comprovar o início; rota otimizada do prestador</a:t>
-            </a:r>
-          </a:p>
-          <a:p>
-            <a:pPr algn="l" marL="285750" indent="-285750">
-              <a:spcAft>
-                <a:spcPts val="400"/>
-              </a:spcAft>
-              <a:buFont typeface="Arial"/>
-              <a:buChar char="•"/>
-            </a:pPr>
-            <a:r>
-              <a:rPr lang="pt-BR" sz="1500" dirty="0">
-                <a:solidFill>
-                  <a:srgbClr val="1F2937"/>
-                </a:solidFill>
-                <a:latin typeface="+mn-lt"/>
-              </a:rPr>
-              <a:t>Avaliação e painel do administrador com indicadores</a:t>
-            </a:r>
-          </a:p>
-        </p:txBody>
-      </p:sp>
-      <p:sp>
-        <p:nvSpPr>
-          <p:cNvPr id="149" name="Forma 149"/>
-          <p:cNvSpPr/>
-          <p:nvPr/>
-        </p:nvSpPr>
-        <p:spPr>
-          <a:xfrm>
-            <a:off x="6230000" y="2000000"/>
-            <a:ext cx="5200000" cy="4050000"/>
-          </a:xfrm>
-          <a:prstGeom prst="roundRect">
-            <a:avLst>
-              <a:gd name="adj" fmla="val 6000"/>
-            </a:avLst>
-          </a:prstGeom>
-          <a:solidFill>
-            <a:srgbClr val="FFF1DC"/>
-          </a:solidFill>
-          <a:ln w="12700">
-            <a:solidFill>
-              <a:srgbClr val="F7941D"/>
-            </a:solidFill>
-          </a:ln>
-        </p:spPr>
-        <p:txBody>
-          <a:bodyPr wrap="square" lIns="137160" tIns="137160" rIns="137160" bIns="137160" anchor="t">
-            <a:noAutofit/>
-          </a:bodyPr>
-          <a:lstStyle/>
-          <a:p>
-            <a:pPr algn="l" marL="0" indent="0">
-              <a:spcAft>
-                <a:spcPts val="600"/>
-              </a:spcAft>
-              <a:buNone/>
-            </a:pPr>
-            <a:r>
-              <a:rPr lang="pt-BR" sz="1800" b="1" dirty="0">
-                <a:solidFill>
-                  <a:srgbClr val="004A91"/>
-                </a:solidFill>
-                <a:latin typeface="+mn-lt"/>
-              </a:rPr>
-              <a:t>O que pretendemos desenvolver</a:t>
-            </a:r>
-          </a:p>
-          <a:p>
-            <a:pPr algn="l" marL="285750" indent="-285750">
-              <a:spcAft>
-                <a:spcPts val="400"/>
-              </a:spcAft>
-              <a:buFont typeface="Arial"/>
-              <a:buChar char="•"/>
-            </a:pPr>
-            <a:r>
-              <a:rPr lang="pt-BR" sz="1500" dirty="0">
-                <a:solidFill>
-                  <a:srgbClr val="1F2937"/>
-                </a:solidFill>
-                <a:latin typeface="+mn-lt"/>
-              </a:rPr>
-              <a:t>Pagamento real com gateway (PIX e cartão)</a:t>
-            </a:r>
-          </a:p>
-          <a:p>
-            <a:pPr algn="l" marL="285750" indent="-285750">
-              <a:spcAft>
-                <a:spcPts val="400"/>
-              </a:spcAft>
-              <a:buFont typeface="Arial"/>
-              <a:buChar char="•"/>
-            </a:pPr>
-            <a:r>
-              <a:rPr lang="pt-BR" sz="1500" dirty="0">
-                <a:solidFill>
-                  <a:srgbClr val="1F2937"/>
-                </a:solidFill>
-                <a:latin typeface="+mn-lt"/>
-              </a:rPr>
-              <a:t>GPS real e trânsito em tempo real</a:t>
-            </a:r>
-          </a:p>
-          <a:p>
-            <a:pPr algn="l" marL="285750" indent="-285750">
-              <a:spcAft>
-                <a:spcPts val="400"/>
-              </a:spcAft>
-              <a:buFont typeface="Arial"/>
-              <a:buChar char="•"/>
-            </a:pPr>
-            <a:r>
-              <a:rPr lang="pt-BR" sz="1500" dirty="0">
-                <a:solidFill>
-                  <a:srgbClr val="1F2937"/>
-                </a:solidFill>
-                <a:latin typeface="+mn-lt"/>
-              </a:rPr>
-              <a:t>Fotos antes e depois do serviço</a:t>
-            </a:r>
-          </a:p>
-          <a:p>
-            <a:pPr algn="l" marL="285750" indent="-285750">
-              <a:spcAft>
-                <a:spcPts val="400"/>
-              </a:spcAft>
-              <a:buFont typeface="Arial"/>
-              <a:buChar char="•"/>
-            </a:pPr>
-            <a:r>
-              <a:rPr lang="pt-BR" sz="1500" dirty="0">
-                <a:solidFill>
-                  <a:srgbClr val="1F2937"/>
-                </a:solidFill>
-                <a:latin typeface="+mn-lt"/>
-              </a:rPr>
-              <a:t>Controle de estoque com alerta de nível mínimo</a:t>
-            </a:r>
-          </a:p>
-          <a:p>
-            <a:pPr algn="l" marL="285750" indent="-285750">
-              <a:spcAft>
-                <a:spcPts val="400"/>
-              </a:spcAft>
-              <a:buFont typeface="Arial"/>
-              <a:buChar char="•"/>
-            </a:pPr>
-            <a:r>
-              <a:rPr lang="pt-BR" sz="1500" dirty="0">
-                <a:solidFill>
-                  <a:srgbClr val="1F2937"/>
-                </a:solidFill>
-                <a:latin typeface="+mn-lt"/>
-              </a:rPr>
-              <a:t>Fidelidade, assinaturas e área de Empresas (frotas)</a:t>
-            </a:r>
-          </a:p>
-          <a:p>
-            <a:pPr algn="l" marL="285750" indent="-285750">
-              <a:spcAft>
-                <a:spcPts val="400"/>
-              </a:spcAft>
-              <a:buFont typeface="Arial"/>
-              <a:buChar char="•"/>
-            </a:pPr>
-            <a:r>
-              <a:rPr lang="pt-BR" sz="1500" dirty="0">
-                <a:solidFill>
-                  <a:srgbClr val="1F2937"/>
-                </a:solidFill>
-                <a:latin typeface="+mn-lt"/>
-              </a:rPr>
-              <a:t>Previsão de demanda com inteligência artificial</a:t>
-            </a:r>
-          </a:p>
-        </p:txBody>
-      </p:sp>
-    </p:spTree>
-  </p:cSld>
-  <p:clrMapOvr>
-    <a:masterClrMapping/>
-  </p:clrMapOvr>
-</p:sld>
-</file>
-
-<file path=ppt/slides/slide8.xml><?xml version="1.0" encoding="utf-8"?>
 <p:sld xmlns:a="http://schemas.openxmlformats.org/drawingml/2006/main" xmlns:r="http://schemas.openxmlformats.org/officeDocument/2006/relationships" xmlns:p="http://schemas.openxmlformats.org/presentationml/2006/main">
   <p:cSld>
     <p:spTree>
@@ -8553,6 +8806,1292 @@
 </p:sld>
 </file>
 
+<file path=ppt/slides/slide7.xml><?xml version="1.0" encoding="utf-8"?>
+<p:sld xmlns:a="http://schemas.openxmlformats.org/drawingml/2006/main" xmlns:r="http://schemas.openxmlformats.org/officeDocument/2006/relationships" xmlns:p="http://schemas.openxmlformats.org/presentationml/2006/main">
+  <p:cSld>
+    <p:bg>
+      <p:bgPr>
+        <a:solidFill>
+          <a:schemeClr val="bg1"/>
+        </a:solidFill>
+        <a:effectLst/>
+      </p:bgPr>
+    </p:bg>
+    <p:spTree>
+      <p:nvGrpSpPr>
+        <p:cNvPr id="1" name="">
+          <a:extLst>
+            <a:ext uri="{FF2B5EF4-FFF2-40B4-BE49-F238E27FC236}">
+              <a16:creationId xmlns:a16="http://schemas.microsoft.com/office/drawing/2014/main" id="{9D430FFB-926D-DC9F-A1AE-84BD1394C2DB}"/>
+            </a:ext>
+          </a:extLst>
+        </p:cNvPr>
+        <p:cNvGrpSpPr/>
+        <p:nvPr/>
+      </p:nvGrpSpPr>
+      <p:grpSpPr>
+        <a:xfrm>
+          <a:off x="0" y="0"/>
+          <a:ext cx="0" cy="0"/>
+          <a:chOff x="0" y="0"/>
+          <a:chExt cx="0" cy="0"/>
+        </a:xfrm>
+      </p:grpSpPr>
+      <p:sp>
+        <p:nvSpPr>
+          <p:cNvPr id="2" name="Title 1"/>
+          <p:cNvSpPr>
+            <a:spLocks noGrp="1"/>
+          </p:cNvSpPr>
+          <p:nvPr>
+            <p:ph type="title"/>
+          </p:nvPr>
+        </p:nvSpPr>
+        <p:spPr>
+          <a:xfrm>
+            <a:off x="760000" y="300000"/>
+            <a:ext cx="10670000" cy="700000"/>
+          </a:xfrm>
+        </p:spPr>
+        <p:txBody>
+          <a:bodyPr wrap="square" lIns="0" tIns="0" rIns="0" bIns="0" anchor="t">
+            <a:noAutofit/>
+          </a:bodyPr>
+          <a:lstStyle/>
+          <a:p>
+            <a:pPr algn="l"/>
+            <a:r>
+              <a:rPr lang="pt-BR" sz="4000" b="1"/>
+              <a:t>Dados do Projeto</a:t>
+            </a:r>
+          </a:p>
+        </p:txBody>
+      </p:sp>
+      <p:sp>
+        <p:nvSpPr>
+          <p:cNvPr id="143" name="Forma 143"/>
+          <p:cNvSpPr/>
+          <p:nvPr/>
+        </p:nvSpPr>
+        <p:spPr>
+          <a:xfrm>
+            <a:off x="760000" y="1150000"/>
+            <a:ext cx="5200000" cy="2350000"/>
+          </a:xfrm>
+          <a:prstGeom prst="roundRect">
+            <a:avLst>
+              <a:gd name="adj" fmla="val 6000"/>
+            </a:avLst>
+          </a:prstGeom>
+          <a:solidFill>
+            <a:srgbClr val="E8F1FB"/>
+          </a:solidFill>
+          <a:ln w="12700">
+            <a:solidFill>
+              <a:srgbClr val="004A91"/>
+            </a:solidFill>
+          </a:ln>
+        </p:spPr>
+        <p:txBody>
+          <a:bodyPr wrap="square" lIns="137160" tIns="137160" rIns="137160" bIns="137160" anchor="t">
+            <a:noAutofit/>
+          </a:bodyPr>
+          <a:lstStyle/>
+          <a:p>
+            <a:pPr algn="l" marL="0" indent="0">
+              <a:spcAft>
+                <a:spcPts val="600"/>
+              </a:spcAft>
+              <a:buNone/>
+            </a:pPr>
+            <a:r>
+              <a:rPr lang="pt-BR" sz="2000" b="1" dirty="0">
+                <a:solidFill>
+                  <a:srgbClr val="004A91"/>
+                </a:solidFill>
+                <a:latin typeface="+mn-lt"/>
+              </a:rPr>
+              <a:t>Inovação de processo</a:t>
+            </a:r>
+          </a:p>
+          <a:p>
+            <a:pPr algn="l" marL="0" indent="0">
+              <a:spcAft>
+                <a:spcPts val="400"/>
+              </a:spcAft>
+              <a:buNone/>
+            </a:pPr>
+            <a:r>
+              <a:rPr lang="pt-BR" sz="1800" dirty="0">
+                <a:solidFill>
+                  <a:srgbClr val="1F2937"/>
+                </a:solidFill>
+                <a:latin typeface="+mn-lt"/>
+              </a:rPr>
+              <a:t>Digitaliza e mede todo o ciclo: pedido, despacho, execução comprovada, pagamento e avaliação.</a:t>
+            </a:r>
+          </a:p>
+        </p:txBody>
+      </p:sp>
+      <p:sp>
+        <p:nvSpPr>
+          <p:cNvPr id="144" name="Forma 144"/>
+          <p:cNvSpPr/>
+          <p:nvPr/>
+        </p:nvSpPr>
+        <p:spPr>
+          <a:xfrm>
+            <a:off x="6230000" y="1150000"/>
+            <a:ext cx="5200000" cy="2350000"/>
+          </a:xfrm>
+          <a:prstGeom prst="roundRect">
+            <a:avLst>
+              <a:gd name="adj" fmla="val 6000"/>
+            </a:avLst>
+          </a:prstGeom>
+          <a:solidFill>
+            <a:srgbClr val="E8F1FB"/>
+          </a:solidFill>
+          <a:ln w="12700">
+            <a:solidFill>
+              <a:srgbClr val="004A91"/>
+            </a:solidFill>
+          </a:ln>
+        </p:spPr>
+        <p:txBody>
+          <a:bodyPr wrap="square" lIns="137160" tIns="137160" rIns="137160" bIns="137160" anchor="t">
+            <a:noAutofit/>
+          </a:bodyPr>
+          <a:lstStyle/>
+          <a:p>
+            <a:pPr algn="l" marL="0" indent="0">
+              <a:spcAft>
+                <a:spcPts val="600"/>
+              </a:spcAft>
+              <a:buNone/>
+            </a:pPr>
+            <a:r>
+              <a:rPr lang="pt-BR" sz="2000" b="1" dirty="0">
+                <a:solidFill>
+                  <a:srgbClr val="004A91"/>
+                </a:solidFill>
+                <a:latin typeface="+mn-lt"/>
+              </a:rPr>
+              <a:t>Três perfis, um aplicativo</a:t>
+            </a:r>
+          </a:p>
+          <a:p>
+            <a:pPr algn="l" marL="0" indent="0">
+              <a:spcAft>
+                <a:spcPts val="400"/>
+              </a:spcAft>
+              <a:buNone/>
+            </a:pPr>
+            <a:r>
+              <a:rPr lang="pt-BR" sz="1800" dirty="0">
+                <a:solidFill>
+                  <a:srgbClr val="1F2937"/>
+                </a:solidFill>
+                <a:latin typeface="+mn-lt"/>
+              </a:rPr>
+              <a:t>Cliente pede e acompanha. Prestador aceita, executa e segue o roteiro do dia. Administrador acompanha os indicadores.</a:t>
+            </a:r>
+          </a:p>
+        </p:txBody>
+      </p:sp>
+      <p:sp>
+        <p:nvSpPr>
+          <p:cNvPr id="145" name="Forma 145"/>
+          <p:cNvSpPr/>
+          <p:nvPr/>
+        </p:nvSpPr>
+        <p:spPr>
+          <a:xfrm>
+            <a:off x="760000" y="3750000"/>
+            <a:ext cx="5200000" cy="2350000"/>
+          </a:xfrm>
+          <a:prstGeom prst="roundRect">
+            <a:avLst>
+              <a:gd name="adj" fmla="val 6000"/>
+            </a:avLst>
+          </a:prstGeom>
+          <a:solidFill>
+            <a:srgbClr val="E8F1FB"/>
+          </a:solidFill>
+          <a:ln w="12700">
+            <a:solidFill>
+              <a:srgbClr val="004A91"/>
+            </a:solidFill>
+          </a:ln>
+        </p:spPr>
+        <p:txBody>
+          <a:bodyPr wrap="square" lIns="137160" tIns="137160" rIns="137160" bIns="137160" anchor="t">
+            <a:noAutofit/>
+          </a:bodyPr>
+          <a:lstStyle/>
+          <a:p>
+            <a:pPr algn="l" marL="0" indent="0">
+              <a:spcAft>
+                <a:spcPts val="600"/>
+              </a:spcAft>
+              <a:buNone/>
+            </a:pPr>
+            <a:r>
+              <a:rPr lang="pt-BR" sz="2000" b="1" dirty="0">
+                <a:solidFill>
+                  <a:srgbClr val="004A91"/>
+                </a:solidFill>
+                <a:latin typeface="+mn-lt"/>
+              </a:rPr>
+              <a:t>Objetivos</a:t>
+            </a:r>
+          </a:p>
+          <a:p>
+            <a:pPr algn="l" marL="0" indent="0">
+              <a:spcAft>
+                <a:spcPts val="400"/>
+              </a:spcAft>
+              <a:buNone/>
+            </a:pPr>
+            <a:r>
+              <a:rPr lang="pt-BR" sz="1800" dirty="0">
+                <a:solidFill>
+                  <a:srgbClr val="1F2937"/>
+                </a:solidFill>
+                <a:latin typeface="+mn-lt"/>
+              </a:rPr>
+              <a:t>Serviço no local escolhido, com preço e duração informados antes; acompanhamento ao vivo; início comprovado por código ou QR; avaliação do serviço.</a:t>
+            </a:r>
+          </a:p>
+        </p:txBody>
+      </p:sp>
+      <p:sp>
+        <p:nvSpPr>
+          <p:cNvPr id="146" name="Forma 146"/>
+          <p:cNvSpPr/>
+          <p:nvPr/>
+        </p:nvSpPr>
+        <p:spPr>
+          <a:xfrm>
+            <a:off x="6230000" y="3750000"/>
+            <a:ext cx="5200000" cy="2350000"/>
+          </a:xfrm>
+          <a:prstGeom prst="roundRect">
+            <a:avLst>
+              <a:gd name="adj" fmla="val 6000"/>
+            </a:avLst>
+          </a:prstGeom>
+          <a:solidFill>
+            <a:srgbClr val="E8F1FB"/>
+          </a:solidFill>
+          <a:ln w="12700">
+            <a:solidFill>
+              <a:srgbClr val="004A91"/>
+            </a:solidFill>
+          </a:ln>
+        </p:spPr>
+        <p:txBody>
+          <a:bodyPr wrap="square" lIns="137160" tIns="137160" rIns="137160" bIns="137160" anchor="t">
+            <a:noAutofit/>
+          </a:bodyPr>
+          <a:lstStyle/>
+          <a:p>
+            <a:pPr algn="l" marL="0" indent="0">
+              <a:spcAft>
+                <a:spcPts val="600"/>
+              </a:spcAft>
+              <a:buNone/>
+            </a:pPr>
+            <a:r>
+              <a:rPr lang="pt-BR" sz="2000" b="1" dirty="0">
+                <a:solidFill>
+                  <a:srgbClr val="004A91"/>
+                </a:solidFill>
+                <a:latin typeface="+mn-lt"/>
+              </a:rPr>
+              <a:t>Diferenciais</a:t>
+            </a:r>
+          </a:p>
+          <a:p>
+            <a:pPr algn="l" marL="0" indent="0">
+              <a:spcAft>
+                <a:spcPts val="400"/>
+              </a:spcAft>
+              <a:buNone/>
+            </a:pPr>
+            <a:r>
+              <a:rPr lang="pt-BR" sz="1800" dirty="0">
+                <a:solidFill>
+                  <a:srgbClr val="1F2937"/>
+                </a:solidFill>
+                <a:latin typeface="+mn-lt"/>
+              </a:rPr>
+              <a:t>Serviço personalizável; EcoWash com economia de água medida; rota otimizada do prestador; segurança e LGPD desde a concepção.</a:t>
+            </a:r>
+          </a:p>
+        </p:txBody>
+      </p:sp>
+    </p:spTree>
+    <p:extLst>
+      <p:ext uri="{BB962C8B-B14F-4D97-AF65-F5344CB8AC3E}">
+        <p14:creationId xmlns:p14="http://schemas.microsoft.com/office/powerpoint/2010/main" val="1442575905"/>
+      </p:ext>
+    </p:extLst>
+  </p:cSld>
+  <p:clrMapOvr>
+    <a:overrideClrMapping bg1="lt1" tx1="dk1" bg2="lt2" tx2="dk2" accent1="accent1" accent2="accent2" accent3="accent3" accent4="accent4" accent5="accent5" accent6="accent6" hlink="hlink" folHlink="folHlink"/>
+  </p:clrMapOvr>
+</p:sld>
+</file>
+
+<file path=ppt/slides/slide8.xml><?xml version="1.0" encoding="utf-8"?>
+<p:sld xmlns:a="http://schemas.openxmlformats.org/drawingml/2006/main" xmlns:r="http://schemas.openxmlformats.org/officeDocument/2006/relationships" xmlns:p="http://schemas.openxmlformats.org/presentationml/2006/main">
+  <p:cSld>
+    <p:spTree>
+      <p:nvGrpSpPr>
+        <p:cNvPr id="1" name="">
+          <a:extLst>
+            <a:ext uri="{FF2B5EF4-FFF2-40B4-BE49-F238E27FC236}">
+              <a16:creationId xmlns:a16="http://schemas.microsoft.com/office/drawing/2014/main" id="{54D76DEB-2668-D4FD-D994-671DBA3E069C}"/>
+            </a:ext>
+          </a:extLst>
+        </p:cNvPr>
+        <p:cNvGrpSpPr/>
+        <p:nvPr/>
+      </p:nvGrpSpPr>
+      <p:grpSpPr>
+        <a:xfrm>
+          <a:off x="0" y="0"/>
+          <a:ext cx="0" cy="0"/>
+          <a:chOff x="0" y="0"/>
+          <a:chExt cx="0" cy="0"/>
+        </a:xfrm>
+      </p:grpSpPr>
+      <p:sp>
+        <p:nvSpPr>
+          <p:cNvPr id="2" name="Title 1"/>
+          <p:cNvSpPr>
+            <a:spLocks noGrp="1"/>
+          </p:cNvSpPr>
+          <p:nvPr>
+            <p:ph type="title"/>
+          </p:nvPr>
+        </p:nvSpPr>
+        <p:spPr>
+          <a:xfrm>
+            <a:off x="760000" y="300000"/>
+            <a:ext cx="10670000" cy="700000"/>
+          </a:xfrm>
+        </p:spPr>
+        <p:txBody>
+          <a:bodyPr wrap="square" lIns="0" tIns="0" rIns="0" bIns="0" anchor="t">
+            <a:noAutofit/>
+          </a:bodyPr>
+          <a:lstStyle/>
+          <a:p>
+            <a:pPr algn="l"/>
+            <a:r>
+              <a:rPr lang="pt-BR" sz="3800" b="1"/>
+              <a:t>Cliente e lavador em tempo real</a:t>
+            </a:r>
+          </a:p>
+        </p:txBody>
+      </p:sp>
+      <p:sp>
+        <p:nvSpPr>
+          <p:cNvPr id="104" name="Forma 104"/>
+          <p:cNvSpPr/>
+          <p:nvPr/>
+        </p:nvSpPr>
+        <p:spPr>
+          <a:xfrm>
+            <a:off x="760000" y="1150000"/>
+            <a:ext cx="2400000" cy="900000"/>
+          </a:xfrm>
+          <a:prstGeom prst="roundRect">
+            <a:avLst>
+              <a:gd name="adj" fmla="val 12000"/>
+            </a:avLst>
+          </a:prstGeom>
+          <a:solidFill>
+            <a:srgbClr val="E8F1FB"/>
+          </a:solidFill>
+          <a:ln w="12700">
+            <a:solidFill>
+              <a:srgbClr val="004A91"/>
+            </a:solidFill>
+          </a:ln>
+        </p:spPr>
+        <p:txBody>
+          <a:bodyPr wrap="square" lIns="91440" tIns="91440" rIns="91440" bIns="91440" anchor="ctr">
+            <a:noAutofit/>
+          </a:bodyPr>
+          <a:lstStyle/>
+          <a:p>
+            <a:pPr algn="l" marL="0" indent="0">
+              <a:buNone/>
+            </a:pPr>
+            <a:r>
+              <a:rPr lang="pt-BR" sz="1800" b="1" dirty="0">
+                <a:solidFill>
+                  <a:srgbClr val="F7941D"/>
+                </a:solidFill>
+                <a:latin typeface="+mn-lt"/>
+              </a:rPr>
+              <a:t>1  </a:t>
+            </a:r>
+            <a:r>
+              <a:rPr lang="pt-BR" sz="1500" b="1" dirty="0">
+                <a:solidFill>
+                  <a:srgbClr val="004A91"/>
+                </a:solidFill>
+                <a:latin typeface="+mn-lt"/>
+              </a:rPr>
+              <a:t>Solicitação recebida</a:t>
+            </a:r>
+          </a:p>
+          <a:p>
+            <a:pPr algn="l" marL="0" indent="0">
+              <a:buNone/>
+            </a:pPr>
+            <a:r>
+              <a:rPr lang="pt-BR" sz="1200" dirty="0">
+                <a:solidFill>
+                  <a:srgbClr val="5B6B7F"/>
+                </a:solidFill>
+                <a:latin typeface="+mn-lt"/>
+              </a:rPr>
+              <a:t>cliente pede</a:t>
+            </a:r>
+          </a:p>
+        </p:txBody>
+      </p:sp>
+      <p:cxnSp>
+        <p:nvCxnSpPr>
+          <p:cNvPr id="105" name="Seta 105"/>
+          <p:cNvCxnSpPr/>
+          <p:nvPr/>
+        </p:nvCxnSpPr>
+        <p:spPr>
+          <a:xfrm>
+            <a:off x="3180000" y="1600000"/>
+            <a:ext cx="290000" cy="0"/>
+          </a:xfrm>
+          <a:prstGeom prst="straightConnector1">
+            <a:avLst/>
+          </a:prstGeom>
+          <a:ln w="28575">
+            <a:solidFill>
+              <a:srgbClr val="004A91"/>
+            </a:solidFill>
+            <a:tailEnd type="triangle"/>
+          </a:ln>
+        </p:spPr>
+      </p:cxnSp>
+      <p:sp>
+        <p:nvSpPr>
+          <p:cNvPr id="106" name="Forma 106"/>
+          <p:cNvSpPr/>
+          <p:nvPr/>
+        </p:nvSpPr>
+        <p:spPr>
+          <a:xfrm>
+            <a:off x="3490000" y="1150000"/>
+            <a:ext cx="2400000" cy="900000"/>
+          </a:xfrm>
+          <a:prstGeom prst="roundRect">
+            <a:avLst>
+              <a:gd name="adj" fmla="val 12000"/>
+            </a:avLst>
+          </a:prstGeom>
+          <a:solidFill>
+            <a:srgbClr val="E8F1FB"/>
+          </a:solidFill>
+          <a:ln w="12700">
+            <a:solidFill>
+              <a:srgbClr val="004A91"/>
+            </a:solidFill>
+          </a:ln>
+        </p:spPr>
+        <p:txBody>
+          <a:bodyPr wrap="square" lIns="91440" tIns="91440" rIns="91440" bIns="91440" anchor="ctr">
+            <a:noAutofit/>
+          </a:bodyPr>
+          <a:lstStyle/>
+          <a:p>
+            <a:pPr algn="l" marL="0" indent="0">
+              <a:buNone/>
+            </a:pPr>
+            <a:r>
+              <a:rPr lang="pt-BR" sz="1800" b="1" dirty="0">
+                <a:solidFill>
+                  <a:srgbClr val="F7941D"/>
+                </a:solidFill>
+                <a:latin typeface="+mn-lt"/>
+              </a:rPr>
+              <a:t>2  </a:t>
+            </a:r>
+            <a:r>
+              <a:rPr lang="pt-BR" sz="1500" b="1" dirty="0">
+                <a:solidFill>
+                  <a:srgbClr val="004A91"/>
+                </a:solidFill>
+                <a:latin typeface="+mn-lt"/>
+              </a:rPr>
+              <a:t>Profissional confirmado</a:t>
+            </a:r>
+          </a:p>
+          <a:p>
+            <a:pPr algn="l" marL="0" indent="0">
+              <a:buNone/>
+            </a:pPr>
+            <a:r>
+              <a:rPr lang="pt-BR" sz="1200" dirty="0">
+                <a:solidFill>
+                  <a:srgbClr val="5B6B7F"/>
+                </a:solidFill>
+                <a:latin typeface="+mn-lt"/>
+              </a:rPr>
+              <a:t>lavador aceita</a:t>
+            </a:r>
+          </a:p>
+        </p:txBody>
+      </p:sp>
+      <p:cxnSp>
+        <p:nvCxnSpPr>
+          <p:cNvPr id="107" name="Seta 107"/>
+          <p:cNvCxnSpPr/>
+          <p:nvPr/>
+        </p:nvCxnSpPr>
+        <p:spPr>
+          <a:xfrm>
+            <a:off x="5910000" y="1600000"/>
+            <a:ext cx="290000" cy="0"/>
+          </a:xfrm>
+          <a:prstGeom prst="straightConnector1">
+            <a:avLst/>
+          </a:prstGeom>
+          <a:ln w="28575">
+            <a:solidFill>
+              <a:srgbClr val="004A91"/>
+            </a:solidFill>
+            <a:tailEnd type="triangle"/>
+          </a:ln>
+        </p:spPr>
+      </p:cxnSp>
+      <p:sp>
+        <p:nvSpPr>
+          <p:cNvPr id="108" name="Forma 108"/>
+          <p:cNvSpPr/>
+          <p:nvPr/>
+        </p:nvSpPr>
+        <p:spPr>
+          <a:xfrm>
+            <a:off x="6220000" y="1150000"/>
+            <a:ext cx="2400000" cy="900000"/>
+          </a:xfrm>
+          <a:prstGeom prst="roundRect">
+            <a:avLst>
+              <a:gd name="adj" fmla="val 12000"/>
+            </a:avLst>
+          </a:prstGeom>
+          <a:solidFill>
+            <a:srgbClr val="E8F1FB"/>
+          </a:solidFill>
+          <a:ln w="12700">
+            <a:solidFill>
+              <a:srgbClr val="004A91"/>
+            </a:solidFill>
+          </a:ln>
+        </p:spPr>
+        <p:txBody>
+          <a:bodyPr wrap="square" lIns="91440" tIns="91440" rIns="91440" bIns="91440" anchor="ctr">
+            <a:noAutofit/>
+          </a:bodyPr>
+          <a:lstStyle/>
+          <a:p>
+            <a:pPr algn="l" marL="0" indent="0">
+              <a:buNone/>
+            </a:pPr>
+            <a:r>
+              <a:rPr lang="pt-BR" sz="1800" b="1" dirty="0">
+                <a:solidFill>
+                  <a:srgbClr val="F7941D"/>
+                </a:solidFill>
+                <a:latin typeface="+mn-lt"/>
+              </a:rPr>
+              <a:t>3  </a:t>
+            </a:r>
+            <a:r>
+              <a:rPr lang="pt-BR" sz="1500" b="1" dirty="0">
+                <a:solidFill>
+                  <a:srgbClr val="004A91"/>
+                </a:solidFill>
+                <a:latin typeface="+mn-lt"/>
+              </a:rPr>
+              <a:t>A caminho</a:t>
+            </a:r>
+          </a:p>
+          <a:p>
+            <a:pPr algn="l" marL="0" indent="0">
+              <a:buNone/>
+            </a:pPr>
+            <a:r>
+              <a:rPr lang="pt-BR" sz="1200" dirty="0">
+                <a:solidFill>
+                  <a:srgbClr val="5B6B7F"/>
+                </a:solidFill>
+                <a:latin typeface="+mn-lt"/>
+              </a:rPr>
+              <a:t>mapa e tempo estimado</a:t>
+            </a:r>
+          </a:p>
+        </p:txBody>
+      </p:sp>
+      <p:cxnSp>
+        <p:nvCxnSpPr>
+          <p:cNvPr id="109" name="Seta 109"/>
+          <p:cNvCxnSpPr/>
+          <p:nvPr/>
+        </p:nvCxnSpPr>
+        <p:spPr>
+          <a:xfrm>
+            <a:off x="8640000" y="1600000"/>
+            <a:ext cx="290000" cy="0"/>
+          </a:xfrm>
+          <a:prstGeom prst="straightConnector1">
+            <a:avLst/>
+          </a:prstGeom>
+          <a:ln w="28575">
+            <a:solidFill>
+              <a:srgbClr val="004A91"/>
+            </a:solidFill>
+            <a:tailEnd type="triangle"/>
+          </a:ln>
+        </p:spPr>
+      </p:cxnSp>
+      <p:sp>
+        <p:nvSpPr>
+          <p:cNvPr id="110" name="Forma 110"/>
+          <p:cNvSpPr/>
+          <p:nvPr/>
+        </p:nvSpPr>
+        <p:spPr>
+          <a:xfrm>
+            <a:off x="8950000" y="1150000"/>
+            <a:ext cx="2400000" cy="900000"/>
+          </a:xfrm>
+          <a:prstGeom prst="roundRect">
+            <a:avLst>
+              <a:gd name="adj" fmla="val 12000"/>
+            </a:avLst>
+          </a:prstGeom>
+          <a:solidFill>
+            <a:srgbClr val="E8F1FB"/>
+          </a:solidFill>
+          <a:ln w="12700">
+            <a:solidFill>
+              <a:srgbClr val="004A91"/>
+            </a:solidFill>
+          </a:ln>
+        </p:spPr>
+        <p:txBody>
+          <a:bodyPr wrap="square" lIns="91440" tIns="91440" rIns="91440" bIns="91440" anchor="ctr">
+            <a:noAutofit/>
+          </a:bodyPr>
+          <a:lstStyle/>
+          <a:p>
+            <a:pPr algn="l" marL="0" indent="0">
+              <a:buNone/>
+            </a:pPr>
+            <a:r>
+              <a:rPr lang="pt-BR" sz="1800" b="1" dirty="0">
+                <a:solidFill>
+                  <a:srgbClr val="F7941D"/>
+                </a:solidFill>
+                <a:latin typeface="+mn-lt"/>
+              </a:rPr>
+              <a:t>4  </a:t>
+            </a:r>
+            <a:r>
+              <a:rPr lang="pt-BR" sz="1500" b="1" dirty="0">
+                <a:solidFill>
+                  <a:srgbClr val="004A91"/>
+                </a:solidFill>
+                <a:latin typeface="+mn-lt"/>
+              </a:rPr>
+              <a:t>Chegou</a:t>
+            </a:r>
+          </a:p>
+          <a:p>
+            <a:pPr algn="l" marL="0" indent="0">
+              <a:buNone/>
+            </a:pPr>
+            <a:r>
+              <a:rPr lang="pt-BR" sz="1200" dirty="0">
+                <a:solidFill>
+                  <a:srgbClr val="5B6B7F"/>
+                </a:solidFill>
+                <a:latin typeface="+mn-lt"/>
+              </a:rPr>
+              <a:t>código ou QR</a:t>
+            </a:r>
+          </a:p>
+        </p:txBody>
+      </p:sp>
+      <p:sp>
+        <p:nvSpPr>
+          <p:cNvPr id="111" name="Forma 111"/>
+          <p:cNvSpPr/>
+          <p:nvPr/>
+        </p:nvSpPr>
+        <p:spPr>
+          <a:xfrm>
+            <a:off x="760000" y="2450000"/>
+            <a:ext cx="2400000" cy="900000"/>
+          </a:xfrm>
+          <a:prstGeom prst="roundRect">
+            <a:avLst>
+              <a:gd name="adj" fmla="val 12000"/>
+            </a:avLst>
+          </a:prstGeom>
+          <a:solidFill>
+            <a:srgbClr val="E8F1FB"/>
+          </a:solidFill>
+          <a:ln w="12700">
+            <a:solidFill>
+              <a:srgbClr val="004A91"/>
+            </a:solidFill>
+          </a:ln>
+        </p:spPr>
+        <p:txBody>
+          <a:bodyPr wrap="square" lIns="91440" tIns="91440" rIns="91440" bIns="91440" anchor="ctr">
+            <a:noAutofit/>
+          </a:bodyPr>
+          <a:lstStyle/>
+          <a:p>
+            <a:pPr algn="l" marL="0" indent="0">
+              <a:buNone/>
+            </a:pPr>
+            <a:r>
+              <a:rPr lang="pt-BR" sz="1800" b="1" dirty="0">
+                <a:solidFill>
+                  <a:srgbClr val="F7941D"/>
+                </a:solidFill>
+                <a:latin typeface="+mn-lt"/>
+              </a:rPr>
+              <a:t>5  </a:t>
+            </a:r>
+            <a:r>
+              <a:rPr lang="pt-BR" sz="1500" b="1" dirty="0">
+                <a:solidFill>
+                  <a:srgbClr val="004A91"/>
+                </a:solidFill>
+                <a:latin typeface="+mn-lt"/>
+              </a:rPr>
+              <a:t>Lavagem iniciada</a:t>
+            </a:r>
+          </a:p>
+          <a:p>
+            <a:pPr algn="l" marL="0" indent="0">
+              <a:buNone/>
+            </a:pPr>
+            <a:r>
+              <a:rPr lang="pt-BR" sz="1200" dirty="0">
+                <a:solidFill>
+                  <a:srgbClr val="5B6B7F"/>
+                </a:solidFill>
+                <a:latin typeface="+mn-lt"/>
+              </a:rPr>
+              <a:t>validada no servidor</a:t>
+            </a:r>
+          </a:p>
+        </p:txBody>
+      </p:sp>
+      <p:cxnSp>
+        <p:nvCxnSpPr>
+          <p:cNvPr id="112" name="Seta 112"/>
+          <p:cNvCxnSpPr/>
+          <p:nvPr/>
+        </p:nvCxnSpPr>
+        <p:spPr>
+          <a:xfrm>
+            <a:off x="3180000" y="2900000"/>
+            <a:ext cx="290000" cy="0"/>
+          </a:xfrm>
+          <a:prstGeom prst="straightConnector1">
+            <a:avLst/>
+          </a:prstGeom>
+          <a:ln w="28575">
+            <a:solidFill>
+              <a:srgbClr val="004A91"/>
+            </a:solidFill>
+            <a:tailEnd type="triangle"/>
+          </a:ln>
+        </p:spPr>
+      </p:cxnSp>
+      <p:sp>
+        <p:nvSpPr>
+          <p:cNvPr id="113" name="Forma 113"/>
+          <p:cNvSpPr/>
+          <p:nvPr/>
+        </p:nvSpPr>
+        <p:spPr>
+          <a:xfrm>
+            <a:off x="3490000" y="2450000"/>
+            <a:ext cx="2400000" cy="900000"/>
+          </a:xfrm>
+          <a:prstGeom prst="roundRect">
+            <a:avLst>
+              <a:gd name="adj" fmla="val 12000"/>
+            </a:avLst>
+          </a:prstGeom>
+          <a:solidFill>
+            <a:srgbClr val="E8F1FB"/>
+          </a:solidFill>
+          <a:ln w="12700">
+            <a:solidFill>
+              <a:srgbClr val="004A91"/>
+            </a:solidFill>
+          </a:ln>
+        </p:spPr>
+        <p:txBody>
+          <a:bodyPr wrap="square" lIns="91440" tIns="91440" rIns="91440" bIns="91440" anchor="ctr">
+            <a:noAutofit/>
+          </a:bodyPr>
+          <a:lstStyle/>
+          <a:p>
+            <a:pPr algn="l" marL="0" indent="0">
+              <a:buNone/>
+            </a:pPr>
+            <a:r>
+              <a:rPr lang="pt-BR" sz="1800" b="1" dirty="0">
+                <a:solidFill>
+                  <a:srgbClr val="F7941D"/>
+                </a:solidFill>
+                <a:latin typeface="+mn-lt"/>
+              </a:rPr>
+              <a:t>6  </a:t>
+            </a:r>
+            <a:r>
+              <a:rPr lang="pt-BR" sz="1500" b="1" dirty="0">
+                <a:solidFill>
+                  <a:srgbClr val="004A91"/>
+                </a:solidFill>
+                <a:latin typeface="+mn-lt"/>
+              </a:rPr>
+              <a:t>Lavagem finalizada</a:t>
+            </a:r>
+          </a:p>
+          <a:p>
+            <a:pPr algn="l" marL="0" indent="0">
+              <a:buNone/>
+            </a:pPr>
+            <a:r>
+              <a:rPr lang="pt-BR" sz="1200" dirty="0">
+                <a:solidFill>
+                  <a:srgbClr val="5B6B7F"/>
+                </a:solidFill>
+                <a:latin typeface="+mn-lt"/>
+              </a:rPr>
+              <a:t>lavador conclui</a:t>
+            </a:r>
+          </a:p>
+        </p:txBody>
+      </p:sp>
+      <p:cxnSp>
+        <p:nvCxnSpPr>
+          <p:cNvPr id="114" name="Seta 114"/>
+          <p:cNvCxnSpPr/>
+          <p:nvPr/>
+        </p:nvCxnSpPr>
+        <p:spPr>
+          <a:xfrm>
+            <a:off x="5910000" y="2900000"/>
+            <a:ext cx="290000" cy="0"/>
+          </a:xfrm>
+          <a:prstGeom prst="straightConnector1">
+            <a:avLst/>
+          </a:prstGeom>
+          <a:ln w="28575">
+            <a:solidFill>
+              <a:srgbClr val="004A91"/>
+            </a:solidFill>
+            <a:tailEnd type="triangle"/>
+          </a:ln>
+        </p:spPr>
+      </p:cxnSp>
+      <p:sp>
+        <p:nvSpPr>
+          <p:cNvPr id="115" name="Forma 115"/>
+          <p:cNvSpPr/>
+          <p:nvPr/>
+        </p:nvSpPr>
+        <p:spPr>
+          <a:xfrm>
+            <a:off x="6220000" y="2450000"/>
+            <a:ext cx="2400000" cy="900000"/>
+          </a:xfrm>
+          <a:prstGeom prst="roundRect">
+            <a:avLst>
+              <a:gd name="adj" fmla="val 12000"/>
+            </a:avLst>
+          </a:prstGeom>
+          <a:solidFill>
+            <a:srgbClr val="E8F1FB"/>
+          </a:solidFill>
+          <a:ln w="12700">
+            <a:solidFill>
+              <a:srgbClr val="004A91"/>
+            </a:solidFill>
+          </a:ln>
+        </p:spPr>
+        <p:txBody>
+          <a:bodyPr wrap="square" lIns="91440" tIns="91440" rIns="91440" bIns="91440" anchor="ctr">
+            <a:noAutofit/>
+          </a:bodyPr>
+          <a:lstStyle/>
+          <a:p>
+            <a:pPr algn="l" marL="0" indent="0">
+              <a:buNone/>
+            </a:pPr>
+            <a:r>
+              <a:rPr lang="pt-BR" sz="1800" b="1" dirty="0">
+                <a:solidFill>
+                  <a:srgbClr val="F7941D"/>
+                </a:solidFill>
+                <a:latin typeface="+mn-lt"/>
+              </a:rPr>
+              <a:t>7  </a:t>
+            </a:r>
+            <a:r>
+              <a:rPr lang="pt-BR" sz="1500" b="1" dirty="0">
+                <a:solidFill>
+                  <a:srgbClr val="004A91"/>
+                </a:solidFill>
+                <a:latin typeface="+mn-lt"/>
+              </a:rPr>
+              <a:t>Pagamento</a:t>
+            </a:r>
+          </a:p>
+          <a:p>
+            <a:pPr algn="l" marL="0" indent="0">
+              <a:buNone/>
+            </a:pPr>
+            <a:r>
+              <a:rPr lang="pt-BR" sz="1200" dirty="0">
+                <a:solidFill>
+                  <a:srgbClr val="5B6B7F"/>
+                </a:solidFill>
+                <a:latin typeface="+mn-lt"/>
+              </a:rPr>
+              <a:t>simulado</a:t>
+            </a:r>
+          </a:p>
+        </p:txBody>
+      </p:sp>
+      <p:cxnSp>
+        <p:nvCxnSpPr>
+          <p:cNvPr id="116" name="Seta 116"/>
+          <p:cNvCxnSpPr/>
+          <p:nvPr/>
+        </p:nvCxnSpPr>
+        <p:spPr>
+          <a:xfrm>
+            <a:off x="8640000" y="2900000"/>
+            <a:ext cx="290000" cy="0"/>
+          </a:xfrm>
+          <a:prstGeom prst="straightConnector1">
+            <a:avLst/>
+          </a:prstGeom>
+          <a:ln w="28575">
+            <a:solidFill>
+              <a:srgbClr val="004A91"/>
+            </a:solidFill>
+            <a:tailEnd type="triangle"/>
+          </a:ln>
+        </p:spPr>
+      </p:cxnSp>
+      <p:sp>
+        <p:nvSpPr>
+          <p:cNvPr id="117" name="Forma 117"/>
+          <p:cNvSpPr/>
+          <p:nvPr/>
+        </p:nvSpPr>
+        <p:spPr>
+          <a:xfrm>
+            <a:off x="8950000" y="2450000"/>
+            <a:ext cx="2400000" cy="900000"/>
+          </a:xfrm>
+          <a:prstGeom prst="roundRect">
+            <a:avLst>
+              <a:gd name="adj" fmla="val 12000"/>
+            </a:avLst>
+          </a:prstGeom>
+          <a:solidFill>
+            <a:srgbClr val="FFF1DC"/>
+          </a:solidFill>
+          <a:ln w="12700">
+            <a:solidFill>
+              <a:srgbClr val="F7941D"/>
+            </a:solidFill>
+          </a:ln>
+        </p:spPr>
+        <p:txBody>
+          <a:bodyPr wrap="square" lIns="91440" tIns="91440" rIns="91440" bIns="91440" anchor="ctr">
+            <a:noAutofit/>
+          </a:bodyPr>
+          <a:lstStyle/>
+          <a:p>
+            <a:pPr algn="l" marL="0" indent="0">
+              <a:buNone/>
+            </a:pPr>
+            <a:r>
+              <a:rPr lang="pt-BR" sz="1800" b="1" dirty="0">
+                <a:solidFill>
+                  <a:srgbClr val="F7941D"/>
+                </a:solidFill>
+                <a:latin typeface="+mn-lt"/>
+              </a:rPr>
+              <a:t>8  </a:t>
+            </a:r>
+            <a:r>
+              <a:rPr lang="pt-BR" sz="1500" b="1" dirty="0">
+                <a:solidFill>
+                  <a:srgbClr val="004A91"/>
+                </a:solidFill>
+                <a:latin typeface="+mn-lt"/>
+              </a:rPr>
+              <a:t>Avaliação</a:t>
+            </a:r>
+          </a:p>
+          <a:p>
+            <a:pPr algn="l" marL="0" indent="0">
+              <a:buNone/>
+            </a:pPr>
+            <a:r>
+              <a:rPr lang="pt-BR" sz="1200" dirty="0">
+                <a:solidFill>
+                  <a:srgbClr val="5B6B7F"/>
+                </a:solidFill>
+                <a:latin typeface="+mn-lt"/>
+              </a:rPr>
+              <a:t>estrelas e comentário</a:t>
+            </a:r>
+          </a:p>
+        </p:txBody>
+      </p:sp>
+      <p:sp>
+        <p:nvSpPr>
+          <p:cNvPr id="118" name="Forma 118"/>
+          <p:cNvSpPr/>
+          <p:nvPr/>
+        </p:nvSpPr>
+        <p:spPr>
+          <a:xfrm>
+            <a:off x="760000" y="3850000"/>
+            <a:ext cx="3380000" cy="2250000"/>
+          </a:xfrm>
+          <a:prstGeom prst="roundRect">
+            <a:avLst>
+              <a:gd name="adj" fmla="val 6000"/>
+            </a:avLst>
+          </a:prstGeom>
+          <a:solidFill>
+            <a:srgbClr val="E8F1FB"/>
+          </a:solidFill>
+          <a:ln w="12700">
+            <a:solidFill>
+              <a:srgbClr val="004A91"/>
+            </a:solidFill>
+          </a:ln>
+        </p:spPr>
+        <p:txBody>
+          <a:bodyPr wrap="square" lIns="137160" tIns="137160" rIns="137160" bIns="137160" anchor="t">
+            <a:noAutofit/>
+          </a:bodyPr>
+          <a:lstStyle/>
+          <a:p>
+            <a:pPr algn="l" marL="0" indent="0">
+              <a:spcAft>
+                <a:spcPts val="600"/>
+              </a:spcAft>
+              <a:buNone/>
+            </a:pPr>
+            <a:r>
+              <a:rPr lang="pt-BR" sz="1800" b="1" dirty="0">
+                <a:solidFill>
+                  <a:srgbClr val="004A91"/>
+                </a:solidFill>
+                <a:latin typeface="+mn-lt"/>
+              </a:rPr>
+              <a:t>Sem recarregar a tela</a:t>
+            </a:r>
+          </a:p>
+          <a:p>
+            <a:pPr algn="l" marL="0" indent="0">
+              <a:spcAft>
+                <a:spcPts val="400"/>
+              </a:spcAft>
+              <a:buNone/>
+            </a:pPr>
+            <a:r>
+              <a:rPr lang="pt-BR" sz="1400" dirty="0">
+                <a:solidFill>
+                  <a:srgbClr val="1F2937"/>
+                </a:solidFill>
+                <a:latin typeface="+mn-lt"/>
+              </a:rPr>
+              <a:t>Cada etapa chega ao outro aparelho na hora (WebSocket do Supabase Realtime), com atualização de segurança a cada 8 segundos.</a:t>
+            </a:r>
+          </a:p>
+        </p:txBody>
+      </p:sp>
+      <p:sp>
+        <p:nvSpPr>
+          <p:cNvPr id="119" name="Forma 119"/>
+          <p:cNvSpPr/>
+          <p:nvPr/>
+        </p:nvSpPr>
+        <p:spPr>
+          <a:xfrm>
+            <a:off x="4405000" y="3850000"/>
+            <a:ext cx="3380000" cy="2250000"/>
+          </a:xfrm>
+          <a:prstGeom prst="roundRect">
+            <a:avLst>
+              <a:gd name="adj" fmla="val 6000"/>
+            </a:avLst>
+          </a:prstGeom>
+          <a:solidFill>
+            <a:srgbClr val="E8F1FB"/>
+          </a:solidFill>
+          <a:ln w="12700">
+            <a:solidFill>
+              <a:srgbClr val="004A91"/>
+            </a:solidFill>
+          </a:ln>
+        </p:spPr>
+        <p:txBody>
+          <a:bodyPr wrap="square" lIns="137160" tIns="137160" rIns="137160" bIns="137160" anchor="t">
+            <a:noAutofit/>
+          </a:bodyPr>
+          <a:lstStyle/>
+          <a:p>
+            <a:pPr algn="l" marL="0" indent="0">
+              <a:spcAft>
+                <a:spcPts val="600"/>
+              </a:spcAft>
+              <a:buNone/>
+            </a:pPr>
+            <a:r>
+              <a:rPr lang="pt-BR" sz="1800" b="1" dirty="0">
+                <a:solidFill>
+                  <a:srgbClr val="004A91"/>
+                </a:solidFill>
+                <a:latin typeface="+mn-lt"/>
+              </a:rPr>
+              <a:t>Início comprovado</a:t>
+            </a:r>
+          </a:p>
+          <a:p>
+            <a:pPr algn="l" marL="0" indent="0">
+              <a:spcAft>
+                <a:spcPts val="400"/>
+              </a:spcAft>
+              <a:buNone/>
+            </a:pPr>
+            <a:r>
+              <a:rPr lang="pt-BR" sz="1400" dirty="0">
+                <a:solidFill>
+                  <a:srgbClr val="1F2937"/>
+                </a:solidFill>
+                <a:latin typeface="+mn-lt"/>
+              </a:rPr>
+              <a:t>O lavador só inicia com o código de 6 dígitos (ou o QR) do cliente. O servidor confere e bloqueia por 5 minutos após 5 erros.</a:t>
+            </a:r>
+          </a:p>
+        </p:txBody>
+      </p:sp>
+      <p:sp>
+        <p:nvSpPr>
+          <p:cNvPr id="120" name="Forma 120"/>
+          <p:cNvSpPr/>
+          <p:nvPr/>
+        </p:nvSpPr>
+        <p:spPr>
+          <a:xfrm>
+            <a:off x="8050000" y="3850000"/>
+            <a:ext cx="3380000" cy="2250000"/>
+          </a:xfrm>
+          <a:prstGeom prst="roundRect">
+            <a:avLst>
+              <a:gd name="adj" fmla="val 6000"/>
+            </a:avLst>
+          </a:prstGeom>
+          <a:solidFill>
+            <a:srgbClr val="E8F1FB"/>
+          </a:solidFill>
+          <a:ln w="12700">
+            <a:solidFill>
+              <a:srgbClr val="004A91"/>
+            </a:solidFill>
+          </a:ln>
+        </p:spPr>
+        <p:txBody>
+          <a:bodyPr wrap="square" lIns="137160" tIns="137160" rIns="137160" bIns="137160" anchor="t">
+            <a:noAutofit/>
+          </a:bodyPr>
+          <a:lstStyle/>
+          <a:p>
+            <a:pPr algn="l" marL="0" indent="0">
+              <a:spcAft>
+                <a:spcPts val="600"/>
+              </a:spcAft>
+              <a:buNone/>
+            </a:pPr>
+            <a:r>
+              <a:rPr lang="pt-BR" sz="1800" b="1" dirty="0">
+                <a:solidFill>
+                  <a:srgbClr val="004A91"/>
+                </a:solidFill>
+                <a:latin typeface="+mn-lt"/>
+              </a:rPr>
+              <a:t>Palco da demonstração</a:t>
+            </a:r>
+          </a:p>
+          <a:p>
+            <a:pPr algn="l" marL="0" indent="0">
+              <a:spcAft>
+                <a:spcPts val="400"/>
+              </a:spcAft>
+              <a:buNone/>
+            </a:pPr>
+            <a:r>
+              <a:rPr lang="pt-BR" sz="1400" dirty="0">
+                <a:solidFill>
+                  <a:srgbClr val="1F2937"/>
+                </a:solidFill>
+                <a:latin typeface="+mn-lt"/>
+              </a:rPr>
+              <a:t>Cliente e lavador lado a lado na mesma tela, com sessões separadas: um notebook no telão basta.</a:t>
+            </a:r>
+          </a:p>
+        </p:txBody>
+      </p:sp>
+    </p:spTree>
+    <p:extLst>
+      <p:ext uri="{BB962C8B-B14F-4D97-AF65-F5344CB8AC3E}">
+        <p14:creationId xmlns:p14="http://schemas.microsoft.com/office/powerpoint/2010/main" val="1853730795"/>
+      </p:ext>
+    </p:extLst>
+  </p:cSld>
+  <p:clrMapOvr>
+    <a:masterClrMapping/>
+  </p:clrMapOvr>
+</p:sld>
+</file>
+
 <file path=ppt/slides/slide9.xml><?xml version="1.0" encoding="utf-8"?>
 <p:sld xmlns:a="http://schemas.openxmlformats.org/drawingml/2006/main" xmlns:r="http://schemas.openxmlformats.org/officeDocument/2006/relationships" xmlns:p="http://schemas.openxmlformats.org/presentationml/2006/main">
   <p:cSld>
@@ -8601,38 +10140,125 @@
             <a:pPr algn="l"/>
             <a:r>
               <a:rPr lang="pt-BR" sz="3800" b="1"/>
-              <a:t>Cliente e lavador em tempo real</a:t>
-            </a:r>
-          </a:p>
-        </p:txBody>
-      </p:sp>
-      <p:sp>
-        <p:nvSpPr>
-          <p:cNvPr id="104" name="Forma 104"/>
+              <a:t>O aplicativo em funcionamento</a:t>
+            </a:r>
+          </a:p>
+        </p:txBody>
+      </p:sp>
+      <p:pic>
+        <p:nvPicPr>
+          <p:cNvPr id="121" name="Imagem 121" descr="Lista de pedidos disponíveis do lavador"/>
+          <p:cNvPicPr>
+            <a:picLocks noChangeAspect="1"/>
+          </p:cNvPicPr>
+          <p:nvPr/>
+        </p:nvPicPr>
+        <p:blipFill>
+          <a:blip r:embed="rIdImg1"/>
+          <a:stretch>
+            <a:fillRect/>
+          </a:stretch>
+        </p:blipFill>
+        <p:spPr>
+          <a:xfrm>
+            <a:off x="760000" y="1150000"/>
+            <a:ext cx="1825777" cy="3950000"/>
+          </a:xfrm>
+          <a:prstGeom prst="roundRect">
+            <a:avLst>
+              <a:gd name="adj" fmla="val 3000"/>
+            </a:avLst>
+          </a:prstGeom>
+          <a:ln w="19050">
+            <a:solidFill>
+              <a:srgbClr val="C9D6E8"/>
+            </a:solidFill>
+          </a:ln>
+        </p:spPr>
+      </p:pic>
+      <p:pic>
+        <p:nvPicPr>
+          <p:cNvPr id="122" name="Imagem 122" descr="Código de 6 dígitos e QR do cliente"/>
+          <p:cNvPicPr>
+            <a:picLocks noChangeAspect="1"/>
+          </p:cNvPicPr>
+          <p:nvPr/>
+        </p:nvPicPr>
+        <p:blipFill>
+          <a:blip r:embed="rIdImg2"/>
+          <a:stretch>
+            <a:fillRect/>
+          </a:stretch>
+        </p:blipFill>
+        <p:spPr>
+          <a:xfrm>
+            <a:off x="2835777" y="1150000"/>
+            <a:ext cx="1825777" cy="3950000"/>
+          </a:xfrm>
+          <a:prstGeom prst="roundRect">
+            <a:avLst>
+              <a:gd name="adj" fmla="val 3000"/>
+            </a:avLst>
+          </a:prstGeom>
+          <a:ln w="19050">
+            <a:solidFill>
+              <a:srgbClr val="C9D6E8"/>
+            </a:solidFill>
+          </a:ln>
+        </p:spPr>
+      </p:pic>
+      <p:pic>
+        <p:nvPicPr>
+          <p:cNvPr id="123" name="Imagem 123" descr="Painel do administrador com indicadores"/>
+          <p:cNvPicPr>
+            <a:picLocks noChangeAspect="1"/>
+          </p:cNvPicPr>
+          <p:nvPr/>
+        </p:nvPicPr>
+        <p:blipFill>
+          <a:blip r:embed="rIdImg3"/>
+          <a:stretch>
+            <a:fillRect/>
+          </a:stretch>
+        </p:blipFill>
+        <p:spPr>
+          <a:xfrm>
+            <a:off x="5061554" y="1150000"/>
+            <a:ext cx="5250000" cy="3750000"/>
+          </a:xfrm>
+          <a:prstGeom prst="roundRect">
+            <a:avLst>
+              <a:gd name="adj" fmla="val 3000"/>
+            </a:avLst>
+          </a:prstGeom>
+          <a:ln w="19050">
+            <a:solidFill>
+              <a:srgbClr val="C9D6E8"/>
+            </a:solidFill>
+          </a:ln>
+        </p:spPr>
+      </p:pic>
+      <p:sp>
+        <p:nvSpPr>
+          <p:cNvPr id="124" name="Forma 124"/>
           <p:cNvSpPr/>
           <p:nvPr/>
         </p:nvSpPr>
         <p:spPr>
           <a:xfrm>
-            <a:off x="760000" y="1150000"/>
-            <a:ext cx="2400000" cy="900000"/>
-          </a:xfrm>
-          <a:prstGeom prst="roundRect">
-            <a:avLst>
-              <a:gd name="adj" fmla="val 12000"/>
-            </a:avLst>
+            <a:off x="760000" y="5160000"/>
+            <a:ext cx="1925777" cy="800000"/>
+          </a:xfrm>
+          <a:prstGeom prst="rect">
+            <a:avLst/>
           </a:prstGeom>
-          <a:solidFill>
-            <a:srgbClr val="E8F1FB"/>
-          </a:solidFill>
-          <a:ln w="12700">
-            <a:solidFill>
-              <a:srgbClr val="004A91"/>
-            </a:solidFill>
+          <a:noFill/>
+          <a:ln>
+            <a:noFill/>
           </a:ln>
         </p:spPr>
         <p:txBody>
-          <a:bodyPr wrap="square" lIns="91440" tIns="91440" rIns="91440" bIns="91440" anchor="ctr">
+          <a:bodyPr wrap="square" lIns="0" tIns="0" rIns="0" bIns="0" anchor="t">
             <a:noAutofit/>
           </a:bodyPr>
           <a:lstStyle/>
@@ -8641,89 +10267,78 @@
               <a:buNone/>
             </a:pPr>
             <a:r>
-              <a:rPr lang="pt-BR" sz="1800" b="1" dirty="0">
-                <a:solidFill>
-                  <a:srgbClr val="F7941D"/>
+              <a:rPr lang="pt-BR" sz="1200" b="1" dirty="0">
+                <a:solidFill>
+                  <a:srgbClr val="004A91"/>
                 </a:solidFill>
                 <a:latin typeface="+mn-lt"/>
               </a:rPr>
-              <a:t>1  </a:t>
-            </a:r>
-            <a:r>
-              <a:rPr lang="pt-BR" sz="1500" b="1" dirty="0">
-                <a:solidFill>
-                  <a:srgbClr val="004A91"/>
-                </a:solidFill>
-                <a:latin typeface="+mn-lt"/>
-              </a:rPr>
-              <a:t>Solicitação recebida</a:t>
-            </a:r>
-          </a:p>
+              <a:t>Lavador: pedidos disponíveis, ao vivo</a:t>
+            </a:r>
+          </a:p>
+        </p:txBody>
+      </p:sp>
+      <p:sp>
+        <p:nvSpPr>
+          <p:cNvPr id="125" name="Forma 125"/>
+          <p:cNvSpPr/>
+          <p:nvPr/>
+        </p:nvSpPr>
+        <p:spPr>
+          <a:xfrm>
+            <a:off x="2835777" y="5160000"/>
+            <a:ext cx="1925777" cy="800000"/>
+          </a:xfrm>
+          <a:prstGeom prst="rect">
+            <a:avLst/>
+          </a:prstGeom>
+          <a:noFill/>
+          <a:ln>
+            <a:noFill/>
+          </a:ln>
+        </p:spPr>
+        <p:txBody>
+          <a:bodyPr wrap="square" lIns="0" tIns="0" rIns="0" bIns="0" anchor="t">
+            <a:noAutofit/>
+          </a:bodyPr>
+          <a:lstStyle/>
           <a:p>
             <a:pPr algn="l" marL="0" indent="0">
               <a:buNone/>
             </a:pPr>
             <a:r>
-              <a:rPr lang="pt-BR" sz="1200" dirty="0">
-                <a:solidFill>
-                  <a:srgbClr val="5B6B7F"/>
+              <a:rPr lang="pt-BR" sz="1200" b="1" dirty="0">
+                <a:solidFill>
+                  <a:srgbClr val="004A91"/>
                 </a:solidFill>
                 <a:latin typeface="+mn-lt"/>
               </a:rPr>
-              <a:t>cliente pede</a:t>
-            </a:r>
-          </a:p>
-        </p:txBody>
-      </p:sp>
-      <p:cxnSp>
-        <p:nvCxnSpPr>
-          <p:cNvPr id="105" name="Seta 105"/>
-          <p:cNvCxnSpPr/>
+              <a:t>Cliente: código e QR de início</a:t>
+            </a:r>
+          </a:p>
+        </p:txBody>
+      </p:sp>
+      <p:sp>
+        <p:nvSpPr>
+          <p:cNvPr id="126" name="Forma 126"/>
+          <p:cNvSpPr/>
           <p:nvPr/>
-        </p:nvCxnSpPr>
-        <p:spPr>
-          <a:xfrm>
-            <a:off x="3180000" y="1600000"/>
-            <a:ext cx="290000" cy="0"/>
-          </a:xfrm>
-          <a:prstGeom prst="straightConnector1">
+        </p:nvSpPr>
+        <p:spPr>
+          <a:xfrm>
+            <a:off x="5061554" y="4960000"/>
+            <a:ext cx="5250000" cy="500000"/>
+          </a:xfrm>
+          <a:prstGeom prst="rect">
             <a:avLst/>
           </a:prstGeom>
-          <a:ln w="28575">
-            <a:solidFill>
-              <a:srgbClr val="004A91"/>
-            </a:solidFill>
-            <a:tailEnd type="triangle"/>
+          <a:noFill/>
+          <a:ln>
+            <a:noFill/>
           </a:ln>
         </p:spPr>
-      </p:cxnSp>
-      <p:sp>
-        <p:nvSpPr>
-          <p:cNvPr id="106" name="Forma 106"/>
-          <p:cNvSpPr/>
-          <p:nvPr/>
-        </p:nvSpPr>
-        <p:spPr>
-          <a:xfrm>
-            <a:off x="3490000" y="1150000"/>
-            <a:ext cx="2400000" cy="900000"/>
-          </a:xfrm>
-          <a:prstGeom prst="roundRect">
-            <a:avLst>
-              <a:gd name="adj" fmla="val 12000"/>
-            </a:avLst>
-          </a:prstGeom>
-          <a:solidFill>
-            <a:srgbClr val="E8F1FB"/>
-          </a:solidFill>
-          <a:ln w="12700">
-            <a:solidFill>
-              <a:srgbClr val="004A91"/>
-            </a:solidFill>
-          </a:ln>
-        </p:spPr>
-        <p:txBody>
-          <a:bodyPr wrap="square" lIns="91440" tIns="91440" rIns="91440" bIns="91440" anchor="ctr">
+        <p:txBody>
+          <a:bodyPr wrap="square" lIns="0" tIns="0" rIns="0" bIns="0" anchor="t">
             <a:noAutofit/>
           </a:bodyPr>
           <a:lstStyle/>
@@ -8732,758 +10347,53 @@
               <a:buNone/>
             </a:pPr>
             <a:r>
-              <a:rPr lang="pt-BR" sz="1800" b="1" dirty="0">
-                <a:solidFill>
-                  <a:srgbClr val="F7941D"/>
+              <a:rPr lang="pt-BR" sz="1200" b="1" dirty="0">
+                <a:solidFill>
+                  <a:srgbClr val="004A91"/>
                 </a:solidFill>
                 <a:latin typeface="+mn-lt"/>
               </a:rPr>
-              <a:t>2  </a:t>
-            </a:r>
-            <a:r>
-              <a:rPr lang="pt-BR" sz="1500" b="1" dirty="0">
-                <a:solidFill>
-                  <a:srgbClr val="004A91"/>
-                </a:solidFill>
-                <a:latin typeface="+mn-lt"/>
-              </a:rPr>
-              <a:t>Profissional confirmado</a:t>
-            </a:r>
-          </a:p>
+              <a:t>Administrador: indicadores da operação (dados de demonstração rotulados como fictícios)</a:t>
+            </a:r>
+          </a:p>
+        </p:txBody>
+      </p:sp>
+      <p:sp>
+        <p:nvSpPr>
+          <p:cNvPr id="127" name="Forma 127"/>
+          <p:cNvSpPr/>
+          <p:nvPr/>
+        </p:nvSpPr>
+        <p:spPr>
+          <a:xfrm>
+            <a:off x="5061554" y="5500000"/>
+            <a:ext cx="5250000" cy="450000"/>
+          </a:xfrm>
+          <a:prstGeom prst="rect">
+            <a:avLst/>
+          </a:prstGeom>
+          <a:noFill/>
+          <a:ln>
+            <a:noFill/>
+          </a:ln>
+        </p:spPr>
+        <p:txBody>
+          <a:bodyPr wrap="square" lIns="0" tIns="0" rIns="0" bIns="0" anchor="t">
+            <a:noAutofit/>
+          </a:bodyPr>
+          <a:lstStyle/>
           <a:p>
             <a:pPr algn="l" marL="0" indent="0">
               <a:buNone/>
             </a:pPr>
             <a:r>
-              <a:rPr lang="pt-BR" sz="1200" dirty="0">
+              <a:rPr lang="pt-BR" sz="1100" dirty="0">
                 <a:solidFill>
                   <a:srgbClr val="5B6B7F"/>
                 </a:solidFill>
                 <a:latin typeface="+mn-lt"/>
               </a:rPr>
-              <a:t>lavador aceita</a:t>
-            </a:r>
-          </a:p>
-        </p:txBody>
-      </p:sp>
-      <p:cxnSp>
-        <p:nvCxnSpPr>
-          <p:cNvPr id="107" name="Seta 107"/>
-          <p:cNvCxnSpPr/>
-          <p:nvPr/>
-        </p:nvCxnSpPr>
-        <p:spPr>
-          <a:xfrm>
-            <a:off x="5910000" y="1600000"/>
-            <a:ext cx="290000" cy="0"/>
-          </a:xfrm>
-          <a:prstGeom prst="straightConnector1">
-            <a:avLst/>
-          </a:prstGeom>
-          <a:ln w="28575">
-            <a:solidFill>
-              <a:srgbClr val="004A91"/>
-            </a:solidFill>
-            <a:tailEnd type="triangle"/>
-          </a:ln>
-        </p:spPr>
-      </p:cxnSp>
-      <p:sp>
-        <p:nvSpPr>
-          <p:cNvPr id="108" name="Forma 108"/>
-          <p:cNvSpPr/>
-          <p:nvPr/>
-        </p:nvSpPr>
-        <p:spPr>
-          <a:xfrm>
-            <a:off x="6220000" y="1150000"/>
-            <a:ext cx="2400000" cy="900000"/>
-          </a:xfrm>
-          <a:prstGeom prst="roundRect">
-            <a:avLst>
-              <a:gd name="adj" fmla="val 12000"/>
-            </a:avLst>
-          </a:prstGeom>
-          <a:solidFill>
-            <a:srgbClr val="E8F1FB"/>
-          </a:solidFill>
-          <a:ln w="12700">
-            <a:solidFill>
-              <a:srgbClr val="004A91"/>
-            </a:solidFill>
-          </a:ln>
-        </p:spPr>
-        <p:txBody>
-          <a:bodyPr wrap="square" lIns="91440" tIns="91440" rIns="91440" bIns="91440" anchor="ctr">
-            <a:noAutofit/>
-          </a:bodyPr>
-          <a:lstStyle/>
-          <a:p>
-            <a:pPr algn="l" marL="0" indent="0">
-              <a:buNone/>
-            </a:pPr>
-            <a:r>
-              <a:rPr lang="pt-BR" sz="1800" b="1" dirty="0">
-                <a:solidFill>
-                  <a:srgbClr val="F7941D"/>
-                </a:solidFill>
-                <a:latin typeface="+mn-lt"/>
-              </a:rPr>
-              <a:t>3  </a:t>
-            </a:r>
-            <a:r>
-              <a:rPr lang="pt-BR" sz="1500" b="1" dirty="0">
-                <a:solidFill>
-                  <a:srgbClr val="004A91"/>
-                </a:solidFill>
-                <a:latin typeface="+mn-lt"/>
-              </a:rPr>
-              <a:t>A caminho</a:t>
-            </a:r>
-          </a:p>
-          <a:p>
-            <a:pPr algn="l" marL="0" indent="0">
-              <a:buNone/>
-            </a:pPr>
-            <a:r>
-              <a:rPr lang="pt-BR" sz="1200" dirty="0">
-                <a:solidFill>
-                  <a:srgbClr val="5B6B7F"/>
-                </a:solidFill>
-                <a:latin typeface="+mn-lt"/>
-              </a:rPr>
-              <a:t>mapa e tempo estimado</a:t>
-            </a:r>
-          </a:p>
-        </p:txBody>
-      </p:sp>
-      <p:cxnSp>
-        <p:nvCxnSpPr>
-          <p:cNvPr id="109" name="Seta 109"/>
-          <p:cNvCxnSpPr/>
-          <p:nvPr/>
-        </p:nvCxnSpPr>
-        <p:spPr>
-          <a:xfrm>
-            <a:off x="8640000" y="1600000"/>
-            <a:ext cx="290000" cy="0"/>
-          </a:xfrm>
-          <a:prstGeom prst="straightConnector1">
-            <a:avLst/>
-          </a:prstGeom>
-          <a:ln w="28575">
-            <a:solidFill>
-              <a:srgbClr val="004A91"/>
-            </a:solidFill>
-            <a:tailEnd type="triangle"/>
-          </a:ln>
-        </p:spPr>
-      </p:cxnSp>
-      <p:sp>
-        <p:nvSpPr>
-          <p:cNvPr id="110" name="Forma 110"/>
-          <p:cNvSpPr/>
-          <p:nvPr/>
-        </p:nvSpPr>
-        <p:spPr>
-          <a:xfrm>
-            <a:off x="8950000" y="1150000"/>
-            <a:ext cx="2400000" cy="900000"/>
-          </a:xfrm>
-          <a:prstGeom prst="roundRect">
-            <a:avLst>
-              <a:gd name="adj" fmla="val 12000"/>
-            </a:avLst>
-          </a:prstGeom>
-          <a:solidFill>
-            <a:srgbClr val="E8F1FB"/>
-          </a:solidFill>
-          <a:ln w="12700">
-            <a:solidFill>
-              <a:srgbClr val="004A91"/>
-            </a:solidFill>
-          </a:ln>
-        </p:spPr>
-        <p:txBody>
-          <a:bodyPr wrap="square" lIns="91440" tIns="91440" rIns="91440" bIns="91440" anchor="ctr">
-            <a:noAutofit/>
-          </a:bodyPr>
-          <a:lstStyle/>
-          <a:p>
-            <a:pPr algn="l" marL="0" indent="0">
-              <a:buNone/>
-            </a:pPr>
-            <a:r>
-              <a:rPr lang="pt-BR" sz="1800" b="1" dirty="0">
-                <a:solidFill>
-                  <a:srgbClr val="F7941D"/>
-                </a:solidFill>
-                <a:latin typeface="+mn-lt"/>
-              </a:rPr>
-              <a:t>4  </a:t>
-            </a:r>
-            <a:r>
-              <a:rPr lang="pt-BR" sz="1500" b="1" dirty="0">
-                <a:solidFill>
-                  <a:srgbClr val="004A91"/>
-                </a:solidFill>
-                <a:latin typeface="+mn-lt"/>
-              </a:rPr>
-              <a:t>Chegou</a:t>
-            </a:r>
-          </a:p>
-          <a:p>
-            <a:pPr algn="l" marL="0" indent="0">
-              <a:buNone/>
-            </a:pPr>
-            <a:r>
-              <a:rPr lang="pt-BR" sz="1200" dirty="0">
-                <a:solidFill>
-                  <a:srgbClr val="5B6B7F"/>
-                </a:solidFill>
-                <a:latin typeface="+mn-lt"/>
-              </a:rPr>
-              <a:t>código ou QR</a:t>
-            </a:r>
-          </a:p>
-        </p:txBody>
-      </p:sp>
-      <p:sp>
-        <p:nvSpPr>
-          <p:cNvPr id="111" name="Forma 111"/>
-          <p:cNvSpPr/>
-          <p:nvPr/>
-        </p:nvSpPr>
-        <p:spPr>
-          <a:xfrm>
-            <a:off x="760000" y="2450000"/>
-            <a:ext cx="2400000" cy="900000"/>
-          </a:xfrm>
-          <a:prstGeom prst="roundRect">
-            <a:avLst>
-              <a:gd name="adj" fmla="val 12000"/>
-            </a:avLst>
-          </a:prstGeom>
-          <a:solidFill>
-            <a:srgbClr val="E8F1FB"/>
-          </a:solidFill>
-          <a:ln w="12700">
-            <a:solidFill>
-              <a:srgbClr val="004A91"/>
-            </a:solidFill>
-          </a:ln>
-        </p:spPr>
-        <p:txBody>
-          <a:bodyPr wrap="square" lIns="91440" tIns="91440" rIns="91440" bIns="91440" anchor="ctr">
-            <a:noAutofit/>
-          </a:bodyPr>
-          <a:lstStyle/>
-          <a:p>
-            <a:pPr algn="l" marL="0" indent="0">
-              <a:buNone/>
-            </a:pPr>
-            <a:r>
-              <a:rPr lang="pt-BR" sz="1800" b="1" dirty="0">
-                <a:solidFill>
-                  <a:srgbClr val="F7941D"/>
-                </a:solidFill>
-                <a:latin typeface="+mn-lt"/>
-              </a:rPr>
-              <a:t>5  </a:t>
-            </a:r>
-            <a:r>
-              <a:rPr lang="pt-BR" sz="1500" b="1" dirty="0">
-                <a:solidFill>
-                  <a:srgbClr val="004A91"/>
-                </a:solidFill>
-                <a:latin typeface="+mn-lt"/>
-              </a:rPr>
-              <a:t>Lavagem iniciada</a:t>
-            </a:r>
-          </a:p>
-          <a:p>
-            <a:pPr algn="l" marL="0" indent="0">
-              <a:buNone/>
-            </a:pPr>
-            <a:r>
-              <a:rPr lang="pt-BR" sz="1200" dirty="0">
-                <a:solidFill>
-                  <a:srgbClr val="5B6B7F"/>
-                </a:solidFill>
-                <a:latin typeface="+mn-lt"/>
-              </a:rPr>
-              <a:t>validada no servidor</a:t>
-            </a:r>
-          </a:p>
-        </p:txBody>
-      </p:sp>
-      <p:cxnSp>
-        <p:nvCxnSpPr>
-          <p:cNvPr id="112" name="Seta 112"/>
-          <p:cNvCxnSpPr/>
-          <p:nvPr/>
-        </p:nvCxnSpPr>
-        <p:spPr>
-          <a:xfrm>
-            <a:off x="3180000" y="2900000"/>
-            <a:ext cx="290000" cy="0"/>
-          </a:xfrm>
-          <a:prstGeom prst="straightConnector1">
-            <a:avLst/>
-          </a:prstGeom>
-          <a:ln w="28575">
-            <a:solidFill>
-              <a:srgbClr val="004A91"/>
-            </a:solidFill>
-            <a:tailEnd type="triangle"/>
-          </a:ln>
-        </p:spPr>
-      </p:cxnSp>
-      <p:sp>
-        <p:nvSpPr>
-          <p:cNvPr id="113" name="Forma 113"/>
-          <p:cNvSpPr/>
-          <p:nvPr/>
-        </p:nvSpPr>
-        <p:spPr>
-          <a:xfrm>
-            <a:off x="3490000" y="2450000"/>
-            <a:ext cx="2400000" cy="900000"/>
-          </a:xfrm>
-          <a:prstGeom prst="roundRect">
-            <a:avLst>
-              <a:gd name="adj" fmla="val 12000"/>
-            </a:avLst>
-          </a:prstGeom>
-          <a:solidFill>
-            <a:srgbClr val="E8F1FB"/>
-          </a:solidFill>
-          <a:ln w="12700">
-            <a:solidFill>
-              <a:srgbClr val="004A91"/>
-            </a:solidFill>
-          </a:ln>
-        </p:spPr>
-        <p:txBody>
-          <a:bodyPr wrap="square" lIns="91440" tIns="91440" rIns="91440" bIns="91440" anchor="ctr">
-            <a:noAutofit/>
-          </a:bodyPr>
-          <a:lstStyle/>
-          <a:p>
-            <a:pPr algn="l" marL="0" indent="0">
-              <a:buNone/>
-            </a:pPr>
-            <a:r>
-              <a:rPr lang="pt-BR" sz="1800" b="1" dirty="0">
-                <a:solidFill>
-                  <a:srgbClr val="F7941D"/>
-                </a:solidFill>
-                <a:latin typeface="+mn-lt"/>
-              </a:rPr>
-              <a:t>6  </a:t>
-            </a:r>
-            <a:r>
-              <a:rPr lang="pt-BR" sz="1500" b="1" dirty="0">
-                <a:solidFill>
-                  <a:srgbClr val="004A91"/>
-                </a:solidFill>
-                <a:latin typeface="+mn-lt"/>
-              </a:rPr>
-              <a:t>Lavagem finalizada</a:t>
-            </a:r>
-          </a:p>
-          <a:p>
-            <a:pPr algn="l" marL="0" indent="0">
-              <a:buNone/>
-            </a:pPr>
-            <a:r>
-              <a:rPr lang="pt-BR" sz="1200" dirty="0">
-                <a:solidFill>
-                  <a:srgbClr val="5B6B7F"/>
-                </a:solidFill>
-                <a:latin typeface="+mn-lt"/>
-              </a:rPr>
-              <a:t>lavador conclui</a:t>
-            </a:r>
-          </a:p>
-        </p:txBody>
-      </p:sp>
-      <p:cxnSp>
-        <p:nvCxnSpPr>
-          <p:cNvPr id="114" name="Seta 114"/>
-          <p:cNvCxnSpPr/>
-          <p:nvPr/>
-        </p:nvCxnSpPr>
-        <p:spPr>
-          <a:xfrm>
-            <a:off x="5910000" y="2900000"/>
-            <a:ext cx="290000" cy="0"/>
-          </a:xfrm>
-          <a:prstGeom prst="straightConnector1">
-            <a:avLst/>
-          </a:prstGeom>
-          <a:ln w="28575">
-            <a:solidFill>
-              <a:srgbClr val="004A91"/>
-            </a:solidFill>
-            <a:tailEnd type="triangle"/>
-          </a:ln>
-        </p:spPr>
-      </p:cxnSp>
-      <p:sp>
-        <p:nvSpPr>
-          <p:cNvPr id="115" name="Forma 115"/>
-          <p:cNvSpPr/>
-          <p:nvPr/>
-        </p:nvSpPr>
-        <p:spPr>
-          <a:xfrm>
-            <a:off x="6220000" y="2450000"/>
-            <a:ext cx="2400000" cy="900000"/>
-          </a:xfrm>
-          <a:prstGeom prst="roundRect">
-            <a:avLst>
-              <a:gd name="adj" fmla="val 12000"/>
-            </a:avLst>
-          </a:prstGeom>
-          <a:solidFill>
-            <a:srgbClr val="E8F1FB"/>
-          </a:solidFill>
-          <a:ln w="12700">
-            <a:solidFill>
-              <a:srgbClr val="004A91"/>
-            </a:solidFill>
-          </a:ln>
-        </p:spPr>
-        <p:txBody>
-          <a:bodyPr wrap="square" lIns="91440" tIns="91440" rIns="91440" bIns="91440" anchor="ctr">
-            <a:noAutofit/>
-          </a:bodyPr>
-          <a:lstStyle/>
-          <a:p>
-            <a:pPr algn="l" marL="0" indent="0">
-              <a:buNone/>
-            </a:pPr>
-            <a:r>
-              <a:rPr lang="pt-BR" sz="1800" b="1" dirty="0">
-                <a:solidFill>
-                  <a:srgbClr val="F7941D"/>
-                </a:solidFill>
-                <a:latin typeface="+mn-lt"/>
-              </a:rPr>
-              <a:t>7  </a:t>
-            </a:r>
-            <a:r>
-              <a:rPr lang="pt-BR" sz="1500" b="1" dirty="0">
-                <a:solidFill>
-                  <a:srgbClr val="004A91"/>
-                </a:solidFill>
-                <a:latin typeface="+mn-lt"/>
-              </a:rPr>
-              <a:t>Pagamento</a:t>
-            </a:r>
-          </a:p>
-          <a:p>
-            <a:pPr algn="l" marL="0" indent="0">
-              <a:buNone/>
-            </a:pPr>
-            <a:r>
-              <a:rPr lang="pt-BR" sz="1200" dirty="0">
-                <a:solidFill>
-                  <a:srgbClr val="5B6B7F"/>
-                </a:solidFill>
-                <a:latin typeface="+mn-lt"/>
-              </a:rPr>
-              <a:t>simulado</a:t>
-            </a:r>
-          </a:p>
-        </p:txBody>
-      </p:sp>
-      <p:cxnSp>
-        <p:nvCxnSpPr>
-          <p:cNvPr id="116" name="Seta 116"/>
-          <p:cNvCxnSpPr/>
-          <p:nvPr/>
-        </p:nvCxnSpPr>
-        <p:spPr>
-          <a:xfrm>
-            <a:off x="8640000" y="2900000"/>
-            <a:ext cx="290000" cy="0"/>
-          </a:xfrm>
-          <a:prstGeom prst="straightConnector1">
-            <a:avLst/>
-          </a:prstGeom>
-          <a:ln w="28575">
-            <a:solidFill>
-              <a:srgbClr val="004A91"/>
-            </a:solidFill>
-            <a:tailEnd type="triangle"/>
-          </a:ln>
-        </p:spPr>
-      </p:cxnSp>
-      <p:sp>
-        <p:nvSpPr>
-          <p:cNvPr id="117" name="Forma 117"/>
-          <p:cNvSpPr/>
-          <p:nvPr/>
-        </p:nvSpPr>
-        <p:spPr>
-          <a:xfrm>
-            <a:off x="8950000" y="2450000"/>
-            <a:ext cx="2400000" cy="900000"/>
-          </a:xfrm>
-          <a:prstGeom prst="roundRect">
-            <a:avLst>
-              <a:gd name="adj" fmla="val 12000"/>
-            </a:avLst>
-          </a:prstGeom>
-          <a:solidFill>
-            <a:srgbClr val="FFF1DC"/>
-          </a:solidFill>
-          <a:ln w="12700">
-            <a:solidFill>
-              <a:srgbClr val="F7941D"/>
-            </a:solidFill>
-          </a:ln>
-        </p:spPr>
-        <p:txBody>
-          <a:bodyPr wrap="square" lIns="91440" tIns="91440" rIns="91440" bIns="91440" anchor="ctr">
-            <a:noAutofit/>
-          </a:bodyPr>
-          <a:lstStyle/>
-          <a:p>
-            <a:pPr algn="l" marL="0" indent="0">
-              <a:buNone/>
-            </a:pPr>
-            <a:r>
-              <a:rPr lang="pt-BR" sz="1800" b="1" dirty="0">
-                <a:solidFill>
-                  <a:srgbClr val="F7941D"/>
-                </a:solidFill>
-                <a:latin typeface="+mn-lt"/>
-              </a:rPr>
-              <a:t>8  </a:t>
-            </a:r>
-            <a:r>
-              <a:rPr lang="pt-BR" sz="1500" b="1" dirty="0">
-                <a:solidFill>
-                  <a:srgbClr val="004A91"/>
-                </a:solidFill>
-                <a:latin typeface="+mn-lt"/>
-              </a:rPr>
-              <a:t>Avaliação</a:t>
-            </a:r>
-          </a:p>
-          <a:p>
-            <a:pPr algn="l" marL="0" indent="0">
-              <a:buNone/>
-            </a:pPr>
-            <a:r>
-              <a:rPr lang="pt-BR" sz="1200" dirty="0">
-                <a:solidFill>
-                  <a:srgbClr val="5B6B7F"/>
-                </a:solidFill>
-                <a:latin typeface="+mn-lt"/>
-              </a:rPr>
-              <a:t>estrelas e comentário</a:t>
-            </a:r>
-          </a:p>
-        </p:txBody>
-      </p:sp>
-      <p:sp>
-        <p:nvSpPr>
-          <p:cNvPr id="118" name="Forma 118"/>
-          <p:cNvSpPr/>
-          <p:nvPr/>
-        </p:nvSpPr>
-        <p:spPr>
-          <a:xfrm>
-            <a:off x="760000" y="3850000"/>
-            <a:ext cx="3380000" cy="2250000"/>
-          </a:xfrm>
-          <a:prstGeom prst="roundRect">
-            <a:avLst>
-              <a:gd name="adj" fmla="val 6000"/>
-            </a:avLst>
-          </a:prstGeom>
-          <a:solidFill>
-            <a:srgbClr val="E8F1FB"/>
-          </a:solidFill>
-          <a:ln w="12700">
-            <a:solidFill>
-              <a:srgbClr val="004A91"/>
-            </a:solidFill>
-          </a:ln>
-        </p:spPr>
-        <p:txBody>
-          <a:bodyPr wrap="square" lIns="137160" tIns="137160" rIns="137160" bIns="137160" anchor="t">
-            <a:noAutofit/>
-          </a:bodyPr>
-          <a:lstStyle/>
-          <a:p>
-            <a:pPr algn="l" marL="0" indent="0">
-              <a:spcAft>
-                <a:spcPts val="600"/>
-              </a:spcAft>
-              <a:buNone/>
-            </a:pPr>
-            <a:r>
-              <a:rPr lang="pt-BR" sz="1800" b="1" dirty="0">
-                <a:solidFill>
-                  <a:srgbClr val="004A91"/>
-                </a:solidFill>
-                <a:latin typeface="+mn-lt"/>
-              </a:rPr>
-              <a:t>Sem recarregar a tela</a:t>
-            </a:r>
-          </a:p>
-          <a:p>
-            <a:pPr algn="l" marL="0" indent="0">
-              <a:spcAft>
-                <a:spcPts val="400"/>
-              </a:spcAft>
-              <a:buNone/>
-            </a:pPr>
-            <a:r>
-              <a:rPr lang="pt-BR" sz="1400" dirty="0">
-                <a:solidFill>
-                  <a:srgbClr val="1F2937"/>
-                </a:solidFill>
-                <a:latin typeface="+mn-lt"/>
-              </a:rPr>
-              <a:t>Cada etapa chega ao outro aparelho na hora (WebSocket do Supabase Realtime), com atualização de segurança a cada 8 segundos.</a:t>
-            </a:r>
-          </a:p>
-        </p:txBody>
-      </p:sp>
-      <p:sp>
-        <p:nvSpPr>
-          <p:cNvPr id="119" name="Forma 119"/>
-          <p:cNvSpPr/>
-          <p:nvPr/>
-        </p:nvSpPr>
-        <p:spPr>
-          <a:xfrm>
-            <a:off x="4405000" y="3850000"/>
-            <a:ext cx="3380000" cy="2250000"/>
-          </a:xfrm>
-          <a:prstGeom prst="roundRect">
-            <a:avLst>
-              <a:gd name="adj" fmla="val 6000"/>
-            </a:avLst>
-          </a:prstGeom>
-          <a:solidFill>
-            <a:srgbClr val="E8F1FB"/>
-          </a:solidFill>
-          <a:ln w="12700">
-            <a:solidFill>
-              <a:srgbClr val="004A91"/>
-            </a:solidFill>
-          </a:ln>
-        </p:spPr>
-        <p:txBody>
-          <a:bodyPr wrap="square" lIns="137160" tIns="137160" rIns="137160" bIns="137160" anchor="t">
-            <a:noAutofit/>
-          </a:bodyPr>
-          <a:lstStyle/>
-          <a:p>
-            <a:pPr algn="l" marL="0" indent="0">
-              <a:spcAft>
-                <a:spcPts val="600"/>
-              </a:spcAft>
-              <a:buNone/>
-            </a:pPr>
-            <a:r>
-              <a:rPr lang="pt-BR" sz="1800" b="1" dirty="0">
-                <a:solidFill>
-                  <a:srgbClr val="004A91"/>
-                </a:solidFill>
-                <a:latin typeface="+mn-lt"/>
-              </a:rPr>
-              <a:t>Início comprovado</a:t>
-            </a:r>
-          </a:p>
-          <a:p>
-            <a:pPr algn="l" marL="0" indent="0">
-              <a:spcAft>
-                <a:spcPts val="400"/>
-              </a:spcAft>
-              <a:buNone/>
-            </a:pPr>
-            <a:r>
-              <a:rPr lang="pt-BR" sz="1400" dirty="0">
-                <a:solidFill>
-                  <a:srgbClr val="1F2937"/>
-                </a:solidFill>
-                <a:latin typeface="+mn-lt"/>
-              </a:rPr>
-              <a:t>O lavador só inicia com o código de 6 dígitos (ou o QR) do cliente. O servidor confere e bloqueia por 5 minutos após 5 erros.</a:t>
-            </a:r>
-          </a:p>
-        </p:txBody>
-      </p:sp>
-      <p:sp>
-        <p:nvSpPr>
-          <p:cNvPr id="120" name="Forma 120"/>
-          <p:cNvSpPr/>
-          <p:nvPr/>
-        </p:nvSpPr>
-        <p:spPr>
-          <a:xfrm>
-            <a:off x="8050000" y="3850000"/>
-            <a:ext cx="3380000" cy="2250000"/>
-          </a:xfrm>
-          <a:prstGeom prst="roundRect">
-            <a:avLst>
-              <a:gd name="adj" fmla="val 6000"/>
-            </a:avLst>
-          </a:prstGeom>
-          <a:solidFill>
-            <a:srgbClr val="E8F1FB"/>
-          </a:solidFill>
-          <a:ln w="12700">
-            <a:solidFill>
-              <a:srgbClr val="004A91"/>
-            </a:solidFill>
-          </a:ln>
-        </p:spPr>
-        <p:txBody>
-          <a:bodyPr wrap="square" lIns="137160" tIns="137160" rIns="137160" bIns="137160" anchor="t">
-            <a:noAutofit/>
-          </a:bodyPr>
-          <a:lstStyle/>
-          <a:p>
-            <a:pPr algn="l" marL="0" indent="0">
-              <a:spcAft>
-                <a:spcPts val="600"/>
-              </a:spcAft>
-              <a:buNone/>
-            </a:pPr>
-            <a:r>
-              <a:rPr lang="pt-BR" sz="1800" b="1" dirty="0">
-                <a:solidFill>
-                  <a:srgbClr val="004A91"/>
-                </a:solidFill>
-                <a:latin typeface="+mn-lt"/>
-              </a:rPr>
-              <a:t>Palco da demonstração</a:t>
-            </a:r>
-          </a:p>
-          <a:p>
-            <a:pPr algn="l" marL="0" indent="0">
-              <a:spcAft>
-                <a:spcPts val="400"/>
-              </a:spcAft>
-              <a:buNone/>
-            </a:pPr>
-            <a:r>
-              <a:rPr lang="pt-BR" sz="1400" dirty="0">
-                <a:solidFill>
-                  <a:srgbClr val="1F2937"/>
-                </a:solidFill>
-                <a:latin typeface="+mn-lt"/>
-              </a:rPr>
-              <a:t>Cliente e lavador lado a lado na mesma tela, com sessões separadas: um notebook no telão basta.</a:t>
+              <a:t>Capturas do ambiente de testes automatizados. Os mapas carregam do OpenStreetMap quando há internet.</a:t>
             </a:r>
           </a:p>
         </p:txBody>
